--- a/docs/W07/ViVQA-VLM_Review2_TV.pptx
+++ b/docs/W07/ViVQA-VLM_Review2_TV.pptx
@@ -122,43 +122,43 @@
   <p:extLst>
     <p:ext uri="{521415D9-36F7-43E2-AB2F-B90AF26B5E84}">
       <p14:sectionLst xmlns:p14="http://schemas.microsoft.com/office/powerpoint/2010/main">
-        <p14:section name="Mở đầu" id="{6ebdc07e-b8a5-a46e-ccb2-22b1848c069b}">
+        <p14:section name="Mở đầu" id="{e53dfa25-c8bd-f8cd-6387-125e646ed14a}">
           <p14:sldIdLst>
             <p14:sldId id="256"/>
           </p14:sldIdLst>
         </p14:section>
-        <p14:section name="Tóm tắt" id="{6de6d1b6-c4bf-845a-6902-9bc14d9a4e78}">
+        <p14:section name="Tóm tắt" id="{603673d3-1130-268e-6b64-cd427df62524}">
           <p14:sldIdLst>
             <p14:sldId id="257"/>
           </p14:sldIdLst>
         </p14:section>
-        <p14:section name="Góp ý" id="{de61d8f8-65d7-9010-1fff-7a1031ced007}">
+        <p14:section name="Góp ý" id="{debf498f-3ae1-0d1c-9a8b-7555155eecba}">
           <p14:sldIdLst>
             <p14:sldId id="258"/>
           </p14:sldIdLst>
         </p14:section>
-        <p14:section name="Dữ liệu &amp; baseline" id="{4bf8313d-060f-d78b-7a31-01d9b5e7967d}">
+        <p14:section name="Dữ liệu &amp; baseline" id="{bf647407-818f-240b-5fe2-390bd9611db2}">
           <p14:sldIdLst>
             <p14:sldId id="259"/>
             <p14:sldId id="260"/>
             <p14:sldId id="261"/>
           </p14:sldIdLst>
         </p14:section>
-        <p14:section name="Kết quả" id="{dadcd964-54d2-0dbf-272f-e9ec86ca1801}">
+        <p14:section name="Kết quả" id="{3f44b0c2-fc99-3063-7b14-b343b3caf26f}">
           <p14:sldIdLst>
             <p14:sldId id="262"/>
             <p14:sldId id="263"/>
             <p14:sldId id="264"/>
           </p14:sldIdLst>
         </p14:section>
-        <p14:section name="Cải tiến" id="{71b4df1d-a882-eaba-4c13-85d9ff4d9d07}">
+        <p14:section name="Cải tiến" id="{8e23aee5-ea8b-8606-77df-1a2a1d98c2a5}">
           <p14:sldIdLst>
             <p14:sldId id="265"/>
             <p14:sldId id="266"/>
             <p14:sldId id="267"/>
           </p14:sldIdLst>
         </p14:section>
-        <p14:section name="Phân tích &amp; kế hoạch" id="{79831562-7a85-e807-524c-da3685fa5713}">
+        <p14:section name="Phân tích &amp; kế hoạch" id="{46582316-df7e-7ad2-a796-230cb6256bde}">
           <p14:sldIdLst>
             <p14:sldId id="268"/>
             <p14:sldId id="269"/>
@@ -2484,7 +2484,7 @@
           <a:p>
             <a:r>
               <a:rPr lang="en-US" dirty="0"/>
-              <a:t>Đối chiếu với các giả thuyết đã nêu ở Review 1. H1 được ủng hộ mạnh. H2 chỉ đạt một nửa: VRAM giảm nhiều nhưng độ chính xác giữ 94,5%, dưới mức 97%. H7 chưa được ủng hộ với dạng few-shot đã thử. H8 về hallucination đang chờ kết quả duyệt tay. H3 đến H6 thuộc kế hoạch W8 đến W12.</a:t>
+              <a:t>Đối chiếu với các giả thuyết đã nêu ở Review 1. H1 được ủng hộ mạnh. H2 chỉ đạt một nửa: VRAM giảm nhiều nhưng độ chính xác giữ 94,5%, dưới mức 97%. H7 chưa được ủng hộ với dạng few-shot đã thử. H8: duyệt tay 200 lỗi của B2 cho thấy chỉ khoảng 7% là hallucination thật; nhưng H8 so sánh với zero-shot, nên cần đo thêm B1 ở tuần 11 — vì vậy vẫn để Đang chờ. H3 đến H6 thuộc kế hoạch W8 đến W12.</a:t>
             </a:r>
             <a:endParaRPr lang="en-US" dirty="0"/>
           </a:p>
@@ -2572,7 +2572,7 @@
           <a:p>
             <a:r>
               <a:rPr lang="en-US" dirty="0"/>
-              <a:t>Phân loại tự động 4.988 câu B2 còn sai trên full test ViTextVQA. 9% chỉ sai dấu thanh, ví dụ thủy và thúy — đây là thách thức riêng của tiếng Việt. 17% chỉ lệch một hai ký tự, thường là đọc chữ hoặc số. Khoảng 27% sai về độ dài: thừa hoặc thiếu chữ so với gold. 47% còn lại sai về nội dung hoặc vùng ảnh, cần duyệt tay để tách hallucination; nhóm đang duyệt tay 400 mẫu.</a:t>
+              <a:t>Phân loại tự động 4.988 câu B2 còn sai trên full test ViTextVQA. 9% chỉ sai dấu thanh, ví dụ thủy và thúy — đây là thách thức riêng của tiếng Việt. 17% chỉ lệch một hai ký tự, thường là đọc chữ hoặc số. Khoảng 27% sai về độ dài: thừa hoặc thiếu chữ so với gold. 47% còn lại sai về nội dung hoặc vùng ảnh. Nhóm đã duyệt tay 200 lỗi của B2 có xem ảnh, 4 người cùng nhãn gợi ý của AI, trưởng nhóm phân xử các chỗ lệch. Kết quả: 54% câu bị EM chấm sai thực ra đúng ý — EM quá khắt khe; 12,5% do gold nhiễu; ở ViTextVQA lỗi thật chủ yếu là đọc sai chữ 28% và đọc nhầm vùng chữ 23%; hallucination thật chỉ 7%. Độ đồng thuận giữa hai người gán nhãn độc lập kappa 0,62; bỏ 42 dòng có AI hỗ trợ thì kết luận không đổi.</a:t>
             </a:r>
             <a:endParaRPr lang="en-US" dirty="0"/>
           </a:p>
@@ -8836,7 +8836,7 @@
                           <a:ea typeface="Calibri" pitchFamily="34" charset="-122"/>
                           <a:cs typeface="Calibri" pitchFamily="34" charset="-120"/>
                         </a:rPr>
-                        <a:t>Đang duyệt tay lỗi của B2</a:t>
+                        <a:t>Duyệt tay: 7% lỗi của B2 là hallucination (CI 4–11%); so với B1 ở W11</a:t>
                       </a:r>
                       <a:endParaRPr lang="en-US" sz="1400" dirty="0">
                         <a:latin typeface="Calibri" charset="0"/>
@@ -10276,7 +10276,7 @@
                 <a:ea typeface="Calibri" pitchFamily="34" charset="-122"/>
                 <a:cs typeface="Calibri" pitchFamily="34" charset="-120"/>
               </a:rPr>
-              <a:t>Duyệt tay (400 mẫu, đang làm)</a:t>
+              <a:t>Duyệt tay 200 lỗi B2 (đã phân xử)</a:t>
             </a:r>
             <a:endParaRPr lang="en-US" sz="1600" dirty="0"/>
           </a:p>
@@ -10290,8 +10290,8 @@
         </p:nvSpPr>
         <p:spPr>
           <a:xfrm>
-            <a:off x="7589520" y="2286000"/>
-            <a:ext cx="3779215" cy="3840480"/>
+            <a:off x="7589520" y="2194560"/>
+            <a:ext cx="3779215" cy="3977640"/>
           </a:xfrm>
           <a:prstGeom prst="rect">
             <a:avLst/>
@@ -10311,7 +10311,7 @@
               <a:buChar char="•"/>
             </a:pPr>
             <a:r>
-              <a:rPr lang="en-US" sz="1400" dirty="0">
+              <a:rPr lang="en-US" sz="1500" dirty="0">
                 <a:solidFill>
                   <a:schemeClr val="tx1"/>
                 </a:solidFill>
@@ -10319,9 +10319,9 @@
                 <a:ea typeface="Calibri" pitchFamily="34" charset="-122"/>
                 <a:cs typeface="Calibri" pitchFamily="34" charset="-120"/>
               </a:rPr>
-              <a:t>200 lỗi của B2: định dạng, đồng nghĩa, OCR, dấu thanh, sai vùng / hallucination, chen tiếng Anh, đếm, gold nhiễu</a:t>
+              <a:t>54% thực ra đúng ý: EM quá khắt khe (ViVQA 62%, ViTextVQA 46%)</a:t>
             </a:r>
-            <a:endParaRPr lang="en-US" sz="1400" dirty="0"/>
+            <a:endParaRPr lang="en-US" sz="1500" dirty="0"/>
           </a:p>
           <a:p>
             <a:pPr marL="177800" indent="-177800">
@@ -10332,7 +10332,7 @@
               <a:buChar char="•"/>
             </a:pPr>
             <a:r>
-              <a:rPr lang="en-US" sz="1400" dirty="0">
+              <a:rPr lang="en-US" sz="1500" dirty="0">
                 <a:solidFill>
                   <a:schemeClr val="tx1"/>
                 </a:solidFill>
@@ -10340,9 +10340,9 @@
                 <a:ea typeface="Calibri" pitchFamily="34" charset="-122"/>
                 <a:cs typeface="Calibri" pitchFamily="34" charset="-120"/>
               </a:rPr>
-              <a:t>200 nhãn train: đúng / sai / mơ hồ + loại nhiễu</a:t>
+              <a:t>Gold nhiễu: 12,5% (ViVQA 19%)</a:t>
             </a:r>
-            <a:endParaRPr lang="en-US" sz="1400" dirty="0"/>
+            <a:endParaRPr lang="en-US" sz="1500" dirty="0"/>
           </a:p>
           <a:p>
             <a:pPr marL="177800" indent="-177800">
@@ -10353,7 +10353,7 @@
               <a:buChar char="•"/>
             </a:pPr>
             <a:r>
-              <a:rPr lang="en-US" sz="1400" dirty="0">
+              <a:rPr lang="en-US" sz="1500" dirty="0">
                 <a:solidFill>
                   <a:schemeClr val="tx1"/>
                 </a:solidFill>
@@ -10361,9 +10361,9 @@
                 <a:ea typeface="Calibri" pitchFamily="34" charset="-122"/>
                 <a:cs typeface="Calibri" pitchFamily="34" charset="-120"/>
               </a:rPr>
-              <a:t>Tách hallucination trong nhóm “khác” 47% → bằng chứng cho H8</a:t>
+              <a:t>Lỗi thật ở ViTextVQA: đọc sai chữ 28%, nhầm vùng chữ 23%, dấu thanh 8%</a:t>
             </a:r>
-            <a:endParaRPr lang="en-US" sz="1400" dirty="0"/>
+            <a:endParaRPr lang="en-US" sz="1500" dirty="0"/>
           </a:p>
           <a:p>
             <a:pPr marL="177800" indent="-177800">
@@ -10374,7 +10374,7 @@
               <a:buChar char="•"/>
             </a:pPr>
             <a:r>
-              <a:rPr lang="en-US" sz="1400" dirty="0">
+              <a:rPr lang="en-US" sz="1500" dirty="0">
                 <a:solidFill>
                   <a:schemeClr val="tx1"/>
                 </a:solidFill>
@@ -10382,9 +10382,30 @@
                 <a:ea typeface="Calibri" pitchFamily="34" charset="-122"/>
                 <a:cs typeface="Calibri" pitchFamily="34" charset="-120"/>
               </a:rPr>
-              <a:t>Chọn mẫu tất định (seed 42), kèm ảnh</a:t>
+              <a:t>Hallucination (không có trong ảnh): 7% số lỗi (CI95 4–11%)</a:t>
             </a:r>
-            <a:endParaRPr lang="en-US" sz="1400" dirty="0"/>
+            <a:endParaRPr lang="en-US" sz="1500" dirty="0"/>
+          </a:p>
+          <a:p>
+            <a:pPr marL="177800" indent="-177800">
+              <a:spcAft>
+                <a:spcPts val="600"/>
+              </a:spcAft>
+              <a:buSzPct val="100000"/>
+              <a:buChar char="•"/>
+            </a:pPr>
+            <a:r>
+              <a:rPr lang="en-US" sz="1500" dirty="0">
+                <a:solidFill>
+                  <a:schemeClr val="tx1"/>
+                </a:solidFill>
+                <a:latin typeface="Calibri" pitchFamily="34" charset="0"/>
+                <a:ea typeface="Calibri" pitchFamily="34" charset="-122"/>
+                <a:cs typeface="Calibri" pitchFamily="34" charset="-120"/>
+              </a:rPr>
+              <a:t>4 người + nhãn gợi ý của AI; κ = 0,62 (2 người độc lập); bỏ 42 dòng có AI hỗ trợ, kết luận không đổi</a:t>
+            </a:r>
+            <a:endParaRPr lang="en-US" sz="1500" dirty="0"/>
           </a:p>
         </p:txBody>
       </p:sp>

--- a/docs/W07/ViVQA-VLM_Review2_TV.pptx
+++ b/docs/W07/ViVQA-VLM_Review2_TV.pptx
@@ -126,36 +126,36 @@
   <p:extLst>
     <p:ext uri="{521415D9-36F7-43E2-AB2F-B90AF26B5E84}">
       <p14:sectionLst xmlns:p14="http://schemas.microsoft.com/office/powerpoint/2010/main">
-        <p14:section name="Mở đầu" id="{00f312dd-d8a0-7e7c-3714-3ac6744c3137}">
+        <p14:section name="Mở đầu" id="{60a872e6-926d-985b-fdd3-8a9e93dd0bba}">
           <p14:sldIdLst>
             <p14:sldId id="256"/>
           </p14:sldIdLst>
         </p14:section>
-        <p14:section name="Tóm tắt" id="{f20e47dc-3411-2d80-009b-ce3b4a96a157}">
+        <p14:section name="Tóm tắt" id="{2356322b-7476-d297-fe5d-850ebd9ca97b}">
           <p14:sldIdLst>
             <p14:sldId id="257"/>
           </p14:sldIdLst>
         </p14:section>
-        <p14:section name="Góp ý" id="{9b9612c5-9f2f-4903-100b-665cecf2926c}">
+        <p14:section name="Góp ý" id="{737f16e9-c80b-deef-73f7-19e0ec7278c6}">
           <p14:sldIdLst>
             <p14:sldId id="258"/>
           </p14:sldIdLst>
         </p14:section>
-        <p14:section name="Dữ liệu &amp; baseline" id="{ae6e4a2c-89da-5231-e11f-c68d0158c5a6}">
+        <p14:section name="Dữ liệu &amp; baseline" id="{9f1fce22-97a5-d174-c2bc-fa5c3cda849a}">
           <p14:sldIdLst>
             <p14:sldId id="259"/>
             <p14:sldId id="260"/>
             <p14:sldId id="261"/>
           </p14:sldIdLst>
         </p14:section>
-        <p14:section name="Kết quả" id="{0424b98f-4bf7-4877-ddee-826c567a337a}">
+        <p14:section name="Kết quả" id="{ffd2df84-9bd8-5ac8-f50e-eaaad0cba864}">
           <p14:sldIdLst>
             <p14:sldId id="262"/>
             <p14:sldId id="263"/>
             <p14:sldId id="264"/>
           </p14:sldIdLst>
         </p14:section>
-        <p14:section name="Cải tiến" id="{ae003218-21a3-ba88-e211-44369eddc3bc}">
+        <p14:section name="Cải tiến" id="{856d8295-d6e3-4386-34ce-f9b4bc59eb3f}">
           <p14:sldIdLst>
             <p14:sldId id="265"/>
             <p14:sldId id="266"/>
@@ -163,7 +163,7 @@
             <p14:sldId id="268"/>
           </p14:sldIdLst>
         </p14:section>
-        <p14:section name="QLoRA nhận biết OCR" id="{76ebc8b2-3b04-771c-f43f-2fb484410aa2}">
+        <p14:section name="QLoRA nhận biết OCR" id="{f0f3fd22-017d-e8a6-aa6a-773fd585a9b2}">
           <p14:sldIdLst>
             <p14:sldId id="269"/>
             <p14:sldId id="270"/>
@@ -171,7 +171,7 @@
             <p14:sldId id="272"/>
           </p14:sldIdLst>
         </p14:section>
-        <p14:section name="Phân tích &amp; kế hoạch" id="{10c5c9b8-8259-f520-c61c-3b492b8d8886}">
+        <p14:section name="Phân tích &amp; kế hoạch" id="{2cada922-af4e-cb14-f938-5604a510a340}">
           <p14:sldIdLst>
             <p14:sldId id="273"/>
             <p14:sldId id="274"/>
@@ -17788,7 +17788,7 @@
                 <a:ea typeface="Calibri" pitchFamily="34" charset="-122"/>
                 <a:cs typeface="Calibri" pitchFamily="34" charset="-120"/>
               </a:rPr>
-              <a:t>Code, config và log mọi run: github.com/PLHGNAOH/ViVQA-VLM</a:t>
+              <a:t>Mọi con số trong bài đều có log và tái lập được (seed, config và giao thức đánh giá cố định).</a:t>
             </a:r>
             <a:endParaRPr lang="en-US" sz="1800" dirty="0"/>
           </a:p>

--- a/docs/W07/ViVQA-VLM_Review2_TV.pptx
+++ b/docs/W07/ViVQA-VLM_Review2_TV.pptx
@@ -25,9 +25,10 @@
     <p:sldId id="273" r:id="rId19"/>
     <p:sldId id="274" r:id="rId20"/>
     <p:sldId id="275" r:id="rId21"/>
+    <p:sldId id="276" r:id="rId22"/>
   </p:sldIdLst>
   <p:notesMasterIdLst>
-    <p:notesMasterId r:id="rId22"/>
+    <p:notesMasterId r:id="rId23"/>
   </p:notesMasterIdLst>
   <p:sldSz cx="12192000" cy="6858000"/>
   <p:notesSz cx="6858000" cy="12192000"/>
@@ -126,56 +127,57 @@
   <p:extLst>
     <p:ext uri="{521415D9-36F7-43E2-AB2F-B90AF26B5E84}">
       <p14:sectionLst xmlns:p14="http://schemas.microsoft.com/office/powerpoint/2010/main">
-        <p14:section name="Mở đầu" id="{60a872e6-926d-985b-fdd3-8a9e93dd0bba}">
+        <p14:section name="Mở đầu" id="{cde2470e-099f-b26f-4f45-0a2b6345740e}">
           <p14:sldIdLst>
             <p14:sldId id="256"/>
           </p14:sldIdLst>
         </p14:section>
-        <p14:section name="Tóm tắt" id="{2356322b-7476-d297-fe5d-850ebd9ca97b}">
+        <p14:section name="Tóm tắt" id="{2bce775a-6390-46e5-69ef-e59d3882ff1c}">
           <p14:sldIdLst>
             <p14:sldId id="257"/>
           </p14:sldIdLst>
         </p14:section>
-        <p14:section name="Góp ý" id="{737f16e9-c80b-deef-73f7-19e0ec7278c6}">
+        <p14:section name="Góp ý" id="{849e6be1-b29c-8ffd-3053-5defd06dc9bb}">
           <p14:sldIdLst>
             <p14:sldId id="258"/>
           </p14:sldIdLst>
         </p14:section>
-        <p14:section name="Dữ liệu &amp; baseline" id="{9f1fce22-97a5-d174-c2bc-fa5c3cda849a}">
+        <p14:section name="Dữ liệu &amp; baseline" id="{f71cb33c-a350-12d8-68ea-284de305483b}">
           <p14:sldIdLst>
             <p14:sldId id="259"/>
             <p14:sldId id="260"/>
             <p14:sldId id="261"/>
           </p14:sldIdLst>
         </p14:section>
-        <p14:section name="Kết quả" id="{ffd2df84-9bd8-5ac8-f50e-eaaad0cba864}">
+        <p14:section name="Kết quả" id="{d2b239e6-9a0c-2101-7f3f-d5eb8394ae3b}">
           <p14:sldIdLst>
             <p14:sldId id="262"/>
             <p14:sldId id="263"/>
             <p14:sldId id="264"/>
           </p14:sldIdLst>
         </p14:section>
-        <p14:section name="Cải tiến" id="{856d8295-d6e3-4386-34ce-f9b4bc59eb3f}">
+        <p14:section name="Cải tiến" id="{cbef7d6a-46b2-5a10-99d7-fa6f023cf5a6}">
           <p14:sldIdLst>
             <p14:sldId id="265"/>
             <p14:sldId id="266"/>
             <p14:sldId id="267"/>
             <p14:sldId id="268"/>
+            <p14:sldId id="269"/>
           </p14:sldIdLst>
         </p14:section>
-        <p14:section name="QLoRA nhận biết OCR" id="{f0f3fd22-017d-e8a6-aa6a-773fd585a9b2}">
+        <p14:section name="QLoRA nhận biết OCR" id="{5ff20dde-7383-63f8-772a-6cb3da0c7b6a}">
           <p14:sldIdLst>
-            <p14:sldId id="269"/>
             <p14:sldId id="270"/>
             <p14:sldId id="271"/>
             <p14:sldId id="272"/>
+            <p14:sldId id="273"/>
           </p14:sldIdLst>
         </p14:section>
-        <p14:section name="Phân tích &amp; kế hoạch" id="{2cada922-af4e-cb14-f938-5604a510a340}">
+        <p14:section name="Phân tích &amp; kế hoạch" id="{752b7a6e-2775-4432-6980-b0cbcc349e9a}">
           <p14:sldIdLst>
-            <p14:sldId id="273"/>
             <p14:sldId id="274"/>
             <p14:sldId id="275"/>
+            <p14:sldId id="276"/>
           </p14:sldIdLst>
         </p14:section>
       </p14:sectionLst>
@@ -3163,7 +3165,7 @@
           <a:p>
             <a:r>
               <a:rPr lang="en-US" dirty="0"/>
-              <a:t>Phân loại tự động 4.988 câu B2 còn sai trên full test ViTextVQA. 9% chỉ sai dấu thanh, ví dụ thủy và thúy — đây là thách thức riêng của tiếng Việt. 17% chỉ lệch một hai ký tự, thường là đọc chữ hoặc số. Khoảng 27% sai về độ dài: thừa hoặc thiếu chữ so với gold. 47% còn lại sai về nội dung hoặc vùng ảnh. Nhóm đã duyệt tay 200 lỗi của B2 có xem ảnh, 4 người cùng nhãn gợi ý của AI, trưởng nhóm phân xử các chỗ lệch. Kết quả: 54% câu bị EM chấm sai thực ra đúng ý — EM quá khắt khe; 12,5% do gold nhiễu; ở ViTextVQA lỗi thật chủ yếu là đọc sai chữ 28% và đọc nhầm vùng chữ 23%; hallucination thật chỉ 7%. Chính các lỗi đọc chữ này dẫn tới phương pháp đề xuất ở phần sau. Độ đồng thuận giữa hai người gán nhãn độc lập kappa 0,62; bỏ 42 dòng có AI hỗ trợ thì kết luận không đổi.</a:t>
+              <a:t>Đây là quy trình của SOTA. ViTextBLIP-2 giữ đóng băng một Vision Transformer, một hệ OCR là SwinTextSpotter dùng nguyên không fine-tune, và mô hình ngôn ngữ tiếng Việt ViT5; phần duy nhất được train là Q-Former khởi tạo từ BLIP-2, có nhiệm vụ trộn đặc trưng ảnh, câu hỏi và chữ OCR. Paper cũng chỉ ra sắp xếp chữ OCR từ trái-trên xuống phải-dưới giúp hầu hết các model. Nhóm khác ở ba điểm. Một: dùng một VLM đã được pretrain sẵn khả năng đọc chữ, Qwen2.5-VL-3B, lượng tử 4-bit. Hai: chỉ gắn LoRA, 0,2% tham số. Ba: B2 không dùng OCR ngoài — model tự đọc chữ từ ảnh; OCR được đưa vào ở B3, phần 06, dưới dạng một dòng văn bản trong prompt. Về đánh giá, paper báo EM và F1 nhưng không công bố cách chuẩn hoá; nhóm báo thêm ANLS và công khai hàm chuẩn hoá. Một lưu ý khi đọc paper: con số 25,48 / 53,95 nằm ở cột sắp xếp theo độ tin cậy OCR của Table 10, còn bảng ablation lại báo 24,83 / 52,51 cho model đầy đủ — paper không giải thích chênh lệch này.</a:t>
             </a:r>
             <a:endParaRPr lang="en-US" dirty="0"/>
           </a:p>
@@ -3251,7 +3253,7 @@
           <a:p>
             <a:r>
               <a:rPr lang="en-US" dirty="0"/>
-              <a:t>Từ phân tích lỗi, nhóm đề xuất B3: QLoRA nhận biết OCR. Ảnh được chạy OCR trước — PaddleOCR dò vùng chữ, VietOCR đọc chữ tiếng Việt — rồi đúng một dòng 'Văn bản đọc được trong ảnh' được chèn trước câu hỏi. Điểm mấu chốt: dòng OCR có mặt cả lúc train lẫn lúc test, nên model học khi nào tin OCR, khi nào tin ảnh. Backend OCR được chọn trên dev300 bằng luật chốt trước: PaddleOCR bản Latin làm rơi dấu tiếng Việt, ví dụ 'Kiểu Thẩm' thành 'Kiu Thm'; VietOCR giữ được đáp án trong văn bản OCR ở 37,7% câu so với 27,0%.</a:t>
+              <a:t>Phân loại tự động 4.988 câu B2 còn sai trên full test ViTextVQA. 9% chỉ sai dấu thanh, ví dụ thủy và thúy — đây là thách thức riêng của tiếng Việt. 17% chỉ lệch một hai ký tự, thường là đọc chữ hoặc số. Khoảng 27% sai về độ dài: thừa hoặc thiếu chữ so với gold. 47% còn lại sai về nội dung hoặc vùng ảnh. Nhóm đã duyệt tay 200 lỗi của B2 có xem ảnh, 4 người cùng nhãn gợi ý của AI, trưởng nhóm phân xử các chỗ lệch. Kết quả: 54% câu bị EM chấm sai thực ra đúng ý — EM quá khắt khe; 12,5% do gold nhiễu; ở ViTextVQA lỗi thật chủ yếu là đọc sai chữ 28% và đọc nhầm vùng chữ 23%; hallucination thật chỉ 7%. Chính các lỗi đọc chữ này dẫn tới phương pháp đề xuất ở phần sau. Độ đồng thuận giữa hai người gán nhãn độc lập kappa 0,62; bỏ 42 dòng có AI hỗ trợ thì kết luận không đổi. Nguồn từng con số ghi ở chân trang: lệnh tái tạo phân loại tự động và file kết quả duyệt tay trong repo.</a:t>
             </a:r>
             <a:endParaRPr lang="en-US" dirty="0"/>
           </a:p>
@@ -3339,7 +3341,7 @@
           <a:p>
             <a:r>
               <a:rPr lang="en-US" dirty="0"/>
-              <a:t>Đây là ablation bắt buộc có và không có OCR, làm thành bảng hai nhân hai trên cùng tập con và cùng 2.000 câu test. Chỉ chèn OCR lúc test cho model chưa train cùng OCR: không tăng, kể cả với zero-shot B1 và B2 ở tuần 8. Train cùng OCR mà lúc test bỏ OCR: cũng không tăng. Chỉ khi có cả hai thì EM tăng 4,35 điểm, p cỡ 10 mũ trừ 8. Tương tác là 4,9 điểm, khoảng tin cậy 3,2 đến 6,6. Vậy đóng góp không phải là thêm OCR vào prompt, mà là dạy model cách dùng OCR.</a:t>
+              <a:t>Từ phân tích lỗi, nhóm đề xuất B3: QLoRA nhận biết OCR. Ảnh được chạy OCR trước — PaddleOCR dò vùng chữ, VietOCR đọc chữ tiếng Việt — rồi đúng một dòng 'Văn bản đọc được trong ảnh' được chèn trước câu hỏi. Điểm mấu chốt: dòng OCR có mặt cả lúc train lẫn lúc test, nên model học khi nào tin OCR, khi nào tin ảnh. Backend OCR được chọn trên dev300 bằng luật chốt trước: PaddleOCR bản Latin làm rơi dấu tiếng Việt, ví dụ 'Kiểu Thẩm' thành 'Kiu Thm'; VietOCR giữ được đáp án trong văn bản OCR ở 37,7% câu so với 27,0%.</a:t>
             </a:r>
             <a:endParaRPr lang="en-US" dirty="0"/>
           </a:p>
@@ -3427,7 +3429,7 @@
           <a:p>
             <a:r>
               <a:rPr lang="en-US" dirty="0"/>
-              <a:t>Hai câu hỏi hội đồng hay đặt: một seed có phải may mắn không, và tập con có đại diện không. Ba seed huấn luyện 42, 43, 44, cùng tập con: cả ba seed B3 đều thắng B2-sub có ý nghĩa, trung bình cộng 3,57 điểm EM, độ lệch chuẩn 0,76. Trên toàn bộ 10.028 câu test, B3 thắng B2-sub 2,54 điểm, p cỡ 10 mũ trừ 14, và cao hơn ViTextBLIP-2 ở cả EM lẫn F1. Nhóm cũng đính chính: B3 dùng 23% dữ liệu vẫn thấp hơn B2 train toàn bộ 1,16 điểm; OCR bù được khoảng 69% phần mất do cắt dữ liệu. Về ANLS, mức tăng là 1,55 điểm, dưới ngưỡng 3 điểm của H6.</a:t>
+              <a:t>Đây là ablation bắt buộc có và không có OCR, làm thành bảng hai nhân hai trên cùng tập con và cùng 2.000 câu test. Chỉ chèn OCR lúc test cho model chưa train cùng OCR: không tăng, kể cả với zero-shot B1 và B2 ở tuần 8. Train cùng OCR mà lúc test bỏ OCR: cũng không tăng. Chỉ khi có cả hai thì EM tăng 4,35 điểm, p cỡ 10 mũ trừ 8. Tương tác là 4,9 điểm, khoảng tin cậy 3,2 đến 6,6. Vậy đóng góp không phải là thêm OCR vào prompt, mà là dạy model cách dùng OCR.</a:t>
             </a:r>
             <a:endParaRPr lang="en-US" dirty="0"/>
           </a:p>
@@ -3515,7 +3517,7 @@
           <a:p>
             <a:r>
               <a:rPr lang="en-US" dirty="0"/>
-              <a:t>Với ViVQA, câu hỏi là train một hay hai epoch. Val của ViVQA được tách theo câu hỏi nên 43% câu val dùng chung ảnh với train; train lâu hơn dễ nhớ ảnh và làm val đẹp giả. Vì vậy nhóm chỉ chọn epoch trên 688 câu val có ảnh chưa từng xuất hiện trong train. Lịch hai epoch sau epoch 2 hơn B2 một epoch 3,9 điểm, có ý nghĩa, nên được chọn. Chỉ khi đó mới chấm test, một lần: EM tăng từ 73,8 lên 76,6, p cỡ 10 mũ trừ 9. Kiểm tra thêm sau khi có kết quả: trên phần test sạch, ảnh và cặp hỏi đáp chưa từng thấy, mức tăng vẫn là 3,2 điểm — nên đây không phải do model nhớ ảnh. Chi phí: gấp đôi thời gian train, 6,1 giờ.</a:t>
+              <a:t>Hai câu hỏi hội đồng hay đặt: một seed có phải may mắn không, và tập con có đại diện không. Ba seed huấn luyện 42, 43, 44, cùng tập con: cả ba seed B3 đều thắng B2-sub có ý nghĩa, trung bình cộng 3,57 điểm EM, độ lệch chuẩn 0,76. Trên toàn bộ 10.028 câu test, B3 thắng B2-sub 2,54 điểm, p cỡ 10 mũ trừ 14, và cao hơn ViTextBLIP-2 ở cả EM lẫn F1. Nhóm cũng đính chính: B3 dùng 23% dữ liệu vẫn thấp hơn B2 train toàn bộ 1,16 điểm; OCR bù được khoảng 69% phần mất do cắt dữ liệu. Về ANLS, mức tăng là 1,55 điểm, dưới ngưỡng 3 điểm của H6.</a:t>
             </a:r>
             <a:endParaRPr lang="en-US" dirty="0"/>
           </a:p>
@@ -3603,7 +3605,7 @@
           <a:p>
             <a:r>
               <a:rPr lang="en-US" dirty="0"/>
-              <a:t>Đối chiếu với các giả thuyết đã nêu ở Review 1. H1 được ủng hộ mạnh. H2 chỉ đạt một nửa: VRAM giảm nhiều nhưng độ chính xác giữ 94,5%, dưới mức 97%. H7 chưa được ủng hộ với dạng few-shot đã thử. H8: duyệt tay 200 lỗi của B2 cho thấy chỉ khoảng 7% là hallucination thật; nhưng H8 so sánh với zero-shot, nên cần đo thêm B1 ở tuần 11 — vì vậy vẫn để Đang chờ. H6 chỉ ủng hộ một phần: OCR cộng hưởng mạnh với QLoRA, nhưng ANLS chỉ tăng 1,55 điểm, dưới ngưỡng 3 điểm đã đặt — nhóm báo đúng như vậy. H3 đến H5 thuộc kế hoạch tuần 10 đến 12.</a:t>
+              <a:t>Với ViVQA, câu hỏi là train một hay hai epoch. Val của ViVQA được tách theo câu hỏi nên 43% câu val dùng chung ảnh với train; train lâu hơn dễ nhớ ảnh và làm val đẹp giả. Vì vậy nhóm chỉ chọn epoch trên 688 câu val có ảnh chưa từng xuất hiện trong train. Lịch hai epoch sau epoch 2 hơn B2 một epoch 3,9 điểm, có ý nghĩa, nên được chọn. Chỉ khi đó mới chấm test, một lần: EM tăng từ 73,8 lên 76,6, p cỡ 10 mũ trừ 9. Kiểm tra thêm sau khi có kết quả: trên phần test sạch, ảnh và cặp hỏi đáp chưa từng thấy, mức tăng vẫn là 3,2 điểm — nên đây không phải do model nhớ ảnh. Chi phí: gấp đôi thời gian train, 6,1 giờ.</a:t>
             </a:r>
             <a:endParaRPr lang="en-US" dirty="0"/>
           </a:p>
@@ -3691,7 +3693,7 @@
           <a:p>
             <a:r>
               <a:rPr lang="en-US" dirty="0"/>
-              <a:t>Từ tuần 10 đến tuần 13: train QLoRA nhận biết OCR trên toàn bộ dữ liệu ViTextVQA để xem có vượt B2 không, ablation rank và module gắn LoRA, adapter dùng chung cho hai dataset, đo hallucination có hệ thống kể cả B3, rồi dựng prototype web: tải ảnh, chạy OCR, hỏi bằng tiếng Việt — cho Review 3.</a:t>
+              <a:t>Đối chiếu với các giả thuyết đã nêu ở Review 1. H1 được ủng hộ mạnh. H2 chỉ đạt một nửa: VRAM giảm nhiều nhưng độ chính xác giữ 94,5%, dưới mức 97%. H7 chưa được ủng hộ với dạng few-shot đã thử. H8: duyệt tay 200 lỗi của B2 cho thấy chỉ khoảng 7% là hallucination thật; nhưng H8 so sánh với zero-shot, nên cần đo thêm B1 ở tuần 11 — vì vậy vẫn để Đang chờ. H6 chỉ ủng hộ một phần: OCR cộng hưởng mạnh với QLoRA, nhưng ANLS chỉ tăng 1,55 điểm, dưới ngưỡng 3 điểm đã đặt — nhóm báo đúng như vậy. H3 đến H5 thuộc kế hoạch tuần 10 đến 12.</a:t>
             </a:r>
             <a:endParaRPr lang="en-US" dirty="0"/>
           </a:p>
@@ -3867,7 +3869,7 @@
           <a:p>
             <a:r>
               <a:rPr lang="en-US" dirty="0"/>
-              <a:t>Cảm ơn hội đồng đã lắng nghe. Nhóm sẵn sàng trả lời câu hỏi.</a:t>
+              <a:t>Từ tuần 10 đến tuần 13: train QLoRA nhận biết OCR trên toàn bộ dữ liệu ViTextVQA để xem có vượt B2 không, ablation rank và module gắn LoRA, adapter dùng chung cho hai dataset, đo hallucination có hệ thống kể cả B3, rồi dựng prototype web: tải ảnh, chạy OCR, hỏi bằng tiếng Việt — cho Review 3.</a:t>
             </a:r>
             <a:endParaRPr lang="en-US" dirty="0"/>
           </a:p>
@@ -3891,6 +3893,94 @@
             <a:fld id="{F7021451-1387-4CA6-816F-3879F97B5CBC}" type="slidenum">
               <a:rPr lang="en-US"/>
               <a:t>20</a:t>
+            </a:fld>
+            <a:endParaRPr lang="en-US"/>
+          </a:p>
+        </p:txBody>
+      </p:sp>
+    </p:spTree>
+    <p:extLst>
+      <p:ext uri="{BB962C8B-B14F-4D97-AF65-F5344CB8AC3E}">
+        <p14:creationId xmlns:p14="http://schemas.microsoft.com/office/powerpoint/2010/main" val="1024086991"/>
+      </p:ext>
+    </p:extLst>
+  </p:cSld>
+  <p:clrMapOvr>
+    <a:masterClrMapping/>
+  </p:clrMapOvr>
+</p:notes>
+</file>
+
+<file path=ppt/notesSlides/notesSlide21.xml><?xml version="1.0" encoding="utf-8"?>
+<p:notes xmlns:a="http://schemas.openxmlformats.org/drawingml/2006/main" xmlns:r="http://schemas.openxmlformats.org/officeDocument/2006/relationships" xmlns:p="http://schemas.openxmlformats.org/presentationml/2006/main">
+  <p:cSld>
+    <p:spTree>
+      <p:nvGrpSpPr>
+        <p:cNvPr id="1" name=""/>
+        <p:cNvGrpSpPr/>
+        <p:nvPr/>
+      </p:nvGrpSpPr>
+      <p:grpSpPr>
+        <a:xfrm>
+          <a:off x="0" y="0"/>
+          <a:ext cx="0" cy="0"/>
+          <a:chOff x="0" y="0"/>
+          <a:chExt cx="0" cy="0"/>
+        </a:xfrm>
+      </p:grpSpPr>
+      <p:sp>
+        <p:nvSpPr>
+          <p:cNvPr id="2" name="Slide Image Placeholder 1"/>
+          <p:cNvSpPr>
+            <a:spLocks noGrp="1" noRot="1" noChangeAspect="1"/>
+          </p:cNvSpPr>
+          <p:nvPr>
+            <p:ph type="sldImg"/>
+          </p:nvPr>
+        </p:nvSpPr>
+        <p:spPr/>
+      </p:sp>
+      <p:sp>
+        <p:nvSpPr>
+          <p:cNvPr id="3" name="Notes Placeholder 2"/>
+          <p:cNvSpPr>
+            <a:spLocks noGrp="1"/>
+          </p:cNvSpPr>
+          <p:nvPr>
+            <p:ph type="body" idx="1"/>
+          </p:nvPr>
+        </p:nvSpPr>
+        <p:spPr/>
+        <p:txBody>
+          <a:bodyPr/>
+          <a:lstStyle/>
+          <a:p>
+            <a:r>
+              <a:rPr lang="en-US" dirty="0"/>
+              <a:t>Cảm ơn hội đồng đã lắng nghe. Nhóm sẵn sàng trả lời câu hỏi.</a:t>
+            </a:r>
+            <a:endParaRPr lang="en-US" dirty="0"/>
+          </a:p>
+        </p:txBody>
+      </p:sp>
+      <p:sp>
+        <p:nvSpPr>
+          <p:cNvPr id="4" name="Slide Number Placeholder 3"/>
+          <p:cNvSpPr>
+            <a:spLocks noGrp="1"/>
+          </p:cNvSpPr>
+          <p:nvPr>
+            <p:ph type="sldNum" sz="quarter" idx="10"/>
+          </p:nvPr>
+        </p:nvSpPr>
+        <p:spPr/>
+        <p:txBody>
+          <a:bodyPr/>
+          <a:lstStyle/>
+          <a:p>
+            <a:fld id="{F7021451-1387-4CA6-816F-3879F97B5CBC}" type="slidenum">
+              <a:rPr lang="en-US"/>
+              <a:t>21</a:t>
             </a:fld>
             <a:endParaRPr lang="en-US"/>
           </a:p>
@@ -4131,7 +4221,7 @@
           <a:p>
             <a:r>
               <a:rPr lang="en-US" dirty="0"/>
-              <a:t>Đây là sơ đồ baseline mà thầy yêu cầu. Ảnh đi qua vision encoder 32 khối, được gộp còn 256 đến 512 token, rồi ghép với câu hỏi đưa vào decoder 36 lớp. Toàn bộ trọng số gốc đóng băng và lượng tử 4-bit. Phần duy nhất được train là LoRA ở 4 phép chiếu q, k, v, o của self-attention — ô màu cam.</a:t>
+              <a:t>Đây là sơ đồ baseline mà thầy yêu cầu. Ảnh đi qua vision encoder 32 khối, được gộp còn 256 đến 512 token, rồi ghép với câu hỏi đưa vào decoder 36 lớp. Toàn bộ trọng số gốc đóng băng và lượng tử 4-bit. Phần duy nhất được train là LoRA ở 4 phép chiếu q, k, v, o của self-attention — ô màu cam. Khung bên phải tóm tắt đầu vào và đầu ra của từng khối: ảnh được resize tối đa 401.408 điểm ảnh rồi cắt thành patch 14 nhân 14; patch merger gộp 2 nhân 2 patch thành 1 token 2048 chiều, ra 256 đến 512 token ảnh; prompt P0 ghép token ảnh với câu hỏi theo chat template; decoder sinh đáp án tham lam, tối đa 32 token. Lưu ý: baseline KHÔNG dùng OCR — OCR là phần cải tiến B3 ở phần 06.</a:t>
             </a:r>
             <a:endParaRPr lang="en-US" dirty="0"/>
           </a:p>
@@ -4219,7 +4309,7 @@
           <a:p>
             <a:r>
               <a:rPr lang="en-US" dirty="0"/>
-              <a:t>Mọi run dùng chung một giao thức: split và seed cố định, cùng prompt, cấu hình khoá trong file config, cùng hàm chuẩn hoá và metric, và log đầy đủ commit, GPU, thời gian. So sánh hai run luôn dùng kiểm định ghép cặp McNemar cho EM và bootstrap cho ANLS. Luật kết luận được chốt trước khi chạy để tránh chọn kết quả có lợi.</a:t>
+              <a:t>Mọi run dùng chung một giao thức: split và seed cố định, cùng prompt, cấu hình khoá trong file config, cùng hàm chuẩn hoá và metric, và log đầy đủ commit, GPU, thời gian. So sánh hai run luôn dùng kiểm định ghép cặp McNemar cho EM và bootstrap cho ANLS. Luật kết luận được chốt trước khi chạy để tránh chọn kết quả có lợi. Dòng chân trang giải thích các từ viết tắt.</a:t>
             </a:r>
             <a:endParaRPr lang="en-US" dirty="0"/>
           </a:p>
@@ -4483,7 +4573,7 @@
           <a:p>
             <a:r>
               <a:rPr lang="en-US" dirty="0"/>
-              <a:t>Table 7 của paper ViTextVQA có dòng QwenVL-7b đạt EM 28 trên 100 câu. Nhóm chạy Qwen2-VL-7B trong đúng điều kiện của baseline. Kết quả 7B kém 3B 12,6 điểm EM, p rất nhỏ, chậm hơn và tốn VRAM hơn. Nguyên nhân chính là 7B trả lời dài, trung bình 8,2 từ. Table 7 chỉ có 100 câu nên sai số khoảng ±9 điểm, không đủ để chọn giữa 3B và 7B. Vì vậy nhóm giữ Qwen2.5-VL-3B.</a:t>
+              <a:t>Table 7 của paper ViTextVQA có dòng QwenVL-7b đạt EM 28 trên 100 câu. Nhóm chạy Qwen2-VL-7B trong đúng điều kiện của baseline. Kết quả 7B kém 3B 12,6 điểm EM, p rất nhỏ, chậm hơn và tốn VRAM hơn. Nguyên nhân chính là 7B trả lời dài, trung bình 8,2 từ. Table 7 chỉ có 100 câu nên sai số khoảng ±9 điểm, không đủ để chọn giữa 3B và 7B. Vì vậy nhóm giữ Qwen2.5-VL-3B. Nguồn của từng model và paper ghi ở chân trang, kèm thư mục run trong repo.</a:t>
             </a:r>
             <a:endParaRPr lang="en-US" dirty="0"/>
           </a:p>
@@ -5556,7 +5646,7 @@
       </p:sp>
       <p:graphicFrame>
         <p:nvGraphicFramePr>
-          <p:cNvPr id="5" name="chart_62" descr=""/>
+          <p:cNvPr id="5" name="chart_65" descr=""/>
           <p:cNvGraphicFramePr/>
           <p:nvPr/>
         </p:nvGraphicFramePr>
@@ -5572,7 +5662,7 @@
       </p:graphicFrame>
       <p:graphicFrame>
         <p:nvGraphicFramePr>
-          <p:cNvPr id="11" name="table_63"/>
+          <p:cNvPr id="11" name="table_66"/>
           <p:cNvGraphicFramePr>
             <a:graphicFrameLocks noGrp="1"/>
           </p:cNvGraphicFramePr>
@@ -6597,7 +6687,7 @@
       </p:graphicFrame>
       <p:sp>
         <p:nvSpPr>
-          <p:cNvPr id="7" name="card_64"/>
+          <p:cNvPr id="7" name="card_67"/>
           <p:cNvSpPr/>
           <p:nvPr/>
         </p:nvSpPr>
@@ -6624,7 +6714,7 @@
       </p:sp>
       <p:sp>
         <p:nvSpPr>
-          <p:cNvPr id="8" name="text_65"/>
+          <p:cNvPr id="8" name="text_68"/>
           <p:cNvSpPr txBox="1"/>
           <p:nvPr/>
         </p:nvSpPr>
@@ -6663,7 +6753,7 @@
       </p:sp>
       <p:sp>
         <p:nvSpPr>
-          <p:cNvPr id="9" name="text_66"/>
+          <p:cNvPr id="9" name="text_69"/>
           <p:cNvSpPr txBox="1"/>
           <p:nvPr/>
         </p:nvSpPr>
@@ -6857,7 +6947,7 @@
       </p:sp>
       <p:sp>
         <p:nvSpPr>
-          <p:cNvPr id="5" name="card_67"/>
+          <p:cNvPr id="5" name="card_70"/>
           <p:cNvSpPr/>
           <p:nvPr/>
         </p:nvSpPr>
@@ -6884,7 +6974,7 @@
       </p:sp>
       <p:sp>
         <p:nvSpPr>
-          <p:cNvPr id="6" name="text_68"/>
+          <p:cNvPr id="6" name="text_71"/>
           <p:cNvSpPr txBox="1"/>
           <p:nvPr/>
         </p:nvSpPr>
@@ -6923,7 +7013,7 @@
       </p:sp>
       <p:sp>
         <p:nvSpPr>
-          <p:cNvPr id="7" name="text_69"/>
+          <p:cNvPr id="7" name="text_72"/>
           <p:cNvSpPr txBox="1"/>
           <p:nvPr/>
         </p:nvSpPr>
@@ -6993,7 +7083,7 @@
       </p:sp>
       <p:sp>
         <p:nvSpPr>
-          <p:cNvPr id="8" name="card_70"/>
+          <p:cNvPr id="8" name="card_73"/>
           <p:cNvSpPr/>
           <p:nvPr/>
         </p:nvSpPr>
@@ -7020,7 +7110,7 @@
       </p:sp>
       <p:sp>
         <p:nvSpPr>
-          <p:cNvPr id="9" name="text_71"/>
+          <p:cNvPr id="9" name="text_74"/>
           <p:cNvSpPr txBox="1"/>
           <p:nvPr/>
         </p:nvSpPr>
@@ -7059,7 +7149,7 @@
       </p:sp>
       <p:sp>
         <p:nvSpPr>
-          <p:cNvPr id="10" name="text_72"/>
+          <p:cNvPr id="10" name="text_75"/>
           <p:cNvSpPr txBox="1"/>
           <p:nvPr/>
         </p:nvSpPr>
@@ -7112,7 +7202,7 @@
       </p:sp>
       <p:sp>
         <p:nvSpPr>
-          <p:cNvPr id="11" name="card_73"/>
+          <p:cNvPr id="11" name="card_76"/>
           <p:cNvSpPr/>
           <p:nvPr/>
         </p:nvSpPr>
@@ -7139,7 +7229,7 @@
       </p:sp>
       <p:sp>
         <p:nvSpPr>
-          <p:cNvPr id="12" name="text_74"/>
+          <p:cNvPr id="12" name="text_77"/>
           <p:cNvSpPr txBox="1"/>
           <p:nvPr/>
         </p:nvSpPr>
@@ -7178,7 +7268,7 @@
       </p:sp>
       <p:graphicFrame>
         <p:nvGraphicFramePr>
-          <p:cNvPr id="13" name="chart_75" descr=""/>
+          <p:cNvPr id="13" name="chart_78" descr=""/>
           <p:cNvGraphicFramePr/>
           <p:nvPr/>
         </p:nvGraphicFramePr>
@@ -7194,7 +7284,7 @@
       </p:graphicFrame>
       <p:sp>
         <p:nvSpPr>
-          <p:cNvPr id="14" name="text_76"/>
+          <p:cNvPr id="14" name="text_79"/>
           <p:cNvSpPr txBox="1"/>
           <p:nvPr/>
         </p:nvSpPr>
@@ -7388,7 +7478,7 @@
       </p:sp>
       <p:graphicFrame>
         <p:nvGraphicFramePr>
-          <p:cNvPr id="13" name="table_77"/>
+          <p:cNvPr id="13" name="table_80"/>
           <p:cNvGraphicFramePr>
             <a:graphicFrameLocks noGrp="1"/>
           </p:cNvGraphicFramePr>
@@ -7706,7 +7796,7 @@
                           <a:ea typeface="Calibri" pitchFamily="34" charset="-122"/>
                           <a:cs typeface="Calibri" pitchFamily="34" charset="-120"/>
                         </a:rPr>
-                        <a:t>ViTextBLIP-2 · paper Table 6 (có train)</a:t>
+                        <a:t>ViTextBLIP-2 · Nguyen và cs. [3], Table 6 (có train)</a:t>
                       </a:r>
                       <a:endParaRPr lang="en-US" sz="1400" dirty="0">
                         <a:latin typeface="Calibri" charset="0"/>
@@ -8492,18 +8582,18 @@
       </p:graphicFrame>
       <p:sp>
         <p:nvSpPr>
-          <p:cNvPr id="6" name="card_78"/>
+          <p:cNvPr id="6" name="card_81"/>
           <p:cNvSpPr/>
           <p:nvPr/>
         </p:nvSpPr>
         <p:spPr>
           <a:xfrm>
-            <a:off x="548640" y="3931920"/>
-            <a:ext cx="3454298" cy="1783080"/>
+            <a:off x="548640" y="3886200"/>
+            <a:ext cx="3454298" cy="1691640"/>
           </a:xfrm>
           <a:prstGeom prst="roundRect">
             <a:avLst>
-              <a:gd name="adj" fmla="val 4103"/>
+              <a:gd name="adj" fmla="val 4324"/>
             </a:avLst>
           </a:prstGeom>
           <a:solidFill>
@@ -8519,13 +8609,13 @@
       </p:sp>
       <p:sp>
         <p:nvSpPr>
-          <p:cNvPr id="7" name="text_79"/>
+          <p:cNvPr id="7" name="text_82"/>
           <p:cNvSpPr txBox="1"/>
           <p:nvPr/>
         </p:nvSpPr>
         <p:spPr>
           <a:xfrm>
-            <a:off x="777240" y="4069080"/>
+            <a:off x="777240" y="4023360"/>
             <a:ext cx="2997098" cy="411480"/>
           </a:xfrm>
           <a:prstGeom prst="rect">
@@ -8558,14 +8648,14 @@
       </p:sp>
       <p:sp>
         <p:nvSpPr>
-          <p:cNvPr id="8" name="text_80"/>
+          <p:cNvPr id="8" name="text_83"/>
           <p:cNvSpPr txBox="1"/>
           <p:nvPr/>
         </p:nvSpPr>
         <p:spPr>
           <a:xfrm>
-            <a:off x="777240" y="4526280"/>
-            <a:ext cx="2997098" cy="1051560"/>
+            <a:off x="777240" y="4480560"/>
+            <a:ext cx="2997098" cy="960120"/>
           </a:xfrm>
           <a:prstGeom prst="rect">
             <a:avLst/>
@@ -8597,18 +8687,18 @@
       </p:sp>
       <p:sp>
         <p:nvSpPr>
-          <p:cNvPr id="9" name="card_81"/>
+          <p:cNvPr id="9" name="card_84"/>
           <p:cNvSpPr/>
           <p:nvPr/>
         </p:nvSpPr>
         <p:spPr>
           <a:xfrm>
-            <a:off x="4368698" y="3931920"/>
-            <a:ext cx="3454298" cy="1783080"/>
+            <a:off x="4368698" y="3886200"/>
+            <a:ext cx="3454298" cy="1691640"/>
           </a:xfrm>
           <a:prstGeom prst="roundRect">
             <a:avLst>
-              <a:gd name="adj" fmla="val 4103"/>
+              <a:gd name="adj" fmla="val 4324"/>
             </a:avLst>
           </a:prstGeom>
           <a:solidFill>
@@ -8624,13 +8714,13 @@
       </p:sp>
       <p:sp>
         <p:nvSpPr>
-          <p:cNvPr id="10" name="text_82"/>
+          <p:cNvPr id="10" name="text_85"/>
           <p:cNvSpPr txBox="1"/>
           <p:nvPr/>
         </p:nvSpPr>
         <p:spPr>
           <a:xfrm>
-            <a:off x="4597298" y="4069080"/>
+            <a:off x="4597298" y="4023360"/>
             <a:ext cx="2997098" cy="411480"/>
           </a:xfrm>
           <a:prstGeom prst="rect">
@@ -8663,14 +8753,14 @@
       </p:sp>
       <p:sp>
         <p:nvSpPr>
-          <p:cNvPr id="11" name="text_83"/>
+          <p:cNvPr id="11" name="text_86"/>
           <p:cNvSpPr txBox="1"/>
           <p:nvPr/>
         </p:nvSpPr>
         <p:spPr>
           <a:xfrm>
-            <a:off x="4597298" y="4526280"/>
-            <a:ext cx="2997098" cy="1051560"/>
+            <a:off x="4597298" y="4480560"/>
+            <a:ext cx="2997098" cy="960120"/>
           </a:xfrm>
           <a:prstGeom prst="rect">
             <a:avLst/>
@@ -8702,18 +8792,18 @@
       </p:sp>
       <p:sp>
         <p:nvSpPr>
-          <p:cNvPr id="12" name="card_84"/>
+          <p:cNvPr id="12" name="card_87"/>
           <p:cNvSpPr/>
           <p:nvPr/>
         </p:nvSpPr>
         <p:spPr>
           <a:xfrm>
-            <a:off x="8188757" y="3931920"/>
-            <a:ext cx="3454298" cy="1783080"/>
+            <a:off x="8188757" y="3886200"/>
+            <a:ext cx="3454298" cy="1691640"/>
           </a:xfrm>
           <a:prstGeom prst="roundRect">
             <a:avLst>
-              <a:gd name="adj" fmla="val 4103"/>
+              <a:gd name="adj" fmla="val 4324"/>
             </a:avLst>
           </a:prstGeom>
           <a:solidFill>
@@ -8729,13 +8819,13 @@
       </p:sp>
       <p:sp>
         <p:nvSpPr>
-          <p:cNvPr id="13" name="text_85"/>
+          <p:cNvPr id="13" name="text_88"/>
           <p:cNvSpPr txBox="1"/>
           <p:nvPr/>
         </p:nvSpPr>
         <p:spPr>
           <a:xfrm>
-            <a:off x="8417357" y="4069080"/>
+            <a:off x="8417357" y="4023360"/>
             <a:ext cx="2997098" cy="411480"/>
           </a:xfrm>
           <a:prstGeom prst="rect">
@@ -8768,14 +8858,14 @@
       </p:sp>
       <p:sp>
         <p:nvSpPr>
-          <p:cNvPr id="14" name="text_86"/>
+          <p:cNvPr id="14" name="text_89"/>
           <p:cNvSpPr txBox="1"/>
           <p:nvPr/>
         </p:nvSpPr>
         <p:spPr>
           <a:xfrm>
-            <a:off x="8417357" y="4526280"/>
-            <a:ext cx="2997098" cy="1051560"/>
+            <a:off x="8417357" y="4480560"/>
+            <a:ext cx="2997098" cy="960120"/>
           </a:xfrm>
           <a:prstGeom prst="rect">
             <a:avLst/>
@@ -8802,6 +8892,45 @@
               <a:t>Paper không công bố cách chuẩn hoá đáp án; phép so giả định cách chấm tương đương.</a:t>
             </a:r>
             <a:endParaRPr lang="en-US" sz="1400" dirty="0"/>
+          </a:p>
+        </p:txBody>
+      </p:sp>
+      <p:sp>
+        <p:nvSpPr>
+          <p:cNvPr id="15" name="text_90"/>
+          <p:cNvSpPr txBox="1"/>
+          <p:nvPr/>
+        </p:nvSpPr>
+        <p:spPr>
+          <a:xfrm>
+            <a:off x="548640" y="5760720"/>
+            <a:ext cx="11094415" cy="457200"/>
+          </a:xfrm>
+          <a:prstGeom prst="rect">
+            <a:avLst/>
+          </a:prstGeom>
+          <a:noFill/>
+          <a:ln/>
+        </p:spPr>
+        <p:txBody>
+          <a:bodyPr wrap="square" lIns="0" tIns="0" rIns="0" bIns="0" rtlCol="0" anchor="b"/>
+          <a:lstStyle/>
+          <a:p>
+            <a:pPr indent="0" marL="0">
+              <a:buNone/>
+            </a:pPr>
+            <a:r>
+              <a:rPr lang="en-US" sz="1000" dirty="0">
+                <a:solidFill>
+                  <a:schemeClr val="accent3"/>
+                </a:solidFill>
+                <a:latin typeface="Calibri" pitchFamily="34" charset="0"/>
+                <a:ea typeface="Calibri" pitchFamily="34" charset="-122"/>
+                <a:cs typeface="Calibri" pitchFamily="34" charset="-120"/>
+              </a:rPr>
+              <a:t>[3] Nguyen và cs., ViTextVQA, arXiv:2404.10652, 2024. CI95 = bootstrap ghép cặp, 10.000 lần lấy mẫu, seed 42. Số của nhóm: experiments/W07_B1_zeroshot_…_testfull, W07_B2_eval_…_testfull, W07_fulltest_summary_L4_seed42.</a:t>
+            </a:r>
+            <a:endParaRPr lang="en-US" sz="1000" dirty="0"/>
           </a:p>
         </p:txBody>
       </p:sp>
@@ -8913,6 +9042,2022 @@
                 <a:ea typeface="Calibri" pitchFamily="34" charset="-122"/>
                 <a:cs typeface="Calibri" pitchFamily="34" charset="-120"/>
               </a:rPr>
+              <a:t>PHẦN 05 · CÁCH LÀM CỦA SOTA SO VỚI NHÓM</a:t>
+            </a:r>
+            <a:endParaRPr lang="en-US" sz="1100" dirty="0"/>
+          </a:p>
+        </p:txBody>
+      </p:sp>
+      <p:sp>
+        <p:nvSpPr>
+          <p:cNvPr id="3" name="Text 0"/>
+          <p:cNvSpPr/>
+          <p:nvPr>
+            <p:ph idx="101" type="title" hasCustomPrompt="1"/>
+          </p:nvPr>
+        </p:nvSpPr>
+        <p:spPr>
+          <a:xfrm>
+            <a:off x="548640" y="566928"/>
+            <a:ext cx="11094415" cy="640080"/>
+          </a:xfrm>
+          <a:prstGeom prst="rect">
+            <a:avLst/>
+          </a:prstGeom>
+          <a:noFill/>
+          <a:ln/>
+        </p:spPr>
+        <p:txBody>
+          <a:bodyPr wrap="square" lIns="0" tIns="0" rIns="0" bIns="0" rtlCol="0" anchor="t"/>
+          <a:lstStyle/>
+          <a:p>
+            <a:pPr algn="l" indent="0" marL="0">
+              <a:buNone/>
+            </a:pPr>
+            <a:r>
+              <a:rPr lang="en-US" sz="3200" b="1" dirty="0">
+                <a:solidFill>
+                  <a:schemeClr val="tx2"/>
+                </a:solidFill>
+                <a:latin typeface="Cambria" pitchFamily="34" charset="0"/>
+                <a:ea typeface="Cambria" pitchFamily="34" charset="-122"/>
+                <a:cs typeface="Cambria" pitchFamily="34" charset="-120"/>
+              </a:rPr>
+              <a:t>ViTextBLIP-2 làm thế nào — và nhóm khác ở đâu</a:t>
+            </a:r>
+            <a:endParaRPr lang="en-US" sz="3200" dirty="0"/>
+          </a:p>
+        </p:txBody>
+      </p:sp>
+      <p:graphicFrame>
+        <p:nvGraphicFramePr>
+          <p:cNvPr id="14" name="table_91"/>
+          <p:cNvGraphicFramePr>
+            <a:graphicFrameLocks noGrp="1"/>
+          </p:cNvGraphicFramePr>
+          <p:nvPr>
+            <p:extLst>
+              <p:ext uri="{D42A27DB-BD31-4B8C-83A1-F6EECF244321}">
+                <p14:modId xmlns:p14="http://schemas.microsoft.com/office/powerpoint/2010/main" val="1579011935"/>
+              </p:ext>
+            </p:extLst>
+          </p:nvPr>
+        </p:nvGraphicFramePr>
+        <p:xfrm>
+          <a:off x="548640" y="1325880"/>
+          <a:ext cx="11094415" cy="914400"/>
+        </p:xfrm>
+        <a:graphic>
+          <a:graphicData uri="http://schemas.openxmlformats.org/drawingml/2006/table">
+            <a:tbl>
+              <a:tblPr/>
+              <a:tblGrid>
+                <a:gridCol w="2011680"/>
+                <a:gridCol w="4572000"/>
+                <a:gridCol w="4507992"/>
+              </a:tblGrid>
+              <a:tr h="457200">
+                <a:tc>
+                  <a:txBody>
+                    <a:bodyPr/>
+                    <a:lstStyle/>
+                    <a:p>
+                      <a:pPr indent="0" marL="0">
+                        <a:buNone/>
+                      </a:pPr>
+                      <a:r>
+                        <a:rPr lang="en-US" sz="1300" b="1" dirty="0">
+                          <a:solidFill>
+                            <a:srgbClr val="FFFFFF"/>
+                          </a:solidFill>
+                          <a:latin typeface="Calibri" pitchFamily="34" charset="0"/>
+                          <a:ea typeface="Calibri" pitchFamily="34" charset="-122"/>
+                          <a:cs typeface="Calibri" pitchFamily="34" charset="-120"/>
+                        </a:rPr>
+                        <a:t>Khía cạnh</a:t>
+                      </a:r>
+                      <a:endParaRPr lang="en-US" sz="1300" dirty="0">
+                        <a:latin typeface="Calibri" charset="0"/>
+                        <a:ea typeface="Calibri" charset="0"/>
+                        <a:cs typeface="Calibri" charset="0"/>
+                      </a:endParaRPr>
+                    </a:p>
+                  </a:txBody>
+                  <a:tcPr marL="76200" marR="76200" marT="38100" marB="38100" anchor="ctr">
+                    <a:lnL w="9525" cap="flat" cmpd="sng" algn="ctr">
+                      <a:solidFill>
+                        <a:srgbClr val="E2E7EE"/>
+                      </a:solidFill>
+                      <a:prstDash val="solid"/>
+                      <a:round/>
+                      <a:headEnd type="none" w="med" len="med"/>
+                      <a:tailEnd type="none" w="med" len="med"/>
+                    </a:lnL>
+                    <a:lnR w="9525" cap="flat" cmpd="sng" algn="ctr">
+                      <a:solidFill>
+                        <a:srgbClr val="E2E7EE"/>
+                      </a:solidFill>
+                      <a:prstDash val="solid"/>
+                      <a:round/>
+                      <a:headEnd type="none" w="med" len="med"/>
+                      <a:tailEnd type="none" w="med" len="med"/>
+                    </a:lnR>
+                    <a:lnT w="9525" cap="flat" cmpd="sng" algn="ctr">
+                      <a:solidFill>
+                        <a:srgbClr val="E2E7EE"/>
+                      </a:solidFill>
+                      <a:prstDash val="solid"/>
+                      <a:round/>
+                      <a:headEnd type="none" w="med" len="med"/>
+                      <a:tailEnd type="none" w="med" len="med"/>
+                    </a:lnT>
+                    <a:lnB w="9525" cap="flat" cmpd="sng" algn="ctr">
+                      <a:solidFill>
+                        <a:srgbClr val="E2E7EE"/>
+                      </a:solidFill>
+                      <a:prstDash val="solid"/>
+                      <a:round/>
+                      <a:headEnd type="none" w="med" len="med"/>
+                      <a:tailEnd type="none" w="med" len="med"/>
+                    </a:lnB>
+                    <a:solidFill>
+                      <a:srgbClr val="13294B"/>
+                    </a:solidFill>
+                  </a:tcPr>
+                </a:tc>
+                <a:tc>
+                  <a:txBody>
+                    <a:bodyPr/>
+                    <a:lstStyle/>
+                    <a:p>
+                      <a:pPr indent="0" marL="0">
+                        <a:buNone/>
+                      </a:pPr>
+                      <a:r>
+                        <a:rPr lang="en-US" sz="1300" b="1" dirty="0">
+                          <a:solidFill>
+                            <a:srgbClr val="FFFFFF"/>
+                          </a:solidFill>
+                          <a:latin typeface="Calibri" pitchFamily="34" charset="0"/>
+                          <a:ea typeface="Calibri" pitchFamily="34" charset="-122"/>
+                          <a:cs typeface="Calibri" pitchFamily="34" charset="-120"/>
+                        </a:rPr>
+                        <a:t>ViTextBLIP-2 (SOTA, paper [3])</a:t>
+                      </a:r>
+                      <a:endParaRPr lang="en-US" sz="1300" dirty="0">
+                        <a:latin typeface="Calibri" charset="0"/>
+                        <a:ea typeface="Calibri" charset="0"/>
+                        <a:cs typeface="Calibri" charset="0"/>
+                      </a:endParaRPr>
+                    </a:p>
+                  </a:txBody>
+                  <a:tcPr marL="76200" marR="76200" marT="38100" marB="38100" anchor="ctr">
+                    <a:lnL w="9525" cap="flat" cmpd="sng" algn="ctr">
+                      <a:solidFill>
+                        <a:srgbClr val="E2E7EE"/>
+                      </a:solidFill>
+                      <a:prstDash val="solid"/>
+                      <a:round/>
+                      <a:headEnd type="none" w="med" len="med"/>
+                      <a:tailEnd type="none" w="med" len="med"/>
+                    </a:lnL>
+                    <a:lnR w="9525" cap="flat" cmpd="sng" algn="ctr">
+                      <a:solidFill>
+                        <a:srgbClr val="E2E7EE"/>
+                      </a:solidFill>
+                      <a:prstDash val="solid"/>
+                      <a:round/>
+                      <a:headEnd type="none" w="med" len="med"/>
+                      <a:tailEnd type="none" w="med" len="med"/>
+                    </a:lnR>
+                    <a:lnT w="9525" cap="flat" cmpd="sng" algn="ctr">
+                      <a:solidFill>
+                        <a:srgbClr val="E2E7EE"/>
+                      </a:solidFill>
+                      <a:prstDash val="solid"/>
+                      <a:round/>
+                      <a:headEnd type="none" w="med" len="med"/>
+                      <a:tailEnd type="none" w="med" len="med"/>
+                    </a:lnT>
+                    <a:lnB w="9525" cap="flat" cmpd="sng" algn="ctr">
+                      <a:solidFill>
+                        <a:srgbClr val="E2E7EE"/>
+                      </a:solidFill>
+                      <a:prstDash val="solid"/>
+                      <a:round/>
+                      <a:headEnd type="none" w="med" len="med"/>
+                      <a:tailEnd type="none" w="med" len="med"/>
+                    </a:lnB>
+                    <a:solidFill>
+                      <a:srgbClr val="13294B"/>
+                    </a:solidFill>
+                  </a:tcPr>
+                </a:tc>
+                <a:tc>
+                  <a:txBody>
+                    <a:bodyPr/>
+                    <a:lstStyle/>
+                    <a:p>
+                      <a:pPr indent="0" marL="0">
+                        <a:buNone/>
+                      </a:pPr>
+                      <a:r>
+                        <a:rPr lang="en-US" sz="1300" b="1" dirty="0">
+                          <a:solidFill>
+                            <a:srgbClr val="FFFFFF"/>
+                          </a:solidFill>
+                          <a:latin typeface="Calibri" pitchFamily="34" charset="0"/>
+                          <a:ea typeface="Calibri" pitchFamily="34" charset="-122"/>
+                          <a:cs typeface="Calibri" pitchFamily="34" charset="-120"/>
+                        </a:rPr>
+                        <a:t>Nhóm: B2 = Qwen2.5-VL-3B + QLoRA</a:t>
+                      </a:r>
+                      <a:endParaRPr lang="en-US" sz="1300" dirty="0">
+                        <a:latin typeface="Calibri" charset="0"/>
+                        <a:ea typeface="Calibri" charset="0"/>
+                        <a:cs typeface="Calibri" charset="0"/>
+                      </a:endParaRPr>
+                    </a:p>
+                  </a:txBody>
+                  <a:tcPr marL="76200" marR="76200" marT="38100" marB="38100" anchor="ctr">
+                    <a:lnL w="9525" cap="flat" cmpd="sng" algn="ctr">
+                      <a:solidFill>
+                        <a:srgbClr val="E2E7EE"/>
+                      </a:solidFill>
+                      <a:prstDash val="solid"/>
+                      <a:round/>
+                      <a:headEnd type="none" w="med" len="med"/>
+                      <a:tailEnd type="none" w="med" len="med"/>
+                    </a:lnL>
+                    <a:lnR w="9525" cap="flat" cmpd="sng" algn="ctr">
+                      <a:solidFill>
+                        <a:srgbClr val="E2E7EE"/>
+                      </a:solidFill>
+                      <a:prstDash val="solid"/>
+                      <a:round/>
+                      <a:headEnd type="none" w="med" len="med"/>
+                      <a:tailEnd type="none" w="med" len="med"/>
+                    </a:lnR>
+                    <a:lnT w="9525" cap="flat" cmpd="sng" algn="ctr">
+                      <a:solidFill>
+                        <a:srgbClr val="E2E7EE"/>
+                      </a:solidFill>
+                      <a:prstDash val="solid"/>
+                      <a:round/>
+                      <a:headEnd type="none" w="med" len="med"/>
+                      <a:tailEnd type="none" w="med" len="med"/>
+                    </a:lnT>
+                    <a:lnB w="9525" cap="flat" cmpd="sng" algn="ctr">
+                      <a:solidFill>
+                        <a:srgbClr val="E2E7EE"/>
+                      </a:solidFill>
+                      <a:prstDash val="solid"/>
+                      <a:round/>
+                      <a:headEnd type="none" w="med" len="med"/>
+                      <a:tailEnd type="none" w="med" len="med"/>
+                    </a:lnB>
+                    <a:solidFill>
+                      <a:srgbClr val="13294B"/>
+                    </a:solidFill>
+                  </a:tcPr>
+                </a:tc>
+              </a:tr>
+              <a:tr h="457200">
+                <a:tc>
+                  <a:txBody>
+                    <a:bodyPr/>
+                    <a:lstStyle/>
+                    <a:p>
+                      <a:pPr indent="0" marL="0">
+                        <a:buNone/>
+                      </a:pPr>
+                      <a:r>
+                        <a:rPr lang="en-US" sz="1200" b="1" dirty="0">
+                          <a:solidFill>
+                            <a:srgbClr val="13294B"/>
+                          </a:solidFill>
+                          <a:latin typeface="Calibri" pitchFamily="34" charset="0"/>
+                          <a:ea typeface="Calibri" pitchFamily="34" charset="-122"/>
+                          <a:cs typeface="Calibri" pitchFamily="34" charset="-120"/>
+                        </a:rPr>
+                        <a:t>Thị giác</a:t>
+                      </a:r>
+                      <a:endParaRPr lang="en-US" sz="1200" dirty="0">
+                        <a:latin typeface="Calibri" charset="0"/>
+                        <a:ea typeface="Calibri" charset="0"/>
+                        <a:cs typeface="Calibri" charset="0"/>
+                      </a:endParaRPr>
+                    </a:p>
+                  </a:txBody>
+                  <a:tcPr marL="76200" marR="76200" marT="38100" marB="38100" anchor="ctr">
+                    <a:lnL w="9525" cap="flat" cmpd="sng" algn="ctr">
+                      <a:solidFill>
+                        <a:srgbClr val="E2E7EE"/>
+                      </a:solidFill>
+                      <a:prstDash val="solid"/>
+                      <a:round/>
+                      <a:headEnd type="none" w="med" len="med"/>
+                      <a:tailEnd type="none" w="med" len="med"/>
+                    </a:lnL>
+                    <a:lnR w="9525" cap="flat" cmpd="sng" algn="ctr">
+                      <a:solidFill>
+                        <a:srgbClr val="E2E7EE"/>
+                      </a:solidFill>
+                      <a:prstDash val="solid"/>
+                      <a:round/>
+                      <a:headEnd type="none" w="med" len="med"/>
+                      <a:tailEnd type="none" w="med" len="med"/>
+                    </a:lnR>
+                    <a:lnT w="9525" cap="flat" cmpd="sng" algn="ctr">
+                      <a:solidFill>
+                        <a:srgbClr val="E2E7EE"/>
+                      </a:solidFill>
+                      <a:prstDash val="solid"/>
+                      <a:round/>
+                      <a:headEnd type="none" w="med" len="med"/>
+                      <a:tailEnd type="none" w="med" len="med"/>
+                    </a:lnT>
+                    <a:lnB w="9525" cap="flat" cmpd="sng" algn="ctr">
+                      <a:solidFill>
+                        <a:srgbClr val="E2E7EE"/>
+                      </a:solidFill>
+                      <a:prstDash val="solid"/>
+                      <a:round/>
+                      <a:headEnd type="none" w="med" len="med"/>
+                      <a:tailEnd type="none" w="med" len="med"/>
+                    </a:lnB>
+                  </a:tcPr>
+                </a:tc>
+                <a:tc>
+                  <a:txBody>
+                    <a:bodyPr/>
+                    <a:lstStyle/>
+                    <a:p>
+                      <a:pPr indent="0" marL="0">
+                        <a:buNone/>
+                      </a:pPr>
+                      <a:r>
+                        <a:rPr lang="en-US" sz="1200" dirty="0">
+                          <a:solidFill>
+                            <a:srgbClr val="243044"/>
+                          </a:solidFill>
+                          <a:latin typeface="Calibri" pitchFamily="34" charset="0"/>
+                          <a:ea typeface="Calibri" pitchFamily="34" charset="-122"/>
+                          <a:cs typeface="Calibri" pitchFamily="34" charset="-120"/>
+                        </a:rPr>
+                        <a:t>ViT pretrained, đóng băng</a:t>
+                      </a:r>
+                      <a:endParaRPr lang="en-US" sz="1200" dirty="0">
+                        <a:latin typeface="Calibri" charset="0"/>
+                        <a:ea typeface="Calibri" charset="0"/>
+                        <a:cs typeface="Calibri" charset="0"/>
+                      </a:endParaRPr>
+                    </a:p>
+                  </a:txBody>
+                  <a:tcPr marL="76200" marR="76200" marT="38100" marB="38100" anchor="ctr">
+                    <a:lnL w="9525" cap="flat" cmpd="sng" algn="ctr">
+                      <a:solidFill>
+                        <a:srgbClr val="E2E7EE"/>
+                      </a:solidFill>
+                      <a:prstDash val="solid"/>
+                      <a:round/>
+                      <a:headEnd type="none" w="med" len="med"/>
+                      <a:tailEnd type="none" w="med" len="med"/>
+                    </a:lnL>
+                    <a:lnR w="9525" cap="flat" cmpd="sng" algn="ctr">
+                      <a:solidFill>
+                        <a:srgbClr val="E2E7EE"/>
+                      </a:solidFill>
+                      <a:prstDash val="solid"/>
+                      <a:round/>
+                      <a:headEnd type="none" w="med" len="med"/>
+                      <a:tailEnd type="none" w="med" len="med"/>
+                    </a:lnR>
+                    <a:lnT w="9525" cap="flat" cmpd="sng" algn="ctr">
+                      <a:solidFill>
+                        <a:srgbClr val="E2E7EE"/>
+                      </a:solidFill>
+                      <a:prstDash val="solid"/>
+                      <a:round/>
+                      <a:headEnd type="none" w="med" len="med"/>
+                      <a:tailEnd type="none" w="med" len="med"/>
+                    </a:lnT>
+                    <a:lnB w="9525" cap="flat" cmpd="sng" algn="ctr">
+                      <a:solidFill>
+                        <a:srgbClr val="E2E7EE"/>
+                      </a:solidFill>
+                      <a:prstDash val="solid"/>
+                      <a:round/>
+                      <a:headEnd type="none" w="med" len="med"/>
+                      <a:tailEnd type="none" w="med" len="med"/>
+                    </a:lnB>
+                  </a:tcPr>
+                </a:tc>
+                <a:tc>
+                  <a:txBody>
+                    <a:bodyPr/>
+                    <a:lstStyle/>
+                    <a:p>
+                      <a:pPr indent="0" marL="0">
+                        <a:buNone/>
+                      </a:pPr>
+                      <a:r>
+                        <a:rPr lang="en-US" sz="1200" dirty="0">
+                          <a:solidFill>
+                            <a:srgbClr val="243044"/>
+                          </a:solidFill>
+                          <a:latin typeface="Calibri" pitchFamily="34" charset="0"/>
+                          <a:ea typeface="Calibri" pitchFamily="34" charset="-122"/>
+                          <a:cs typeface="Calibri" pitchFamily="34" charset="-120"/>
+                        </a:rPr>
+                        <a:t>ViT của Qwen2.5-VL (32 khối), đóng băng</a:t>
+                      </a:r>
+                      <a:endParaRPr lang="en-US" sz="1200" dirty="0">
+                        <a:latin typeface="Calibri" charset="0"/>
+                        <a:ea typeface="Calibri" charset="0"/>
+                        <a:cs typeface="Calibri" charset="0"/>
+                      </a:endParaRPr>
+                    </a:p>
+                  </a:txBody>
+                  <a:tcPr marL="76200" marR="76200" marT="38100" marB="38100" anchor="ctr">
+                    <a:lnL w="9525" cap="flat" cmpd="sng" algn="ctr">
+                      <a:solidFill>
+                        <a:srgbClr val="E2E7EE"/>
+                      </a:solidFill>
+                      <a:prstDash val="solid"/>
+                      <a:round/>
+                      <a:headEnd type="none" w="med" len="med"/>
+                      <a:tailEnd type="none" w="med" len="med"/>
+                    </a:lnL>
+                    <a:lnR w="9525" cap="flat" cmpd="sng" algn="ctr">
+                      <a:solidFill>
+                        <a:srgbClr val="E2E7EE"/>
+                      </a:solidFill>
+                      <a:prstDash val="solid"/>
+                      <a:round/>
+                      <a:headEnd type="none" w="med" len="med"/>
+                      <a:tailEnd type="none" w="med" len="med"/>
+                    </a:lnR>
+                    <a:lnT w="9525" cap="flat" cmpd="sng" algn="ctr">
+                      <a:solidFill>
+                        <a:srgbClr val="E2E7EE"/>
+                      </a:solidFill>
+                      <a:prstDash val="solid"/>
+                      <a:round/>
+                      <a:headEnd type="none" w="med" len="med"/>
+                      <a:tailEnd type="none" w="med" len="med"/>
+                    </a:lnT>
+                    <a:lnB w="9525" cap="flat" cmpd="sng" algn="ctr">
+                      <a:solidFill>
+                        <a:srgbClr val="E2E7EE"/>
+                      </a:solidFill>
+                      <a:prstDash val="solid"/>
+                      <a:round/>
+                      <a:headEnd type="none" w="med" len="med"/>
+                      <a:tailEnd type="none" w="med" len="med"/>
+                    </a:lnB>
+                  </a:tcPr>
+                </a:tc>
+              </a:tr>
+              <a:tr h="457200">
+                <a:tc>
+                  <a:txBody>
+                    <a:bodyPr/>
+                    <a:lstStyle/>
+                    <a:p>
+                      <a:pPr indent="0" marL="0">
+                        <a:buNone/>
+                      </a:pPr>
+                      <a:r>
+                        <a:rPr lang="en-US" sz="1200" b="1" dirty="0">
+                          <a:solidFill>
+                            <a:srgbClr val="13294B"/>
+                          </a:solidFill>
+                          <a:latin typeface="Calibri" pitchFamily="34" charset="0"/>
+                          <a:ea typeface="Calibri" pitchFamily="34" charset="-122"/>
+                          <a:cs typeface="Calibri" pitchFamily="34" charset="-120"/>
+                        </a:rPr>
+                        <a:t>Chữ trong ảnh (OCR)</a:t>
+                      </a:r>
+                      <a:endParaRPr lang="en-US" sz="1200" dirty="0">
+                        <a:latin typeface="Calibri" charset="0"/>
+                        <a:ea typeface="Calibri" charset="0"/>
+                        <a:cs typeface="Calibri" charset="0"/>
+                      </a:endParaRPr>
+                    </a:p>
+                  </a:txBody>
+                  <a:tcPr marL="76200" marR="76200" marT="38100" marB="38100" anchor="ctr">
+                    <a:lnL w="9525" cap="flat" cmpd="sng" algn="ctr">
+                      <a:solidFill>
+                        <a:srgbClr val="E2E7EE"/>
+                      </a:solidFill>
+                      <a:prstDash val="solid"/>
+                      <a:round/>
+                      <a:headEnd type="none" w="med" len="med"/>
+                      <a:tailEnd type="none" w="med" len="med"/>
+                    </a:lnL>
+                    <a:lnR w="9525" cap="flat" cmpd="sng" algn="ctr">
+                      <a:solidFill>
+                        <a:srgbClr val="E2E7EE"/>
+                      </a:solidFill>
+                      <a:prstDash val="solid"/>
+                      <a:round/>
+                      <a:headEnd type="none" w="med" len="med"/>
+                      <a:tailEnd type="none" w="med" len="med"/>
+                    </a:lnR>
+                    <a:lnT w="9525" cap="flat" cmpd="sng" algn="ctr">
+                      <a:solidFill>
+                        <a:srgbClr val="E2E7EE"/>
+                      </a:solidFill>
+                      <a:prstDash val="solid"/>
+                      <a:round/>
+                      <a:headEnd type="none" w="med" len="med"/>
+                      <a:tailEnd type="none" w="med" len="med"/>
+                    </a:lnT>
+                    <a:lnB w="9525" cap="flat" cmpd="sng" algn="ctr">
+                      <a:solidFill>
+                        <a:srgbClr val="E2E7EE"/>
+                      </a:solidFill>
+                      <a:prstDash val="solid"/>
+                      <a:round/>
+                      <a:headEnd type="none" w="med" len="med"/>
+                      <a:tailEnd type="none" w="med" len="med"/>
+                    </a:lnB>
+                  </a:tcPr>
+                </a:tc>
+                <a:tc>
+                  <a:txBody>
+                    <a:bodyPr/>
+                    <a:lstStyle/>
+                    <a:p>
+                      <a:pPr indent="0" marL="0">
+                        <a:buNone/>
+                      </a:pPr>
+                      <a:r>
+                        <a:rPr lang="en-US" sz="1200" dirty="0">
+                          <a:solidFill>
+                            <a:srgbClr val="243044"/>
+                          </a:solidFill>
+                          <a:latin typeface="Calibri" pitchFamily="34" charset="0"/>
+                          <a:ea typeface="Calibri" pitchFamily="34" charset="-122"/>
+                          <a:cs typeface="Calibri" pitchFamily="34" charset="-120"/>
+                        </a:rPr>
+                        <a:t>SwinTextSpotter [4], không fine-tune, bộ ký tự tiếng Việt; token OCR trộn như đặc trưng</a:t>
+                      </a:r>
+                      <a:endParaRPr lang="en-US" sz="1200" dirty="0">
+                        <a:latin typeface="Calibri" charset="0"/>
+                        <a:ea typeface="Calibri" charset="0"/>
+                        <a:cs typeface="Calibri" charset="0"/>
+                      </a:endParaRPr>
+                    </a:p>
+                  </a:txBody>
+                  <a:tcPr marL="76200" marR="76200" marT="38100" marB="38100" anchor="ctr">
+                    <a:lnL w="9525" cap="flat" cmpd="sng" algn="ctr">
+                      <a:solidFill>
+                        <a:srgbClr val="E2E7EE"/>
+                      </a:solidFill>
+                      <a:prstDash val="solid"/>
+                      <a:round/>
+                      <a:headEnd type="none" w="med" len="med"/>
+                      <a:tailEnd type="none" w="med" len="med"/>
+                    </a:lnL>
+                    <a:lnR w="9525" cap="flat" cmpd="sng" algn="ctr">
+                      <a:solidFill>
+                        <a:srgbClr val="E2E7EE"/>
+                      </a:solidFill>
+                      <a:prstDash val="solid"/>
+                      <a:round/>
+                      <a:headEnd type="none" w="med" len="med"/>
+                      <a:tailEnd type="none" w="med" len="med"/>
+                    </a:lnR>
+                    <a:lnT w="9525" cap="flat" cmpd="sng" algn="ctr">
+                      <a:solidFill>
+                        <a:srgbClr val="E2E7EE"/>
+                      </a:solidFill>
+                      <a:prstDash val="solid"/>
+                      <a:round/>
+                      <a:headEnd type="none" w="med" len="med"/>
+                      <a:tailEnd type="none" w="med" len="med"/>
+                    </a:lnT>
+                    <a:lnB w="9525" cap="flat" cmpd="sng" algn="ctr">
+                      <a:solidFill>
+                        <a:srgbClr val="E2E7EE"/>
+                      </a:solidFill>
+                      <a:prstDash val="solid"/>
+                      <a:round/>
+                      <a:headEnd type="none" w="med" len="med"/>
+                      <a:tailEnd type="none" w="med" len="med"/>
+                    </a:lnB>
+                  </a:tcPr>
+                </a:tc>
+                <a:tc>
+                  <a:txBody>
+                    <a:bodyPr/>
+                    <a:lstStyle/>
+                    <a:p>
+                      <a:pPr indent="0" marL="0">
+                        <a:buNone/>
+                      </a:pPr>
+                      <a:r>
+                        <a:rPr lang="en-US" sz="1200" dirty="0">
+                          <a:solidFill>
+                            <a:srgbClr val="243044"/>
+                          </a:solidFill>
+                          <a:latin typeface="Calibri" pitchFamily="34" charset="0"/>
+                          <a:ea typeface="Calibri" pitchFamily="34" charset="-122"/>
+                          <a:cs typeface="Calibri" pitchFamily="34" charset="-120"/>
+                        </a:rPr>
+                        <a:t>Không dùng OCR ngoài — VLM tự đọc chữ từ ảnh (OCR thêm ở B3, Phần 06)</a:t>
+                      </a:r>
+                      <a:endParaRPr lang="en-US" sz="1200" dirty="0">
+                        <a:latin typeface="Calibri" charset="0"/>
+                        <a:ea typeface="Calibri" charset="0"/>
+                        <a:cs typeface="Calibri" charset="0"/>
+                      </a:endParaRPr>
+                    </a:p>
+                  </a:txBody>
+                  <a:tcPr marL="76200" marR="76200" marT="38100" marB="38100" anchor="ctr">
+                    <a:lnL w="9525" cap="flat" cmpd="sng" algn="ctr">
+                      <a:solidFill>
+                        <a:srgbClr val="E2E7EE"/>
+                      </a:solidFill>
+                      <a:prstDash val="solid"/>
+                      <a:round/>
+                      <a:headEnd type="none" w="med" len="med"/>
+                      <a:tailEnd type="none" w="med" len="med"/>
+                    </a:lnL>
+                    <a:lnR w="9525" cap="flat" cmpd="sng" algn="ctr">
+                      <a:solidFill>
+                        <a:srgbClr val="E2E7EE"/>
+                      </a:solidFill>
+                      <a:prstDash val="solid"/>
+                      <a:round/>
+                      <a:headEnd type="none" w="med" len="med"/>
+                      <a:tailEnd type="none" w="med" len="med"/>
+                    </a:lnR>
+                    <a:lnT w="9525" cap="flat" cmpd="sng" algn="ctr">
+                      <a:solidFill>
+                        <a:srgbClr val="E2E7EE"/>
+                      </a:solidFill>
+                      <a:prstDash val="solid"/>
+                      <a:round/>
+                      <a:headEnd type="none" w="med" len="med"/>
+                      <a:tailEnd type="none" w="med" len="med"/>
+                    </a:lnT>
+                    <a:lnB w="9525" cap="flat" cmpd="sng" algn="ctr">
+                      <a:solidFill>
+                        <a:srgbClr val="E2E7EE"/>
+                      </a:solidFill>
+                      <a:prstDash val="solid"/>
+                      <a:round/>
+                      <a:headEnd type="none" w="med" len="med"/>
+                      <a:tailEnd type="none" w="med" len="med"/>
+                    </a:lnB>
+                  </a:tcPr>
+                </a:tc>
+              </a:tr>
+              <a:tr h="457200">
+                <a:tc>
+                  <a:txBody>
+                    <a:bodyPr/>
+                    <a:lstStyle/>
+                    <a:p>
+                      <a:pPr indent="0" marL="0">
+                        <a:buNone/>
+                      </a:pPr>
+                      <a:r>
+                        <a:rPr lang="en-US" sz="1200" b="1" dirty="0">
+                          <a:solidFill>
+                            <a:srgbClr val="13294B"/>
+                          </a:solidFill>
+                          <a:latin typeface="Calibri" pitchFamily="34" charset="0"/>
+                          <a:ea typeface="Calibri" pitchFamily="34" charset="-122"/>
+                          <a:cs typeface="Calibri" pitchFamily="34" charset="-120"/>
+                        </a:rPr>
+                        <a:t>Mô hình ngôn ngữ</a:t>
+                      </a:r>
+                      <a:endParaRPr lang="en-US" sz="1200" dirty="0">
+                        <a:latin typeface="Calibri" charset="0"/>
+                        <a:ea typeface="Calibri" charset="0"/>
+                        <a:cs typeface="Calibri" charset="0"/>
+                      </a:endParaRPr>
+                    </a:p>
+                  </a:txBody>
+                  <a:tcPr marL="76200" marR="76200" marT="38100" marB="38100" anchor="ctr">
+                    <a:lnL w="9525" cap="flat" cmpd="sng" algn="ctr">
+                      <a:solidFill>
+                        <a:srgbClr val="E2E7EE"/>
+                      </a:solidFill>
+                      <a:prstDash val="solid"/>
+                      <a:round/>
+                      <a:headEnd type="none" w="med" len="med"/>
+                      <a:tailEnd type="none" w="med" len="med"/>
+                    </a:lnL>
+                    <a:lnR w="9525" cap="flat" cmpd="sng" algn="ctr">
+                      <a:solidFill>
+                        <a:srgbClr val="E2E7EE"/>
+                      </a:solidFill>
+                      <a:prstDash val="solid"/>
+                      <a:round/>
+                      <a:headEnd type="none" w="med" len="med"/>
+                      <a:tailEnd type="none" w="med" len="med"/>
+                    </a:lnR>
+                    <a:lnT w="9525" cap="flat" cmpd="sng" algn="ctr">
+                      <a:solidFill>
+                        <a:srgbClr val="E2E7EE"/>
+                      </a:solidFill>
+                      <a:prstDash val="solid"/>
+                      <a:round/>
+                      <a:headEnd type="none" w="med" len="med"/>
+                      <a:tailEnd type="none" w="med" len="med"/>
+                    </a:lnT>
+                    <a:lnB w="9525" cap="flat" cmpd="sng" algn="ctr">
+                      <a:solidFill>
+                        <a:srgbClr val="E2E7EE"/>
+                      </a:solidFill>
+                      <a:prstDash val="solid"/>
+                      <a:round/>
+                      <a:headEnd type="none" w="med" len="med"/>
+                      <a:tailEnd type="none" w="med" len="med"/>
+                    </a:lnB>
+                  </a:tcPr>
+                </a:tc>
+                <a:tc>
+                  <a:txBody>
+                    <a:bodyPr/>
+                    <a:lstStyle/>
+                    <a:p>
+                      <a:pPr indent="0" marL="0">
+                        <a:buNone/>
+                      </a:pPr>
+                      <a:r>
+                        <a:rPr lang="en-US" sz="1200" dirty="0">
+                          <a:solidFill>
+                            <a:srgbClr val="243044"/>
+                          </a:solidFill>
+                          <a:latin typeface="Calibri" pitchFamily="34" charset="0"/>
+                          <a:ea typeface="Calibri" pitchFamily="34" charset="-122"/>
+                          <a:cs typeface="Calibri" pitchFamily="34" charset="-120"/>
+                        </a:rPr>
+                        <a:t>ViT5 [5] (T5 tiếng Việt), đóng băng</a:t>
+                      </a:r>
+                      <a:endParaRPr lang="en-US" sz="1200" dirty="0">
+                        <a:latin typeface="Calibri" charset="0"/>
+                        <a:ea typeface="Calibri" charset="0"/>
+                        <a:cs typeface="Calibri" charset="0"/>
+                      </a:endParaRPr>
+                    </a:p>
+                  </a:txBody>
+                  <a:tcPr marL="76200" marR="76200" marT="38100" marB="38100" anchor="ctr">
+                    <a:lnL w="9525" cap="flat" cmpd="sng" algn="ctr">
+                      <a:solidFill>
+                        <a:srgbClr val="E2E7EE"/>
+                      </a:solidFill>
+                      <a:prstDash val="solid"/>
+                      <a:round/>
+                      <a:headEnd type="none" w="med" len="med"/>
+                      <a:tailEnd type="none" w="med" len="med"/>
+                    </a:lnL>
+                    <a:lnR w="9525" cap="flat" cmpd="sng" algn="ctr">
+                      <a:solidFill>
+                        <a:srgbClr val="E2E7EE"/>
+                      </a:solidFill>
+                      <a:prstDash val="solid"/>
+                      <a:round/>
+                      <a:headEnd type="none" w="med" len="med"/>
+                      <a:tailEnd type="none" w="med" len="med"/>
+                    </a:lnR>
+                    <a:lnT w="9525" cap="flat" cmpd="sng" algn="ctr">
+                      <a:solidFill>
+                        <a:srgbClr val="E2E7EE"/>
+                      </a:solidFill>
+                      <a:prstDash val="solid"/>
+                      <a:round/>
+                      <a:headEnd type="none" w="med" len="med"/>
+                      <a:tailEnd type="none" w="med" len="med"/>
+                    </a:lnT>
+                    <a:lnB w="9525" cap="flat" cmpd="sng" algn="ctr">
+                      <a:solidFill>
+                        <a:srgbClr val="E2E7EE"/>
+                      </a:solidFill>
+                      <a:prstDash val="solid"/>
+                      <a:round/>
+                      <a:headEnd type="none" w="med" len="med"/>
+                      <a:tailEnd type="none" w="med" len="med"/>
+                    </a:lnB>
+                  </a:tcPr>
+                </a:tc>
+                <a:tc>
+                  <a:txBody>
+                    <a:bodyPr/>
+                    <a:lstStyle/>
+                    <a:p>
+                      <a:pPr indent="0" marL="0">
+                        <a:buNone/>
+                      </a:pPr>
+                      <a:r>
+                        <a:rPr lang="en-US" sz="1200" dirty="0">
+                          <a:solidFill>
+                            <a:srgbClr val="243044"/>
+                          </a:solidFill>
+                          <a:latin typeface="Calibri" pitchFamily="34" charset="0"/>
+                          <a:ea typeface="Calibri" pitchFamily="34" charset="-122"/>
+                          <a:cs typeface="Calibri" pitchFamily="34" charset="-120"/>
+                        </a:rPr>
+                        <a:t>Decoder Qwen2.5-3B, 36 lớp, 4-bit NF4</a:t>
+                      </a:r>
+                      <a:endParaRPr lang="en-US" sz="1200" dirty="0">
+                        <a:latin typeface="Calibri" charset="0"/>
+                        <a:ea typeface="Calibri" charset="0"/>
+                        <a:cs typeface="Calibri" charset="0"/>
+                      </a:endParaRPr>
+                    </a:p>
+                  </a:txBody>
+                  <a:tcPr marL="76200" marR="76200" marT="38100" marB="38100" anchor="ctr">
+                    <a:lnL w="9525" cap="flat" cmpd="sng" algn="ctr">
+                      <a:solidFill>
+                        <a:srgbClr val="E2E7EE"/>
+                      </a:solidFill>
+                      <a:prstDash val="solid"/>
+                      <a:round/>
+                      <a:headEnd type="none" w="med" len="med"/>
+                      <a:tailEnd type="none" w="med" len="med"/>
+                    </a:lnL>
+                    <a:lnR w="9525" cap="flat" cmpd="sng" algn="ctr">
+                      <a:solidFill>
+                        <a:srgbClr val="E2E7EE"/>
+                      </a:solidFill>
+                      <a:prstDash val="solid"/>
+                      <a:round/>
+                      <a:headEnd type="none" w="med" len="med"/>
+                      <a:tailEnd type="none" w="med" len="med"/>
+                    </a:lnR>
+                    <a:lnT w="9525" cap="flat" cmpd="sng" algn="ctr">
+                      <a:solidFill>
+                        <a:srgbClr val="E2E7EE"/>
+                      </a:solidFill>
+                      <a:prstDash val="solid"/>
+                      <a:round/>
+                      <a:headEnd type="none" w="med" len="med"/>
+                      <a:tailEnd type="none" w="med" len="med"/>
+                    </a:lnT>
+                    <a:lnB w="9525" cap="flat" cmpd="sng" algn="ctr">
+                      <a:solidFill>
+                        <a:srgbClr val="E2E7EE"/>
+                      </a:solidFill>
+                      <a:prstDash val="solid"/>
+                      <a:round/>
+                      <a:headEnd type="none" w="med" len="med"/>
+                      <a:tailEnd type="none" w="med" len="med"/>
+                    </a:lnB>
+                  </a:tcPr>
+                </a:tc>
+              </a:tr>
+              <a:tr h="457200">
+                <a:tc>
+                  <a:txBody>
+                    <a:bodyPr/>
+                    <a:lstStyle/>
+                    <a:p>
+                      <a:pPr indent="0" marL="0">
+                        <a:buNone/>
+                      </a:pPr>
+                      <a:r>
+                        <a:rPr lang="en-US" sz="1200" b="1" dirty="0">
+                          <a:solidFill>
+                            <a:srgbClr val="13294B"/>
+                          </a:solidFill>
+                          <a:latin typeface="Calibri" pitchFamily="34" charset="0"/>
+                          <a:ea typeface="Calibri" pitchFamily="34" charset="-122"/>
+                          <a:cs typeface="Calibri" pitchFamily="34" charset="-120"/>
+                        </a:rPr>
+                        <a:t>Phần được train</a:t>
+                      </a:r>
+                      <a:endParaRPr lang="en-US" sz="1200" dirty="0">
+                        <a:latin typeface="Calibri" charset="0"/>
+                        <a:ea typeface="Calibri" charset="0"/>
+                        <a:cs typeface="Calibri" charset="0"/>
+                      </a:endParaRPr>
+                    </a:p>
+                  </a:txBody>
+                  <a:tcPr marL="76200" marR="76200" marT="38100" marB="38100" anchor="ctr">
+                    <a:lnL w="9525" cap="flat" cmpd="sng" algn="ctr">
+                      <a:solidFill>
+                        <a:srgbClr val="E2E7EE"/>
+                      </a:solidFill>
+                      <a:prstDash val="solid"/>
+                      <a:round/>
+                      <a:headEnd type="none" w="med" len="med"/>
+                      <a:tailEnd type="none" w="med" len="med"/>
+                    </a:lnL>
+                    <a:lnR w="9525" cap="flat" cmpd="sng" algn="ctr">
+                      <a:solidFill>
+                        <a:srgbClr val="E2E7EE"/>
+                      </a:solidFill>
+                      <a:prstDash val="solid"/>
+                      <a:round/>
+                      <a:headEnd type="none" w="med" len="med"/>
+                      <a:tailEnd type="none" w="med" len="med"/>
+                    </a:lnR>
+                    <a:lnT w="9525" cap="flat" cmpd="sng" algn="ctr">
+                      <a:solidFill>
+                        <a:srgbClr val="E2E7EE"/>
+                      </a:solidFill>
+                      <a:prstDash val="solid"/>
+                      <a:round/>
+                      <a:headEnd type="none" w="med" len="med"/>
+                      <a:tailEnd type="none" w="med" len="med"/>
+                    </a:lnT>
+                    <a:lnB w="9525" cap="flat" cmpd="sng" algn="ctr">
+                      <a:solidFill>
+                        <a:srgbClr val="E2E7EE"/>
+                      </a:solidFill>
+                      <a:prstDash val="solid"/>
+                      <a:round/>
+                      <a:headEnd type="none" w="med" len="med"/>
+                      <a:tailEnd type="none" w="med" len="med"/>
+                    </a:lnB>
+                  </a:tcPr>
+                </a:tc>
+                <a:tc>
+                  <a:txBody>
+                    <a:bodyPr/>
+                    <a:lstStyle/>
+                    <a:p>
+                      <a:pPr indent="0" marL="0">
+                        <a:buNone/>
+                      </a:pPr>
+                      <a:r>
+                        <a:rPr lang="en-US" sz="1200" dirty="0">
+                          <a:solidFill>
+                            <a:srgbClr val="243044"/>
+                          </a:solidFill>
+                          <a:latin typeface="Calibri" pitchFamily="34" charset="0"/>
+                          <a:ea typeface="Calibri" pitchFamily="34" charset="-122"/>
+                          <a:cs typeface="Calibri" pitchFamily="34" charset="-120"/>
+                        </a:rPr>
+                        <a:t>Q-Former (khởi tạo từ BLIP-2) trộn ảnh, câu hỏi và OCR</a:t>
+                      </a:r>
+                      <a:endParaRPr lang="en-US" sz="1200" dirty="0">
+                        <a:latin typeface="Calibri" charset="0"/>
+                        <a:ea typeface="Calibri" charset="0"/>
+                        <a:cs typeface="Calibri" charset="0"/>
+                      </a:endParaRPr>
+                    </a:p>
+                  </a:txBody>
+                  <a:tcPr marL="76200" marR="76200" marT="38100" marB="38100" anchor="ctr">
+                    <a:lnL w="9525" cap="flat" cmpd="sng" algn="ctr">
+                      <a:solidFill>
+                        <a:srgbClr val="E2E7EE"/>
+                      </a:solidFill>
+                      <a:prstDash val="solid"/>
+                      <a:round/>
+                      <a:headEnd type="none" w="med" len="med"/>
+                      <a:tailEnd type="none" w="med" len="med"/>
+                    </a:lnL>
+                    <a:lnR w="9525" cap="flat" cmpd="sng" algn="ctr">
+                      <a:solidFill>
+                        <a:srgbClr val="E2E7EE"/>
+                      </a:solidFill>
+                      <a:prstDash val="solid"/>
+                      <a:round/>
+                      <a:headEnd type="none" w="med" len="med"/>
+                      <a:tailEnd type="none" w="med" len="med"/>
+                    </a:lnR>
+                    <a:lnT w="9525" cap="flat" cmpd="sng" algn="ctr">
+                      <a:solidFill>
+                        <a:srgbClr val="E2E7EE"/>
+                      </a:solidFill>
+                      <a:prstDash val="solid"/>
+                      <a:round/>
+                      <a:headEnd type="none" w="med" len="med"/>
+                      <a:tailEnd type="none" w="med" len="med"/>
+                    </a:lnT>
+                    <a:lnB w="9525" cap="flat" cmpd="sng" algn="ctr">
+                      <a:solidFill>
+                        <a:srgbClr val="E2E7EE"/>
+                      </a:solidFill>
+                      <a:prstDash val="solid"/>
+                      <a:round/>
+                      <a:headEnd type="none" w="med" len="med"/>
+                      <a:tailEnd type="none" w="med" len="med"/>
+                    </a:lnB>
+                  </a:tcPr>
+                </a:tc>
+                <a:tc>
+                  <a:txBody>
+                    <a:bodyPr/>
+                    <a:lstStyle/>
+                    <a:p>
+                      <a:pPr indent="0" marL="0">
+                        <a:buNone/>
+                      </a:pPr>
+                      <a:r>
+                        <a:rPr lang="en-US" sz="1200" dirty="0">
+                          <a:solidFill>
+                            <a:srgbClr val="243044"/>
+                          </a:solidFill>
+                          <a:latin typeface="Calibri" pitchFamily="34" charset="0"/>
+                          <a:ea typeface="Calibri" pitchFamily="34" charset="-122"/>
+                          <a:cs typeface="Calibri" pitchFamily="34" charset="-120"/>
+                        </a:rPr>
+                        <a:t>LoRA trên q, k, v, o: 7,37 triệu tham số (0,196%)</a:t>
+                      </a:r>
+                      <a:endParaRPr lang="en-US" sz="1200" dirty="0">
+                        <a:latin typeface="Calibri" charset="0"/>
+                        <a:ea typeface="Calibri" charset="0"/>
+                        <a:cs typeface="Calibri" charset="0"/>
+                      </a:endParaRPr>
+                    </a:p>
+                  </a:txBody>
+                  <a:tcPr marL="76200" marR="76200" marT="38100" marB="38100" anchor="ctr">
+                    <a:lnL w="9525" cap="flat" cmpd="sng" algn="ctr">
+                      <a:solidFill>
+                        <a:srgbClr val="E2E7EE"/>
+                      </a:solidFill>
+                      <a:prstDash val="solid"/>
+                      <a:round/>
+                      <a:headEnd type="none" w="med" len="med"/>
+                      <a:tailEnd type="none" w="med" len="med"/>
+                    </a:lnL>
+                    <a:lnR w="9525" cap="flat" cmpd="sng" algn="ctr">
+                      <a:solidFill>
+                        <a:srgbClr val="E2E7EE"/>
+                      </a:solidFill>
+                      <a:prstDash val="solid"/>
+                      <a:round/>
+                      <a:headEnd type="none" w="med" len="med"/>
+                      <a:tailEnd type="none" w="med" len="med"/>
+                    </a:lnR>
+                    <a:lnT w="9525" cap="flat" cmpd="sng" algn="ctr">
+                      <a:solidFill>
+                        <a:srgbClr val="E2E7EE"/>
+                      </a:solidFill>
+                      <a:prstDash val="solid"/>
+                      <a:round/>
+                      <a:headEnd type="none" w="med" len="med"/>
+                      <a:tailEnd type="none" w="med" len="med"/>
+                    </a:lnT>
+                    <a:lnB w="9525" cap="flat" cmpd="sng" algn="ctr">
+                      <a:solidFill>
+                        <a:srgbClr val="E2E7EE"/>
+                      </a:solidFill>
+                      <a:prstDash val="solid"/>
+                      <a:round/>
+                      <a:headEnd type="none" w="med" len="med"/>
+                      <a:tailEnd type="none" w="med" len="med"/>
+                    </a:lnB>
+                  </a:tcPr>
+                </a:tc>
+              </a:tr>
+              <a:tr h="457200">
+                <a:tc>
+                  <a:txBody>
+                    <a:bodyPr/>
+                    <a:lstStyle/>
+                    <a:p>
+                      <a:pPr indent="0" marL="0">
+                        <a:buNone/>
+                      </a:pPr>
+                      <a:r>
+                        <a:rPr lang="en-US" sz="1200" b="1" dirty="0">
+                          <a:solidFill>
+                            <a:srgbClr val="13294B"/>
+                          </a:solidFill>
+                          <a:latin typeface="Calibri" pitchFamily="34" charset="0"/>
+                          <a:ea typeface="Calibri" pitchFamily="34" charset="-122"/>
+                          <a:cs typeface="Calibri" pitchFamily="34" charset="-120"/>
+                        </a:rPr>
+                        <a:t>Xử lý dữ liệu</a:t>
+                      </a:r>
+                      <a:endParaRPr lang="en-US" sz="1200" dirty="0">
+                        <a:latin typeface="Calibri" charset="0"/>
+                        <a:ea typeface="Calibri" charset="0"/>
+                        <a:cs typeface="Calibri" charset="0"/>
+                      </a:endParaRPr>
+                    </a:p>
+                  </a:txBody>
+                  <a:tcPr marL="76200" marR="76200" marT="38100" marB="38100" anchor="ctr">
+                    <a:lnL w="9525" cap="flat" cmpd="sng" algn="ctr">
+                      <a:solidFill>
+                        <a:srgbClr val="E2E7EE"/>
+                      </a:solidFill>
+                      <a:prstDash val="solid"/>
+                      <a:round/>
+                      <a:headEnd type="none" w="med" len="med"/>
+                      <a:tailEnd type="none" w="med" len="med"/>
+                    </a:lnL>
+                    <a:lnR w="9525" cap="flat" cmpd="sng" algn="ctr">
+                      <a:solidFill>
+                        <a:srgbClr val="E2E7EE"/>
+                      </a:solidFill>
+                      <a:prstDash val="solid"/>
+                      <a:round/>
+                      <a:headEnd type="none" w="med" len="med"/>
+                      <a:tailEnd type="none" w="med" len="med"/>
+                    </a:lnR>
+                    <a:lnT w="9525" cap="flat" cmpd="sng" algn="ctr">
+                      <a:solidFill>
+                        <a:srgbClr val="E2E7EE"/>
+                      </a:solidFill>
+                      <a:prstDash val="solid"/>
+                      <a:round/>
+                      <a:headEnd type="none" w="med" len="med"/>
+                      <a:tailEnd type="none" w="med" len="med"/>
+                    </a:lnT>
+                    <a:lnB w="9525" cap="flat" cmpd="sng" algn="ctr">
+                      <a:solidFill>
+                        <a:srgbClr val="E2E7EE"/>
+                      </a:solidFill>
+                      <a:prstDash val="solid"/>
+                      <a:round/>
+                      <a:headEnd type="none" w="med" len="med"/>
+                      <a:tailEnd type="none" w="med" len="med"/>
+                    </a:lnB>
+                  </a:tcPr>
+                </a:tc>
+                <a:tc>
+                  <a:txBody>
+                    <a:bodyPr/>
+                    <a:lstStyle/>
+                    <a:p>
+                      <a:pPr indent="0" marL="0">
+                        <a:buNone/>
+                      </a:pPr>
+                      <a:r>
+                        <a:rPr lang="en-US" sz="1200" dirty="0">
+                          <a:solidFill>
+                            <a:srgbClr val="243044"/>
+                          </a:solidFill>
+                          <a:latin typeface="Calibri" pitchFamily="34" charset="0"/>
+                          <a:ea typeface="Calibri" pitchFamily="34" charset="-122"/>
+                          <a:cs typeface="Calibri" pitchFamily="34" charset="-120"/>
+                        </a:rPr>
+                        <a:t>Sắp chữ OCR trái-trên → phải-dưới (giúp hầu hết model)</a:t>
+                      </a:r>
+                      <a:endParaRPr lang="en-US" sz="1200" dirty="0">
+                        <a:latin typeface="Calibri" charset="0"/>
+                        <a:ea typeface="Calibri" charset="0"/>
+                        <a:cs typeface="Calibri" charset="0"/>
+                      </a:endParaRPr>
+                    </a:p>
+                  </a:txBody>
+                  <a:tcPr marL="76200" marR="76200" marT="38100" marB="38100" anchor="ctr">
+                    <a:lnL w="9525" cap="flat" cmpd="sng" algn="ctr">
+                      <a:solidFill>
+                        <a:srgbClr val="E2E7EE"/>
+                      </a:solidFill>
+                      <a:prstDash val="solid"/>
+                      <a:round/>
+                      <a:headEnd type="none" w="med" len="med"/>
+                      <a:tailEnd type="none" w="med" len="med"/>
+                    </a:lnL>
+                    <a:lnR w="9525" cap="flat" cmpd="sng" algn="ctr">
+                      <a:solidFill>
+                        <a:srgbClr val="E2E7EE"/>
+                      </a:solidFill>
+                      <a:prstDash val="solid"/>
+                      <a:round/>
+                      <a:headEnd type="none" w="med" len="med"/>
+                      <a:tailEnd type="none" w="med" len="med"/>
+                    </a:lnR>
+                    <a:lnT w="9525" cap="flat" cmpd="sng" algn="ctr">
+                      <a:solidFill>
+                        <a:srgbClr val="E2E7EE"/>
+                      </a:solidFill>
+                      <a:prstDash val="solid"/>
+                      <a:round/>
+                      <a:headEnd type="none" w="med" len="med"/>
+                      <a:tailEnd type="none" w="med" len="med"/>
+                    </a:lnT>
+                    <a:lnB w="9525" cap="flat" cmpd="sng" algn="ctr">
+                      <a:solidFill>
+                        <a:srgbClr val="E2E7EE"/>
+                      </a:solidFill>
+                      <a:prstDash val="solid"/>
+                      <a:round/>
+                      <a:headEnd type="none" w="med" len="med"/>
+                      <a:tailEnd type="none" w="med" len="med"/>
+                    </a:lnB>
+                  </a:tcPr>
+                </a:tc>
+                <a:tc>
+                  <a:txBody>
+                    <a:bodyPr/>
+                    <a:lstStyle/>
+                    <a:p>
+                      <a:pPr indent="0" marL="0">
+                        <a:buNone/>
+                      </a:pPr>
+                      <a:r>
+                        <a:rPr lang="en-US" sz="1200" dirty="0">
+                          <a:solidFill>
+                            <a:srgbClr val="243044"/>
+                          </a:solidFill>
+                          <a:latin typeface="Calibri" pitchFamily="34" charset="0"/>
+                          <a:ea typeface="Calibri" pitchFamily="34" charset="-122"/>
+                          <a:cs typeface="Calibri" pitchFamily="34" charset="-120"/>
+                        </a:rPr>
+                        <a:t>Split chính thức; chuẩn hoá tiếng Việt (NFC, chữ thường, giữ dấu thanh)</a:t>
+                      </a:r>
+                      <a:endParaRPr lang="en-US" sz="1200" dirty="0">
+                        <a:latin typeface="Calibri" charset="0"/>
+                        <a:ea typeface="Calibri" charset="0"/>
+                        <a:cs typeface="Calibri" charset="0"/>
+                      </a:endParaRPr>
+                    </a:p>
+                  </a:txBody>
+                  <a:tcPr marL="76200" marR="76200" marT="38100" marB="38100" anchor="ctr">
+                    <a:lnL w="9525" cap="flat" cmpd="sng" algn="ctr">
+                      <a:solidFill>
+                        <a:srgbClr val="E2E7EE"/>
+                      </a:solidFill>
+                      <a:prstDash val="solid"/>
+                      <a:round/>
+                      <a:headEnd type="none" w="med" len="med"/>
+                      <a:tailEnd type="none" w="med" len="med"/>
+                    </a:lnL>
+                    <a:lnR w="9525" cap="flat" cmpd="sng" algn="ctr">
+                      <a:solidFill>
+                        <a:srgbClr val="E2E7EE"/>
+                      </a:solidFill>
+                      <a:prstDash val="solid"/>
+                      <a:round/>
+                      <a:headEnd type="none" w="med" len="med"/>
+                      <a:tailEnd type="none" w="med" len="med"/>
+                    </a:lnR>
+                    <a:lnT w="9525" cap="flat" cmpd="sng" algn="ctr">
+                      <a:solidFill>
+                        <a:srgbClr val="E2E7EE"/>
+                      </a:solidFill>
+                      <a:prstDash val="solid"/>
+                      <a:round/>
+                      <a:headEnd type="none" w="med" len="med"/>
+                      <a:tailEnd type="none" w="med" len="med"/>
+                    </a:lnT>
+                    <a:lnB w="9525" cap="flat" cmpd="sng" algn="ctr">
+                      <a:solidFill>
+                        <a:srgbClr val="E2E7EE"/>
+                      </a:solidFill>
+                      <a:prstDash val="solid"/>
+                      <a:round/>
+                      <a:headEnd type="none" w="med" len="med"/>
+                      <a:tailEnd type="none" w="med" len="med"/>
+                    </a:lnB>
+                  </a:tcPr>
+                </a:tc>
+              </a:tr>
+              <a:tr h="457200">
+                <a:tc>
+                  <a:txBody>
+                    <a:bodyPr/>
+                    <a:lstStyle/>
+                    <a:p>
+                      <a:pPr indent="0" marL="0">
+                        <a:buNone/>
+                      </a:pPr>
+                      <a:r>
+                        <a:rPr lang="en-US" sz="1200" b="1" dirty="0">
+                          <a:solidFill>
+                            <a:srgbClr val="13294B"/>
+                          </a:solidFill>
+                          <a:latin typeface="Calibri" pitchFamily="34" charset="0"/>
+                          <a:ea typeface="Calibri" pitchFamily="34" charset="-122"/>
+                          <a:cs typeface="Calibri" pitchFamily="34" charset="-120"/>
+                        </a:rPr>
+                        <a:t>Dữ liệu train</a:t>
+                      </a:r>
+                      <a:endParaRPr lang="en-US" sz="1200" dirty="0">
+                        <a:latin typeface="Calibri" charset="0"/>
+                        <a:ea typeface="Calibri" charset="0"/>
+                        <a:cs typeface="Calibri" charset="0"/>
+                      </a:endParaRPr>
+                    </a:p>
+                  </a:txBody>
+                  <a:tcPr marL="76200" marR="76200" marT="38100" marB="38100" anchor="ctr">
+                    <a:lnL w="9525" cap="flat" cmpd="sng" algn="ctr">
+                      <a:solidFill>
+                        <a:srgbClr val="E2E7EE"/>
+                      </a:solidFill>
+                      <a:prstDash val="solid"/>
+                      <a:round/>
+                      <a:headEnd type="none" w="med" len="med"/>
+                      <a:tailEnd type="none" w="med" len="med"/>
+                    </a:lnL>
+                    <a:lnR w="9525" cap="flat" cmpd="sng" algn="ctr">
+                      <a:solidFill>
+                        <a:srgbClr val="E2E7EE"/>
+                      </a:solidFill>
+                      <a:prstDash val="solid"/>
+                      <a:round/>
+                      <a:headEnd type="none" w="med" len="med"/>
+                      <a:tailEnd type="none" w="med" len="med"/>
+                    </a:lnR>
+                    <a:lnT w="9525" cap="flat" cmpd="sng" algn="ctr">
+                      <a:solidFill>
+                        <a:srgbClr val="E2E7EE"/>
+                      </a:solidFill>
+                      <a:prstDash val="solid"/>
+                      <a:round/>
+                      <a:headEnd type="none" w="med" len="med"/>
+                      <a:tailEnd type="none" w="med" len="med"/>
+                    </a:lnT>
+                    <a:lnB w="9525" cap="flat" cmpd="sng" algn="ctr">
+                      <a:solidFill>
+                        <a:srgbClr val="E2E7EE"/>
+                      </a:solidFill>
+                      <a:prstDash val="solid"/>
+                      <a:round/>
+                      <a:headEnd type="none" w="med" len="med"/>
+                      <a:tailEnd type="none" w="med" len="med"/>
+                    </a:lnB>
+                  </a:tcPr>
+                </a:tc>
+                <a:tc>
+                  <a:txBody>
+                    <a:bodyPr/>
+                    <a:lstStyle/>
+                    <a:p>
+                      <a:pPr indent="0" marL="0">
+                        <a:buNone/>
+                      </a:pPr>
+                      <a:r>
+                        <a:rPr lang="en-US" sz="1200" dirty="0">
+                          <a:solidFill>
+                            <a:srgbClr val="243044"/>
+                          </a:solidFill>
+                          <a:latin typeface="Calibri" pitchFamily="34" charset="0"/>
+                          <a:ea typeface="Calibri" pitchFamily="34" charset="-122"/>
+                          <a:cs typeface="Calibri" pitchFamily="34" charset="-120"/>
+                        </a:rPr>
+                        <a:t>Toàn bộ train ViTextVQA</a:t>
+                      </a:r>
+                      <a:endParaRPr lang="en-US" sz="1200" dirty="0">
+                        <a:latin typeface="Calibri" charset="0"/>
+                        <a:ea typeface="Calibri" charset="0"/>
+                        <a:cs typeface="Calibri" charset="0"/>
+                      </a:endParaRPr>
+                    </a:p>
+                  </a:txBody>
+                  <a:tcPr marL="76200" marR="76200" marT="38100" marB="38100" anchor="ctr">
+                    <a:lnL w="9525" cap="flat" cmpd="sng" algn="ctr">
+                      <a:solidFill>
+                        <a:srgbClr val="E2E7EE"/>
+                      </a:solidFill>
+                      <a:prstDash val="solid"/>
+                      <a:round/>
+                      <a:headEnd type="none" w="med" len="med"/>
+                      <a:tailEnd type="none" w="med" len="med"/>
+                    </a:lnL>
+                    <a:lnR w="9525" cap="flat" cmpd="sng" algn="ctr">
+                      <a:solidFill>
+                        <a:srgbClr val="E2E7EE"/>
+                      </a:solidFill>
+                      <a:prstDash val="solid"/>
+                      <a:round/>
+                      <a:headEnd type="none" w="med" len="med"/>
+                      <a:tailEnd type="none" w="med" len="med"/>
+                    </a:lnR>
+                    <a:lnT w="9525" cap="flat" cmpd="sng" algn="ctr">
+                      <a:solidFill>
+                        <a:srgbClr val="E2E7EE"/>
+                      </a:solidFill>
+                      <a:prstDash val="solid"/>
+                      <a:round/>
+                      <a:headEnd type="none" w="med" len="med"/>
+                      <a:tailEnd type="none" w="med" len="med"/>
+                    </a:lnT>
+                    <a:lnB w="9525" cap="flat" cmpd="sng" algn="ctr">
+                      <a:solidFill>
+                        <a:srgbClr val="E2E7EE"/>
+                      </a:solidFill>
+                      <a:prstDash val="solid"/>
+                      <a:round/>
+                      <a:headEnd type="none" w="med" len="med"/>
+                      <a:tailEnd type="none" w="med" len="med"/>
+                    </a:lnB>
+                  </a:tcPr>
+                </a:tc>
+                <a:tc>
+                  <a:txBody>
+                    <a:bodyPr/>
+                    <a:lstStyle/>
+                    <a:p>
+                      <a:pPr indent="0" marL="0">
+                        <a:buNone/>
+                      </a:pPr>
+                      <a:r>
+                        <a:rPr lang="en-US" sz="1200" dirty="0">
+                          <a:solidFill>
+                            <a:srgbClr val="243044"/>
+                          </a:solidFill>
+                          <a:latin typeface="Calibri" pitchFamily="34" charset="0"/>
+                          <a:ea typeface="Calibri" pitchFamily="34" charset="-122"/>
+                          <a:cs typeface="Calibri" pitchFamily="34" charset="-120"/>
+                        </a:rPr>
+                        <a:t>Toàn bộ train ViTextVQA, 1 epoch (3,03 h trên 1 L4)</a:t>
+                      </a:r>
+                      <a:endParaRPr lang="en-US" sz="1200" dirty="0">
+                        <a:latin typeface="Calibri" charset="0"/>
+                        <a:ea typeface="Calibri" charset="0"/>
+                        <a:cs typeface="Calibri" charset="0"/>
+                      </a:endParaRPr>
+                    </a:p>
+                  </a:txBody>
+                  <a:tcPr marL="76200" marR="76200" marT="38100" marB="38100" anchor="ctr">
+                    <a:lnL w="9525" cap="flat" cmpd="sng" algn="ctr">
+                      <a:solidFill>
+                        <a:srgbClr val="E2E7EE"/>
+                      </a:solidFill>
+                      <a:prstDash val="solid"/>
+                      <a:round/>
+                      <a:headEnd type="none" w="med" len="med"/>
+                      <a:tailEnd type="none" w="med" len="med"/>
+                    </a:lnL>
+                    <a:lnR w="9525" cap="flat" cmpd="sng" algn="ctr">
+                      <a:solidFill>
+                        <a:srgbClr val="E2E7EE"/>
+                      </a:solidFill>
+                      <a:prstDash val="solid"/>
+                      <a:round/>
+                      <a:headEnd type="none" w="med" len="med"/>
+                      <a:tailEnd type="none" w="med" len="med"/>
+                    </a:lnR>
+                    <a:lnT w="9525" cap="flat" cmpd="sng" algn="ctr">
+                      <a:solidFill>
+                        <a:srgbClr val="E2E7EE"/>
+                      </a:solidFill>
+                      <a:prstDash val="solid"/>
+                      <a:round/>
+                      <a:headEnd type="none" w="med" len="med"/>
+                      <a:tailEnd type="none" w="med" len="med"/>
+                    </a:lnT>
+                    <a:lnB w="9525" cap="flat" cmpd="sng" algn="ctr">
+                      <a:solidFill>
+                        <a:srgbClr val="E2E7EE"/>
+                      </a:solidFill>
+                      <a:prstDash val="solid"/>
+                      <a:round/>
+                      <a:headEnd type="none" w="med" len="med"/>
+                      <a:tailEnd type="none" w="med" len="med"/>
+                    </a:lnB>
+                  </a:tcPr>
+                </a:tc>
+              </a:tr>
+              <a:tr h="457200">
+                <a:tc>
+                  <a:txBody>
+                    <a:bodyPr/>
+                    <a:lstStyle/>
+                    <a:p>
+                      <a:pPr indent="0" marL="0">
+                        <a:buNone/>
+                      </a:pPr>
+                      <a:r>
+                        <a:rPr lang="en-US" sz="1200" b="1" dirty="0">
+                          <a:solidFill>
+                            <a:srgbClr val="13294B"/>
+                          </a:solidFill>
+                          <a:latin typeface="Calibri" pitchFamily="34" charset="0"/>
+                          <a:ea typeface="Calibri" pitchFamily="34" charset="-122"/>
+                          <a:cs typeface="Calibri" pitchFamily="34" charset="-120"/>
+                        </a:rPr>
+                        <a:t>Metric</a:t>
+                      </a:r>
+                      <a:endParaRPr lang="en-US" sz="1200" dirty="0">
+                        <a:latin typeface="Calibri" charset="0"/>
+                        <a:ea typeface="Calibri" charset="0"/>
+                        <a:cs typeface="Calibri" charset="0"/>
+                      </a:endParaRPr>
+                    </a:p>
+                  </a:txBody>
+                  <a:tcPr marL="76200" marR="76200" marT="38100" marB="38100" anchor="ctr">
+                    <a:lnL w="9525" cap="flat" cmpd="sng" algn="ctr">
+                      <a:solidFill>
+                        <a:srgbClr val="E2E7EE"/>
+                      </a:solidFill>
+                      <a:prstDash val="solid"/>
+                      <a:round/>
+                      <a:headEnd type="none" w="med" len="med"/>
+                      <a:tailEnd type="none" w="med" len="med"/>
+                    </a:lnL>
+                    <a:lnR w="9525" cap="flat" cmpd="sng" algn="ctr">
+                      <a:solidFill>
+                        <a:srgbClr val="E2E7EE"/>
+                      </a:solidFill>
+                      <a:prstDash val="solid"/>
+                      <a:round/>
+                      <a:headEnd type="none" w="med" len="med"/>
+                      <a:tailEnd type="none" w="med" len="med"/>
+                    </a:lnR>
+                    <a:lnT w="9525" cap="flat" cmpd="sng" algn="ctr">
+                      <a:solidFill>
+                        <a:srgbClr val="E2E7EE"/>
+                      </a:solidFill>
+                      <a:prstDash val="solid"/>
+                      <a:round/>
+                      <a:headEnd type="none" w="med" len="med"/>
+                      <a:tailEnd type="none" w="med" len="med"/>
+                    </a:lnT>
+                    <a:lnB w="9525" cap="flat" cmpd="sng" algn="ctr">
+                      <a:solidFill>
+                        <a:srgbClr val="E2E7EE"/>
+                      </a:solidFill>
+                      <a:prstDash val="solid"/>
+                      <a:round/>
+                      <a:headEnd type="none" w="med" len="med"/>
+                      <a:tailEnd type="none" w="med" len="med"/>
+                    </a:lnB>
+                  </a:tcPr>
+                </a:tc>
+                <a:tc>
+                  <a:txBody>
+                    <a:bodyPr/>
+                    <a:lstStyle/>
+                    <a:p>
+                      <a:pPr indent="0" marL="0">
+                        <a:buNone/>
+                      </a:pPr>
+                      <a:r>
+                        <a:rPr lang="en-US" sz="1200" dirty="0">
+                          <a:solidFill>
+                            <a:srgbClr val="243044"/>
+                          </a:solidFill>
+                          <a:latin typeface="Calibri" pitchFamily="34" charset="0"/>
+                          <a:ea typeface="Calibri" pitchFamily="34" charset="-122"/>
+                          <a:cs typeface="Calibri" pitchFamily="34" charset="-120"/>
+                        </a:rPr>
+                        <a:t>EM, F1; không công bố cách chuẩn hoá</a:t>
+                      </a:r>
+                      <a:endParaRPr lang="en-US" sz="1200" dirty="0">
+                        <a:latin typeface="Calibri" charset="0"/>
+                        <a:ea typeface="Calibri" charset="0"/>
+                        <a:cs typeface="Calibri" charset="0"/>
+                      </a:endParaRPr>
+                    </a:p>
+                  </a:txBody>
+                  <a:tcPr marL="76200" marR="76200" marT="38100" marB="38100" anchor="ctr">
+                    <a:lnL w="9525" cap="flat" cmpd="sng" algn="ctr">
+                      <a:solidFill>
+                        <a:srgbClr val="E2E7EE"/>
+                      </a:solidFill>
+                      <a:prstDash val="solid"/>
+                      <a:round/>
+                      <a:headEnd type="none" w="med" len="med"/>
+                      <a:tailEnd type="none" w="med" len="med"/>
+                    </a:lnL>
+                    <a:lnR w="9525" cap="flat" cmpd="sng" algn="ctr">
+                      <a:solidFill>
+                        <a:srgbClr val="E2E7EE"/>
+                      </a:solidFill>
+                      <a:prstDash val="solid"/>
+                      <a:round/>
+                      <a:headEnd type="none" w="med" len="med"/>
+                      <a:tailEnd type="none" w="med" len="med"/>
+                    </a:lnR>
+                    <a:lnT w="9525" cap="flat" cmpd="sng" algn="ctr">
+                      <a:solidFill>
+                        <a:srgbClr val="E2E7EE"/>
+                      </a:solidFill>
+                      <a:prstDash val="solid"/>
+                      <a:round/>
+                      <a:headEnd type="none" w="med" len="med"/>
+                      <a:tailEnd type="none" w="med" len="med"/>
+                    </a:lnT>
+                    <a:lnB w="9525" cap="flat" cmpd="sng" algn="ctr">
+                      <a:solidFill>
+                        <a:srgbClr val="E2E7EE"/>
+                      </a:solidFill>
+                      <a:prstDash val="solid"/>
+                      <a:round/>
+                      <a:headEnd type="none" w="med" len="med"/>
+                      <a:tailEnd type="none" w="med" len="med"/>
+                    </a:lnB>
+                  </a:tcPr>
+                </a:tc>
+                <a:tc>
+                  <a:txBody>
+                    <a:bodyPr/>
+                    <a:lstStyle/>
+                    <a:p>
+                      <a:pPr indent="0" marL="0">
+                        <a:buNone/>
+                      </a:pPr>
+                      <a:r>
+                        <a:rPr lang="en-US" sz="1200" dirty="0">
+                          <a:solidFill>
+                            <a:srgbClr val="243044"/>
+                          </a:solidFill>
+                          <a:latin typeface="Calibri" pitchFamily="34" charset="0"/>
+                          <a:ea typeface="Calibri" pitchFamily="34" charset="-122"/>
+                          <a:cs typeface="Calibri" pitchFamily="34" charset="-120"/>
+                        </a:rPr>
+                        <a:t>EM, ANLS (+ F1 để so); hàm chuẩn hoá công khai trong code</a:t>
+                      </a:r>
+                      <a:endParaRPr lang="en-US" sz="1200" dirty="0">
+                        <a:latin typeface="Calibri" charset="0"/>
+                        <a:ea typeface="Calibri" charset="0"/>
+                        <a:cs typeface="Calibri" charset="0"/>
+                      </a:endParaRPr>
+                    </a:p>
+                  </a:txBody>
+                  <a:tcPr marL="76200" marR="76200" marT="38100" marB="38100" anchor="ctr">
+                    <a:lnL w="9525" cap="flat" cmpd="sng" algn="ctr">
+                      <a:solidFill>
+                        <a:srgbClr val="E2E7EE"/>
+                      </a:solidFill>
+                      <a:prstDash val="solid"/>
+                      <a:round/>
+                      <a:headEnd type="none" w="med" len="med"/>
+                      <a:tailEnd type="none" w="med" len="med"/>
+                    </a:lnL>
+                    <a:lnR w="9525" cap="flat" cmpd="sng" algn="ctr">
+                      <a:solidFill>
+                        <a:srgbClr val="E2E7EE"/>
+                      </a:solidFill>
+                      <a:prstDash val="solid"/>
+                      <a:round/>
+                      <a:headEnd type="none" w="med" len="med"/>
+                      <a:tailEnd type="none" w="med" len="med"/>
+                    </a:lnR>
+                    <a:lnT w="9525" cap="flat" cmpd="sng" algn="ctr">
+                      <a:solidFill>
+                        <a:srgbClr val="E2E7EE"/>
+                      </a:solidFill>
+                      <a:prstDash val="solid"/>
+                      <a:round/>
+                      <a:headEnd type="none" w="med" len="med"/>
+                      <a:tailEnd type="none" w="med" len="med"/>
+                    </a:lnT>
+                    <a:lnB w="9525" cap="flat" cmpd="sng" algn="ctr">
+                      <a:solidFill>
+                        <a:srgbClr val="E2E7EE"/>
+                      </a:solidFill>
+                      <a:prstDash val="solid"/>
+                      <a:round/>
+                      <a:headEnd type="none" w="med" len="med"/>
+                      <a:tailEnd type="none" w="med" len="med"/>
+                    </a:lnB>
+                  </a:tcPr>
+                </a:tc>
+              </a:tr>
+              <a:tr h="457200">
+                <a:tc>
+                  <a:txBody>
+                    <a:bodyPr/>
+                    <a:lstStyle/>
+                    <a:p>
+                      <a:pPr indent="0" marL="0">
+                        <a:buNone/>
+                      </a:pPr>
+                      <a:r>
+                        <a:rPr lang="en-US" sz="1200" b="1" dirty="0">
+                          <a:solidFill>
+                            <a:srgbClr val="13294B"/>
+                          </a:solidFill>
+                          <a:latin typeface="Calibri" pitchFamily="34" charset="0"/>
+                          <a:ea typeface="Calibri" pitchFamily="34" charset="-122"/>
+                          <a:cs typeface="Calibri" pitchFamily="34" charset="-120"/>
+                        </a:rPr>
+                        <a:t>Full test (EM / F1)</a:t>
+                      </a:r>
+                      <a:endParaRPr lang="en-US" sz="1200" dirty="0">
+                        <a:latin typeface="Calibri" charset="0"/>
+                        <a:ea typeface="Calibri" charset="0"/>
+                        <a:cs typeface="Calibri" charset="0"/>
+                      </a:endParaRPr>
+                    </a:p>
+                  </a:txBody>
+                  <a:tcPr marL="76200" marR="76200" marT="38100" marB="38100" anchor="ctr">
+                    <a:lnL w="9525" cap="flat" cmpd="sng" algn="ctr">
+                      <a:solidFill>
+                        <a:srgbClr val="E2E7EE"/>
+                      </a:solidFill>
+                      <a:prstDash val="solid"/>
+                      <a:round/>
+                      <a:headEnd type="none" w="med" len="med"/>
+                      <a:tailEnd type="none" w="med" len="med"/>
+                    </a:lnL>
+                    <a:lnR w="9525" cap="flat" cmpd="sng" algn="ctr">
+                      <a:solidFill>
+                        <a:srgbClr val="E2E7EE"/>
+                      </a:solidFill>
+                      <a:prstDash val="solid"/>
+                      <a:round/>
+                      <a:headEnd type="none" w="med" len="med"/>
+                      <a:tailEnd type="none" w="med" len="med"/>
+                    </a:lnR>
+                    <a:lnT w="9525" cap="flat" cmpd="sng" algn="ctr">
+                      <a:solidFill>
+                        <a:srgbClr val="E2E7EE"/>
+                      </a:solidFill>
+                      <a:prstDash val="solid"/>
+                      <a:round/>
+                      <a:headEnd type="none" w="med" len="med"/>
+                      <a:tailEnd type="none" w="med" len="med"/>
+                    </a:lnT>
+                    <a:lnB w="9525" cap="flat" cmpd="sng" algn="ctr">
+                      <a:solidFill>
+                        <a:srgbClr val="E2E7EE"/>
+                      </a:solidFill>
+                      <a:prstDash val="solid"/>
+                      <a:round/>
+                      <a:headEnd type="none" w="med" len="med"/>
+                      <a:tailEnd type="none" w="med" len="med"/>
+                    </a:lnB>
+                    <a:solidFill>
+                      <a:srgbClr val="E7F0F3"/>
+                    </a:solidFill>
+                  </a:tcPr>
+                </a:tc>
+                <a:tc>
+                  <a:txBody>
+                    <a:bodyPr/>
+                    <a:lstStyle/>
+                    <a:p>
+                      <a:pPr indent="0" marL="0">
+                        <a:buNone/>
+                      </a:pPr>
+                      <a:r>
+                        <a:rPr lang="en-US" sz="1200" b="1" dirty="0">
+                          <a:solidFill>
+                            <a:srgbClr val="243044"/>
+                          </a:solidFill>
+                          <a:latin typeface="Calibri" pitchFamily="34" charset="0"/>
+                          <a:ea typeface="Calibri" pitchFamily="34" charset="-122"/>
+                          <a:cs typeface="Calibri" pitchFamily="34" charset="-120"/>
+                        </a:rPr>
+                        <a:t>25,48 / 53,95</a:t>
+                      </a:r>
+                      <a:endParaRPr lang="en-US" sz="1200" dirty="0">
+                        <a:latin typeface="Calibri" charset="0"/>
+                        <a:ea typeface="Calibri" charset="0"/>
+                        <a:cs typeface="Calibri" charset="0"/>
+                      </a:endParaRPr>
+                    </a:p>
+                  </a:txBody>
+                  <a:tcPr marL="76200" marR="76200" marT="38100" marB="38100" anchor="ctr">
+                    <a:lnL w="9525" cap="flat" cmpd="sng" algn="ctr">
+                      <a:solidFill>
+                        <a:srgbClr val="E2E7EE"/>
+                      </a:solidFill>
+                      <a:prstDash val="solid"/>
+                      <a:round/>
+                      <a:headEnd type="none" w="med" len="med"/>
+                      <a:tailEnd type="none" w="med" len="med"/>
+                    </a:lnL>
+                    <a:lnR w="9525" cap="flat" cmpd="sng" algn="ctr">
+                      <a:solidFill>
+                        <a:srgbClr val="E2E7EE"/>
+                      </a:solidFill>
+                      <a:prstDash val="solid"/>
+                      <a:round/>
+                      <a:headEnd type="none" w="med" len="med"/>
+                      <a:tailEnd type="none" w="med" len="med"/>
+                    </a:lnR>
+                    <a:lnT w="9525" cap="flat" cmpd="sng" algn="ctr">
+                      <a:solidFill>
+                        <a:srgbClr val="E2E7EE"/>
+                      </a:solidFill>
+                      <a:prstDash val="solid"/>
+                      <a:round/>
+                      <a:headEnd type="none" w="med" len="med"/>
+                      <a:tailEnd type="none" w="med" len="med"/>
+                    </a:lnT>
+                    <a:lnB w="9525" cap="flat" cmpd="sng" algn="ctr">
+                      <a:solidFill>
+                        <a:srgbClr val="E2E7EE"/>
+                      </a:solidFill>
+                      <a:prstDash val="solid"/>
+                      <a:round/>
+                      <a:headEnd type="none" w="med" len="med"/>
+                      <a:tailEnd type="none" w="med" len="med"/>
+                    </a:lnB>
+                    <a:solidFill>
+                      <a:srgbClr val="E7F0F3"/>
+                    </a:solidFill>
+                  </a:tcPr>
+                </a:tc>
+                <a:tc>
+                  <a:txBody>
+                    <a:bodyPr/>
+                    <a:lstStyle/>
+                    <a:p>
+                      <a:pPr indent="0" marL="0">
+                        <a:buNone/>
+                      </a:pPr>
+                      <a:r>
+                        <a:rPr lang="en-US" sz="1200" b="1" dirty="0">
+                          <a:solidFill>
+                            <a:srgbClr val="243044"/>
+                          </a:solidFill>
+                          <a:latin typeface="Calibri" pitchFamily="34" charset="0"/>
+                          <a:ea typeface="Calibri" pitchFamily="34" charset="-122"/>
+                          <a:cs typeface="Calibri" pitchFamily="34" charset="-120"/>
+                        </a:rPr>
+                        <a:t>50,26 / 71,16</a:t>
+                      </a:r>
+                      <a:endParaRPr lang="en-US" sz="1200" dirty="0">
+                        <a:latin typeface="Calibri" charset="0"/>
+                        <a:ea typeface="Calibri" charset="0"/>
+                        <a:cs typeface="Calibri" charset="0"/>
+                      </a:endParaRPr>
+                    </a:p>
+                  </a:txBody>
+                  <a:tcPr marL="76200" marR="76200" marT="38100" marB="38100" anchor="ctr">
+                    <a:lnL w="9525" cap="flat" cmpd="sng" algn="ctr">
+                      <a:solidFill>
+                        <a:srgbClr val="E2E7EE"/>
+                      </a:solidFill>
+                      <a:prstDash val="solid"/>
+                      <a:round/>
+                      <a:headEnd type="none" w="med" len="med"/>
+                      <a:tailEnd type="none" w="med" len="med"/>
+                    </a:lnL>
+                    <a:lnR w="9525" cap="flat" cmpd="sng" algn="ctr">
+                      <a:solidFill>
+                        <a:srgbClr val="E2E7EE"/>
+                      </a:solidFill>
+                      <a:prstDash val="solid"/>
+                      <a:round/>
+                      <a:headEnd type="none" w="med" len="med"/>
+                      <a:tailEnd type="none" w="med" len="med"/>
+                    </a:lnR>
+                    <a:lnT w="9525" cap="flat" cmpd="sng" algn="ctr">
+                      <a:solidFill>
+                        <a:srgbClr val="E2E7EE"/>
+                      </a:solidFill>
+                      <a:prstDash val="solid"/>
+                      <a:round/>
+                      <a:headEnd type="none" w="med" len="med"/>
+                      <a:tailEnd type="none" w="med" len="med"/>
+                    </a:lnT>
+                    <a:lnB w="9525" cap="flat" cmpd="sng" algn="ctr">
+                      <a:solidFill>
+                        <a:srgbClr val="E2E7EE"/>
+                      </a:solidFill>
+                      <a:prstDash val="solid"/>
+                      <a:round/>
+                      <a:headEnd type="none" w="med" len="med"/>
+                      <a:tailEnd type="none" w="med" len="med"/>
+                    </a:lnB>
+                    <a:solidFill>
+                      <a:srgbClr val="E7F0F3"/>
+                    </a:solidFill>
+                  </a:tcPr>
+                </a:tc>
+              </a:tr>
+            </a:tbl>
+          </a:graphicData>
+        </a:graphic>
+      </p:graphicFrame>
+      <p:sp>
+        <p:nvSpPr>
+          <p:cNvPr id="6" name="text_92"/>
+          <p:cNvSpPr txBox="1"/>
+          <p:nvPr/>
+        </p:nvSpPr>
+        <p:spPr>
+          <a:xfrm>
+            <a:off x="548640" y="5760720"/>
+            <a:ext cx="11094415" cy="566928"/>
+          </a:xfrm>
+          <a:prstGeom prst="rect">
+            <a:avLst/>
+          </a:prstGeom>
+          <a:noFill/>
+          <a:ln/>
+        </p:spPr>
+        <p:txBody>
+          <a:bodyPr wrap="square" lIns="0" tIns="0" rIns="0" bIns="0" rtlCol="0" anchor="b"/>
+          <a:lstStyle/>
+          <a:p>
+            <a:pPr indent="0" marL="0">
+              <a:buNone/>
+            </a:pPr>
+            <a:r>
+              <a:rPr lang="en-US" sz="1000" dirty="0">
+                <a:solidFill>
+                  <a:schemeClr val="accent3"/>
+                </a:solidFill>
+                <a:latin typeface="Calibri" pitchFamily="34" charset="0"/>
+                <a:ea typeface="Calibri" pitchFamily="34" charset="-122"/>
+                <a:cs typeface="Calibri" pitchFamily="34" charset="-120"/>
+              </a:rPr>
+              <a:t>[3] Nguyen và cs., ViTextVQA, arXiv:2404.10652, 2024 (bản mở rộng ESWA 2025) · [4] Huang và cs., SwinTextSpotter, CVPR 2022 · [5] Phan và cs., ViT5, NAACL SRW 2022. Lưu ý: số 25,48 / 53,95 của paper nằm ở cột “OCR confidence” trong Table 10; bảng ablation báo 24,83 / 52,51 cho model đầy đủ.</a:t>
+            </a:r>
+            <a:endParaRPr lang="en-US" sz="1000" dirty="0"/>
+          </a:p>
+        </p:txBody>
+      </p:sp>
+      <p:sp>
+        <p:nvSpPr>
+          <p:cNvPr id="25" name="Slide Number Placeholder 0"/>
+          <p:cNvSpPr>
+            <a:spLocks noGrp="1"/>
+          </p:cNvSpPr>
+          <p:nvPr>
+            <p:ph type="sldNum" sz="quarter" idx="4294967295"/>
+          </p:nvPr>
+        </p:nvSpPr>
+        <p:spPr>
+          <a:xfrm>
+            <a:off x="11094415" y="6446520"/>
+            <a:ext cx="548640" cy="274320"/>
+          </a:xfrm>
+          <a:prstGeom prst="rect">
+            <a:avLst/>
+          </a:prstGeom>
+          <a:extLst>
+            <a:ext uri="{C572A759-6A51-4108-AA02-DFA0A04FC94B}">
+              <ma14:wrappingTextBoxFlag xmlns:ma14="http://schemas.microsoft.com/office/mac/drawingml/2011/main" val="0"/>
+            </a:ext>
+          </a:extLst>
+        </p:spPr>
+        <p:txBody>
+          <a:bodyPr/>
+          <a:lstStyle>
+            <a:lvl1pPr>
+              <a:defRPr sz="1000">
+                <a:solidFill>
+                  <a:srgbClr val="6B7280"/>
+                </a:solidFill>
+                <a:latin typeface="Calibri"/>
+                <a:ea typeface="Calibri"/>
+                <a:cs typeface="Calibri"/>
+              </a:defRPr>
+            </a:lvl1pPr>
+          </a:lstStyle>
+          <a:p>
+            <a:pPr algn="r"/>
+            <a:fld id="{F7021451-1387-4CA6-816F-3879F97B5CBC}" type="slidenum">
+              <a:rPr b="0" lang="en-US"/>
+              <a:t>13</a:t>
+            </a:fld>
+            <a:endParaRPr lang="en-US"/>
+          </a:p>
+        </p:txBody>
+      </p:sp>
+    </p:spTree>
+  </p:cSld>
+  <p:clrMapOvr>
+    <a:masterClrMapping/>
+  </p:clrMapOvr>
+</p:sld>
+</file>
+
+<file path=ppt/slides/slide14.xml><?xml version="1.0" encoding="utf-8"?>
+<p:sld xmlns:a="http://schemas.openxmlformats.org/drawingml/2006/main" xmlns:r="http://schemas.openxmlformats.org/officeDocument/2006/relationships" xmlns:p="http://schemas.openxmlformats.org/presentationml/2006/main">
+  <p:cSld name="Slide 14">
+    <p:spTree>
+      <p:nvGrpSpPr>
+        <p:cNvPr id="1" name=""/>
+        <p:cNvGrpSpPr/>
+        <p:nvPr/>
+      </p:nvGrpSpPr>
+      <p:grpSpPr>
+        <a:xfrm>
+          <a:off x="0" y="0"/>
+          <a:ext cx="0" cy="0"/>
+          <a:chOff x="0" y="0"/>
+          <a:chExt cx="0" cy="0"/>
+        </a:xfrm>
+      </p:grpSpPr>
+      <p:sp>
+        <p:nvSpPr>
+          <p:cNvPr id="2" name="Text 0"/>
+          <p:cNvSpPr/>
+          <p:nvPr>
+            <p:ph idx="100" type="body" hasCustomPrompt="1"/>
+          </p:nvPr>
+        </p:nvSpPr>
+        <p:spPr>
+          <a:xfrm>
+            <a:off x="548640" y="292608"/>
+            <a:ext cx="8229600" cy="274320"/>
+          </a:xfrm>
+          <a:prstGeom prst="rect">
+            <a:avLst/>
+          </a:prstGeom>
+          <a:noFill/>
+          <a:ln/>
+        </p:spPr>
+        <p:txBody>
+          <a:bodyPr wrap="square" lIns="0" tIns="0" rIns="0" bIns="0" rtlCol="0"/>
+          <a:lstStyle/>
+          <a:p>
+            <a:pPr indent="0" marL="0">
+              <a:buNone/>
+            </a:pPr>
+            <a:r>
+              <a:rPr lang="en-US" sz="1100" b="1" spc="200" kern="0" dirty="0">
+                <a:solidFill>
+                  <a:schemeClr val="accent1"/>
+                </a:solidFill>
+                <a:latin typeface="Calibri" pitchFamily="34" charset="0"/>
+                <a:ea typeface="Calibri" pitchFamily="34" charset="-122"/>
+                <a:cs typeface="Calibri" pitchFamily="34" charset="-120"/>
+              </a:rPr>
               <a:t>PHẦN 05 · PHÂN TÍCH LỖI &amp; HALLUCINATION</a:t>
             </a:r>
             <a:endParaRPr lang="en-US" sz="1100" dirty="0"/>
@@ -8962,7 +11107,7 @@
       </p:sp>
       <p:graphicFrame>
         <p:nvGraphicFramePr>
-          <p:cNvPr id="5" name="chart_87" descr=""/>
+          <p:cNvPr id="5" name="chart_93" descr=""/>
           <p:cNvGraphicFramePr/>
           <p:nvPr/>
         </p:nvGraphicFramePr>
@@ -8978,7 +11123,7 @@
       </p:graphicFrame>
       <p:graphicFrame>
         <p:nvGraphicFramePr>
-          <p:cNvPr id="14" name="table_88"/>
+          <p:cNvPr id="15" name="table_94"/>
           <p:cNvGraphicFramePr>
             <a:graphicFrameLocks noGrp="1"/>
           </p:cNvGraphicFramePr>
@@ -8991,7 +11136,7 @@
           </p:nvPr>
         </p:nvGraphicFramePr>
         <p:xfrm>
-          <a:off x="548640" y="4343400"/>
+          <a:off x="548640" y="4224528"/>
           <a:ext cx="6400800" cy="914400"/>
         </p:xfrm>
         <a:graphic>
@@ -9003,7 +11148,7 @@
                 <a:gridCol w="2240280"/>
                 <a:gridCol w="2514600"/>
               </a:tblGrid>
-              <a:tr h="457200">
+              <a:tr h="402336">
                 <a:tc>
                   <a:txBody>
                     <a:bodyPr/>
@@ -9209,7 +11354,7 @@
                   </a:tcPr>
                 </a:tc>
               </a:tr>
-              <a:tr h="457200">
+              <a:tr h="402336">
                 <a:tc>
                   <a:txBody>
                     <a:bodyPr/>
@@ -9406,7 +11551,7 @@
                   </a:tcPr>
                 </a:tc>
               </a:tr>
-              <a:tr h="457200">
+              <a:tr h="402336">
                 <a:tc>
                   <a:txBody>
                     <a:bodyPr/>
@@ -9603,7 +11748,7 @@
                   </a:tcPr>
                 </a:tc>
               </a:tr>
-              <a:tr h="457200">
+              <a:tr h="402336">
                 <a:tc>
                   <a:txBody>
                     <a:bodyPr/>
@@ -9806,14 +11951,14 @@
       </p:graphicFrame>
       <p:sp>
         <p:nvSpPr>
-          <p:cNvPr id="7" name="card_89"/>
+          <p:cNvPr id="7" name="card_95"/>
           <p:cNvSpPr/>
           <p:nvPr/>
         </p:nvSpPr>
         <p:spPr>
           <a:xfrm>
             <a:off x="7315200" y="1371600"/>
-            <a:ext cx="4327855" cy="4892040"/>
+            <a:ext cx="4327855" cy="4526280"/>
           </a:xfrm>
           <a:prstGeom prst="roundRect">
             <a:avLst>
@@ -9833,7 +11978,7 @@
       </p:sp>
       <p:sp>
         <p:nvSpPr>
-          <p:cNvPr id="8" name="text_90"/>
+          <p:cNvPr id="8" name="text_96"/>
           <p:cNvSpPr txBox="1"/>
           <p:nvPr/>
         </p:nvSpPr>
@@ -9872,14 +12017,14 @@
       </p:sp>
       <p:sp>
         <p:nvSpPr>
-          <p:cNvPr id="9" name="list_91"/>
+          <p:cNvPr id="9" name="list_97"/>
           <p:cNvSpPr txBox="1"/>
           <p:nvPr/>
         </p:nvSpPr>
         <p:spPr>
           <a:xfrm>
             <a:off x="7589520" y="2194560"/>
-            <a:ext cx="3779215" cy="3977640"/>
+            <a:ext cx="3779215" cy="3611880"/>
           </a:xfrm>
           <a:prstGeom prst="rect">
             <a:avLst/>
@@ -9899,7 +12044,7 @@
               <a:buChar char="•"/>
             </a:pPr>
             <a:r>
-              <a:rPr lang="en-US" sz="1500" dirty="0">
+              <a:rPr lang="en-US" sz="1400" dirty="0">
                 <a:solidFill>
                   <a:schemeClr val="tx1"/>
                 </a:solidFill>
@@ -9909,7 +12054,7 @@
               </a:rPr>
               <a:t>54% thực ra đúng ý: EM quá khắt khe (ViVQA 62%, ViTextVQA 46%)</a:t>
             </a:r>
-            <a:endParaRPr lang="en-US" sz="1500" dirty="0"/>
+            <a:endParaRPr lang="en-US" sz="1400" dirty="0"/>
           </a:p>
           <a:p>
             <a:pPr marL="177800" indent="-177800">
@@ -9920,7 +12065,7 @@
               <a:buChar char="•"/>
             </a:pPr>
             <a:r>
-              <a:rPr lang="en-US" sz="1500" dirty="0">
+              <a:rPr lang="en-US" sz="1400" dirty="0">
                 <a:solidFill>
                   <a:schemeClr val="tx1"/>
                 </a:solidFill>
@@ -9930,7 +12075,7 @@
               </a:rPr>
               <a:t>Gold nhiễu: 12,5% (ViVQA 19%)</a:t>
             </a:r>
-            <a:endParaRPr lang="en-US" sz="1500" dirty="0"/>
+            <a:endParaRPr lang="en-US" sz="1400" dirty="0"/>
           </a:p>
           <a:p>
             <a:pPr marL="177800" indent="-177800">
@@ -9941,7 +12086,7 @@
               <a:buChar char="•"/>
             </a:pPr>
             <a:r>
-              <a:rPr lang="en-US" sz="1500" dirty="0">
+              <a:rPr lang="en-US" sz="1400" dirty="0">
                 <a:solidFill>
                   <a:schemeClr val="tx1"/>
                 </a:solidFill>
@@ -9951,7 +12096,7 @@
               </a:rPr>
               <a:t>Lỗi thật ở ViTextVQA: đọc sai chữ 28%, nhầm vùng chữ 23%, dấu thanh 8%</a:t>
             </a:r>
-            <a:endParaRPr lang="en-US" sz="1500" dirty="0"/>
+            <a:endParaRPr lang="en-US" sz="1400" dirty="0"/>
           </a:p>
           <a:p>
             <a:pPr marL="177800" indent="-177800">
@@ -9962,7 +12107,7 @@
               <a:buChar char="•"/>
             </a:pPr>
             <a:r>
-              <a:rPr lang="en-US" sz="1500" dirty="0">
+              <a:rPr lang="en-US" sz="1400" dirty="0">
                 <a:solidFill>
                   <a:schemeClr val="tx1"/>
                 </a:solidFill>
@@ -9972,7 +12117,7 @@
               </a:rPr>
               <a:t>Hallucination (không có trong ảnh): 7% số lỗi (CI95 4–11%)</a:t>
             </a:r>
-            <a:endParaRPr lang="en-US" sz="1500" dirty="0"/>
+            <a:endParaRPr lang="en-US" sz="1400" dirty="0"/>
           </a:p>
           <a:p>
             <a:pPr marL="177800" indent="-177800">
@@ -9983,7 +12128,7 @@
               <a:buChar char="•"/>
             </a:pPr>
             <a:r>
-              <a:rPr lang="en-US" sz="1500" dirty="0">
+              <a:rPr lang="en-US" sz="1400" dirty="0">
                 <a:solidFill>
                   <a:schemeClr val="tx1"/>
                 </a:solidFill>
@@ -9993,7 +12138,46 @@
               </a:rPr>
               <a:t>4 người + nhãn gợi ý của AI; κ = 0,62 (2 người độc lập); bỏ 42 dòng có AI hỗ trợ, kết luận không đổi</a:t>
             </a:r>
-            <a:endParaRPr lang="en-US" sz="1500" dirty="0"/>
+            <a:endParaRPr lang="en-US" sz="1400" dirty="0"/>
+          </a:p>
+        </p:txBody>
+      </p:sp>
+      <p:sp>
+        <p:nvSpPr>
+          <p:cNvPr id="10" name="text_98"/>
+          <p:cNvSpPr txBox="1"/>
+          <p:nvPr/>
+        </p:nvSpPr>
+        <p:spPr>
+          <a:xfrm>
+            <a:off x="548640" y="5852160"/>
+            <a:ext cx="11094415" cy="502920"/>
+          </a:xfrm>
+          <a:prstGeom prst="rect">
+            <a:avLst/>
+          </a:prstGeom>
+          <a:noFill/>
+          <a:ln/>
+        </p:spPr>
+        <p:txBody>
+          <a:bodyPr wrap="square" lIns="0" tIns="0" rIns="0" bIns="0" rtlCol="0" anchor="b"/>
+          <a:lstStyle/>
+          <a:p>
+            <a:pPr indent="0" marL="0">
+              <a:buNone/>
+            </a:pPr>
+            <a:r>
+              <a:rPr lang="en-US" sz="1000" dirty="0">
+                <a:solidFill>
+                  <a:schemeClr val="accent3"/>
+                </a:solidFill>
+                <a:latin typeface="Calibri" pitchFamily="34" charset="0"/>
+                <a:ea typeface="Calibri" pitchFamily="34" charset="-122"/>
+                <a:cs typeface="Calibri" pitchFamily="34" charset="-120"/>
+              </a:rPr>
+              <a:t>Nguồn — phân loại tự động: python -m src.eval.answer_format --buckets trên experiments/W07_B2_eval_qlora_r16_ep1_vitextvqa_testfull_… (4.988 = 10.028 − 5.040 câu đúng). Duyệt tay: docs/W07/audit/W07_error_audit_final.json (nhãn ở docs/W07/audit/labels/, tính bằng compute_error_audit.py).</a:t>
+            </a:r>
+            <a:endParaRPr lang="en-US" sz="1000" dirty="0"/>
           </a:p>
         </p:txBody>
       </p:sp>
@@ -10039,7 +12223,7 @@
             <a:pPr algn="r"/>
             <a:fld id="{F7021451-1387-4CA6-816F-3879F97B5CBC}" type="slidenum">
               <a:rPr b="0" lang="en-US"/>
-              <a:t>13</a:t>
+              <a:t>14</a:t>
             </a:fld>
             <a:endParaRPr lang="en-US"/>
           </a:p>
@@ -10053,9 +12237,9 @@
 </p:sld>
 </file>
 
-<file path=ppt/slides/slide14.xml><?xml version="1.0" encoding="utf-8"?>
+<file path=ppt/slides/slide15.xml><?xml version="1.0" encoding="utf-8"?>
 <p:sld xmlns:a="http://schemas.openxmlformats.org/drawingml/2006/main" xmlns:r="http://schemas.openxmlformats.org/officeDocument/2006/relationships" xmlns:p="http://schemas.openxmlformats.org/presentationml/2006/main">
-  <p:cSld name="Slide 14">
+  <p:cSld name="Slide 15">
     <p:spTree>
       <p:nvGrpSpPr>
         <p:cNvPr id="1" name=""/>
@@ -10154,7 +12338,7 @@
       </p:sp>
       <p:sp>
         <p:nvSpPr>
-          <p:cNvPr id="5" name="card_92"/>
+          <p:cNvPr id="5" name="card_99"/>
           <p:cNvSpPr/>
           <p:nvPr/>
         </p:nvSpPr>
@@ -10181,7 +12365,7 @@
       </p:sp>
       <p:sp>
         <p:nvSpPr>
-          <p:cNvPr id="6" name="text_93"/>
+          <p:cNvPr id="6" name="text_100"/>
           <p:cNvSpPr txBox="1"/>
           <p:nvPr/>
         </p:nvSpPr>
@@ -10220,7 +12404,7 @@
       </p:sp>
       <p:sp>
         <p:nvSpPr>
-          <p:cNvPr id="7" name="text_94"/>
+          <p:cNvPr id="7" name="text_101"/>
           <p:cNvSpPr txBox="1"/>
           <p:nvPr/>
         </p:nvSpPr>
@@ -10259,7 +12443,7 @@
       </p:sp>
       <p:sp>
         <p:nvSpPr>
-          <p:cNvPr id="8" name="arrow_95"/>
+          <p:cNvPr id="8" name="arrow_102"/>
           <p:cNvSpPr/>
           <p:nvPr/>
         </p:nvSpPr>
@@ -10284,7 +12468,7 @@
       </p:sp>
       <p:sp>
         <p:nvSpPr>
-          <p:cNvPr id="9" name="card_96"/>
+          <p:cNvPr id="9" name="card_103"/>
           <p:cNvSpPr/>
           <p:nvPr/>
         </p:nvSpPr>
@@ -10311,7 +12495,7 @@
       </p:sp>
       <p:sp>
         <p:nvSpPr>
-          <p:cNvPr id="10" name="text_97"/>
+          <p:cNvPr id="10" name="text_104"/>
           <p:cNvSpPr txBox="1"/>
           <p:nvPr/>
         </p:nvSpPr>
@@ -10350,7 +12534,7 @@
       </p:sp>
       <p:sp>
         <p:nvSpPr>
-          <p:cNvPr id="11" name="text_98"/>
+          <p:cNvPr id="11" name="text_105"/>
           <p:cNvSpPr txBox="1"/>
           <p:nvPr/>
         </p:nvSpPr>
@@ -10389,7 +12573,7 @@
       </p:sp>
       <p:sp>
         <p:nvSpPr>
-          <p:cNvPr id="12" name="arrow_99"/>
+          <p:cNvPr id="12" name="arrow_106"/>
           <p:cNvSpPr/>
           <p:nvPr/>
         </p:nvSpPr>
@@ -10414,7 +12598,7 @@
       </p:sp>
       <p:sp>
         <p:nvSpPr>
-          <p:cNvPr id="13" name="card_100"/>
+          <p:cNvPr id="13" name="card_107"/>
           <p:cNvSpPr/>
           <p:nvPr/>
         </p:nvSpPr>
@@ -10441,7 +12625,7 @@
       </p:sp>
       <p:sp>
         <p:nvSpPr>
-          <p:cNvPr id="14" name="text_101"/>
+          <p:cNvPr id="14" name="text_108"/>
           <p:cNvSpPr txBox="1"/>
           <p:nvPr/>
         </p:nvSpPr>
@@ -10480,7 +12664,7 @@
       </p:sp>
       <p:sp>
         <p:nvSpPr>
-          <p:cNvPr id="15" name="text_102"/>
+          <p:cNvPr id="15" name="text_109"/>
           <p:cNvSpPr txBox="1"/>
           <p:nvPr/>
         </p:nvSpPr>
@@ -10519,7 +12703,7 @@
       </p:sp>
       <p:sp>
         <p:nvSpPr>
-          <p:cNvPr id="16" name="arrow_103"/>
+          <p:cNvPr id="16" name="arrow_110"/>
           <p:cNvSpPr/>
           <p:nvPr/>
         </p:nvSpPr>
@@ -10544,7 +12728,7 @@
       </p:sp>
       <p:sp>
         <p:nvSpPr>
-          <p:cNvPr id="17" name="card_104"/>
+          <p:cNvPr id="17" name="card_111"/>
           <p:cNvSpPr/>
           <p:nvPr/>
         </p:nvSpPr>
@@ -10571,7 +12755,7 @@
       </p:sp>
       <p:sp>
         <p:nvSpPr>
-          <p:cNvPr id="18" name="text_105"/>
+          <p:cNvPr id="18" name="text_112"/>
           <p:cNvSpPr txBox="1"/>
           <p:nvPr/>
         </p:nvSpPr>
@@ -10610,7 +12794,7 @@
       </p:sp>
       <p:sp>
         <p:nvSpPr>
-          <p:cNvPr id="19" name="text_106"/>
+          <p:cNvPr id="19" name="text_113"/>
           <p:cNvSpPr txBox="1"/>
           <p:nvPr/>
         </p:nvSpPr>
@@ -10649,7 +12833,7 @@
       </p:sp>
       <p:sp>
         <p:nvSpPr>
-          <p:cNvPr id="20" name="arrow_107"/>
+          <p:cNvPr id="20" name="arrow_114"/>
           <p:cNvSpPr/>
           <p:nvPr/>
         </p:nvSpPr>
@@ -10674,7 +12858,7 @@
       </p:sp>
       <p:sp>
         <p:nvSpPr>
-          <p:cNvPr id="21" name="card_108"/>
+          <p:cNvPr id="21" name="card_115"/>
           <p:cNvSpPr/>
           <p:nvPr/>
         </p:nvSpPr>
@@ -10701,7 +12885,7 @@
       </p:sp>
       <p:sp>
         <p:nvSpPr>
-          <p:cNvPr id="22" name="text_109"/>
+          <p:cNvPr id="22" name="text_116"/>
           <p:cNvSpPr txBox="1"/>
           <p:nvPr/>
         </p:nvSpPr>
@@ -10740,7 +12924,7 @@
       </p:sp>
       <p:sp>
         <p:nvSpPr>
-          <p:cNvPr id="23" name="text_110"/>
+          <p:cNvPr id="23" name="text_117"/>
           <p:cNvSpPr txBox="1"/>
           <p:nvPr/>
         </p:nvSpPr>
@@ -10779,7 +12963,7 @@
       </p:sp>
       <p:sp>
         <p:nvSpPr>
-          <p:cNvPr id="24" name="card_111"/>
+          <p:cNvPr id="24" name="card_118"/>
           <p:cNvSpPr/>
           <p:nvPr/>
         </p:nvSpPr>
@@ -10806,7 +12990,7 @@
       </p:sp>
       <p:sp>
         <p:nvSpPr>
-          <p:cNvPr id="25" name="text_112"/>
+          <p:cNvPr id="25" name="text_119"/>
           <p:cNvSpPr txBox="1"/>
           <p:nvPr/>
         </p:nvSpPr>
@@ -10859,7 +13043,7 @@
       </p:sp>
       <p:sp>
         <p:nvSpPr>
-          <p:cNvPr id="26" name="card_113"/>
+          <p:cNvPr id="26" name="card_120"/>
           <p:cNvSpPr/>
           <p:nvPr/>
         </p:nvSpPr>
@@ -10886,7 +13070,7 @@
       </p:sp>
       <p:sp>
         <p:nvSpPr>
-          <p:cNvPr id="27" name="text_114"/>
+          <p:cNvPr id="27" name="text_121"/>
           <p:cNvSpPr txBox="1"/>
           <p:nvPr/>
         </p:nvSpPr>
@@ -10925,7 +13109,7 @@
       </p:sp>
       <p:sp>
         <p:nvSpPr>
-          <p:cNvPr id="28" name="list_115"/>
+          <p:cNvPr id="28" name="list_122"/>
           <p:cNvSpPr txBox="1"/>
           <p:nvPr/>
         </p:nvSpPr>
@@ -10989,7 +13173,7 @@
       </p:sp>
       <p:sp>
         <p:nvSpPr>
-          <p:cNvPr id="29" name="card_116"/>
+          <p:cNvPr id="29" name="card_123"/>
           <p:cNvSpPr/>
           <p:nvPr/>
         </p:nvSpPr>
@@ -11016,7 +13200,7 @@
       </p:sp>
       <p:sp>
         <p:nvSpPr>
-          <p:cNvPr id="30" name="text_117"/>
+          <p:cNvPr id="30" name="text_124"/>
           <p:cNvSpPr txBox="1"/>
           <p:nvPr/>
         </p:nvSpPr>
@@ -11055,7 +13239,7 @@
       </p:sp>
       <p:sp>
         <p:nvSpPr>
-          <p:cNvPr id="31" name="list_118"/>
+          <p:cNvPr id="31" name="list_125"/>
           <p:cNvSpPr txBox="1"/>
           <p:nvPr/>
         </p:nvSpPr>
@@ -11119,7 +13303,7 @@
       </p:sp>
       <p:sp>
         <p:nvSpPr>
-          <p:cNvPr id="32" name="card_119"/>
+          <p:cNvPr id="32" name="card_126"/>
           <p:cNvSpPr/>
           <p:nvPr/>
         </p:nvSpPr>
@@ -11146,7 +13330,7 @@
       </p:sp>
       <p:sp>
         <p:nvSpPr>
-          <p:cNvPr id="33" name="text_120"/>
+          <p:cNvPr id="33" name="text_127"/>
           <p:cNvSpPr txBox="1"/>
           <p:nvPr/>
         </p:nvSpPr>
@@ -11185,7 +13369,7 @@
       </p:sp>
       <p:sp>
         <p:nvSpPr>
-          <p:cNvPr id="34" name="list_121"/>
+          <p:cNvPr id="34" name="list_128"/>
           <p:cNvSpPr txBox="1"/>
           <p:nvPr/>
         </p:nvSpPr>
@@ -11289,7 +13473,7 @@
             <a:pPr algn="r"/>
             <a:fld id="{F7021451-1387-4CA6-816F-3879F97B5CBC}" type="slidenum">
               <a:rPr b="0" lang="en-US"/>
-              <a:t>14</a:t>
+              <a:t>15</a:t>
             </a:fld>
             <a:endParaRPr lang="en-US"/>
           </a:p>
@@ -11303,9 +13487,9 @@
 </p:sld>
 </file>
 
-<file path=ppt/slides/slide15.xml><?xml version="1.0" encoding="utf-8"?>
+<file path=ppt/slides/slide16.xml><?xml version="1.0" encoding="utf-8"?>
 <p:sld xmlns:a="http://schemas.openxmlformats.org/drawingml/2006/main" xmlns:r="http://schemas.openxmlformats.org/officeDocument/2006/relationships" xmlns:p="http://schemas.openxmlformats.org/presentationml/2006/main">
-  <p:cSld name="Slide 15">
+  <p:cSld name="Slide 16">
     <p:spTree>
       <p:nvGrpSpPr>
         <p:cNvPr id="1" name=""/>
@@ -11404,7 +13588,7 @@
       </p:sp>
       <p:sp>
         <p:nvSpPr>
-          <p:cNvPr id="5" name="text_122"/>
+          <p:cNvPr id="5" name="text_129"/>
           <p:cNvSpPr txBox="1"/>
           <p:nvPr/>
         </p:nvSpPr>
@@ -11443,7 +13627,7 @@
       </p:sp>
       <p:sp>
         <p:nvSpPr>
-          <p:cNvPr id="6" name="text_123"/>
+          <p:cNvPr id="6" name="text_130"/>
           <p:cNvSpPr txBox="1"/>
           <p:nvPr/>
         </p:nvSpPr>
@@ -11482,7 +13666,7 @@
       </p:sp>
       <p:sp>
         <p:nvSpPr>
-          <p:cNvPr id="7" name="text_124"/>
+          <p:cNvPr id="7" name="text_131"/>
           <p:cNvSpPr txBox="1"/>
           <p:nvPr/>
         </p:nvSpPr>
@@ -11521,7 +13705,7 @@
       </p:sp>
       <p:sp>
         <p:nvSpPr>
-          <p:cNvPr id="8" name="text_125"/>
+          <p:cNvPr id="8" name="text_132"/>
           <p:cNvSpPr txBox="1"/>
           <p:nvPr/>
         </p:nvSpPr>
@@ -11560,7 +13744,7 @@
       </p:sp>
       <p:sp>
         <p:nvSpPr>
-          <p:cNvPr id="9" name="card_126"/>
+          <p:cNvPr id="9" name="card_133"/>
           <p:cNvSpPr/>
           <p:nvPr/>
         </p:nvSpPr>
@@ -11587,7 +13771,7 @@
       </p:sp>
       <p:sp>
         <p:nvSpPr>
-          <p:cNvPr id="10" name="text_127"/>
+          <p:cNvPr id="10" name="text_134"/>
           <p:cNvSpPr txBox="1"/>
           <p:nvPr/>
         </p:nvSpPr>
@@ -11626,7 +13810,7 @@
       </p:sp>
       <p:sp>
         <p:nvSpPr>
-          <p:cNvPr id="11" name="text_128"/>
+          <p:cNvPr id="11" name="text_135"/>
           <p:cNvSpPr txBox="1"/>
           <p:nvPr/>
         </p:nvSpPr>
@@ -11665,7 +13849,7 @@
       </p:sp>
       <p:sp>
         <p:nvSpPr>
-          <p:cNvPr id="12" name="card_129"/>
+          <p:cNvPr id="12" name="card_136"/>
           <p:cNvSpPr/>
           <p:nvPr/>
         </p:nvSpPr>
@@ -11692,7 +13876,7 @@
       </p:sp>
       <p:sp>
         <p:nvSpPr>
-          <p:cNvPr id="13" name="text_130"/>
+          <p:cNvPr id="13" name="text_137"/>
           <p:cNvSpPr txBox="1"/>
           <p:nvPr/>
         </p:nvSpPr>
@@ -11731,7 +13915,7 @@
       </p:sp>
       <p:sp>
         <p:nvSpPr>
-          <p:cNvPr id="14" name="text_131"/>
+          <p:cNvPr id="14" name="text_138"/>
           <p:cNvSpPr txBox="1"/>
           <p:nvPr/>
         </p:nvSpPr>
@@ -11770,7 +13954,7 @@
       </p:sp>
       <p:sp>
         <p:nvSpPr>
-          <p:cNvPr id="15" name="card_132"/>
+          <p:cNvPr id="15" name="card_139"/>
           <p:cNvSpPr/>
           <p:nvPr/>
         </p:nvSpPr>
@@ -11797,7 +13981,7 @@
       </p:sp>
       <p:sp>
         <p:nvSpPr>
-          <p:cNvPr id="16" name="text_133"/>
+          <p:cNvPr id="16" name="text_140"/>
           <p:cNvSpPr txBox="1"/>
           <p:nvPr/>
         </p:nvSpPr>
@@ -11836,7 +14020,7 @@
       </p:sp>
       <p:sp>
         <p:nvSpPr>
-          <p:cNvPr id="17" name="text_134"/>
+          <p:cNvPr id="17" name="text_141"/>
           <p:cNvSpPr txBox="1"/>
           <p:nvPr/>
         </p:nvSpPr>
@@ -11875,7 +14059,7 @@
       </p:sp>
       <p:sp>
         <p:nvSpPr>
-          <p:cNvPr id="18" name="card_135"/>
+          <p:cNvPr id="18" name="card_142"/>
           <p:cNvSpPr/>
           <p:nvPr/>
         </p:nvSpPr>
@@ -11902,7 +14086,7 @@
       </p:sp>
       <p:sp>
         <p:nvSpPr>
-          <p:cNvPr id="19" name="text_136"/>
+          <p:cNvPr id="19" name="text_143"/>
           <p:cNvSpPr txBox="1"/>
           <p:nvPr/>
         </p:nvSpPr>
@@ -11941,7 +14125,7 @@
       </p:sp>
       <p:sp>
         <p:nvSpPr>
-          <p:cNvPr id="20" name="text_137"/>
+          <p:cNvPr id="20" name="text_144"/>
           <p:cNvSpPr txBox="1"/>
           <p:nvPr/>
         </p:nvSpPr>
@@ -11980,7 +14164,7 @@
       </p:sp>
       <p:sp>
         <p:nvSpPr>
-          <p:cNvPr id="21" name="text_138"/>
+          <p:cNvPr id="21" name="text_145"/>
           <p:cNvSpPr txBox="1"/>
           <p:nvPr/>
         </p:nvSpPr>
@@ -12019,7 +14203,7 @@
       </p:sp>
       <p:sp>
         <p:nvSpPr>
-          <p:cNvPr id="22" name="card_139"/>
+          <p:cNvPr id="22" name="card_146"/>
           <p:cNvSpPr/>
           <p:nvPr/>
         </p:nvSpPr>
@@ -12046,7 +14230,7 @@
       </p:sp>
       <p:sp>
         <p:nvSpPr>
-          <p:cNvPr id="23" name="text_140"/>
+          <p:cNvPr id="23" name="text_147"/>
           <p:cNvSpPr txBox="1"/>
           <p:nvPr/>
         </p:nvSpPr>
@@ -12085,7 +14269,7 @@
       </p:sp>
       <p:sp>
         <p:nvSpPr>
-          <p:cNvPr id="24" name="list_141"/>
+          <p:cNvPr id="24" name="list_148"/>
           <p:cNvSpPr txBox="1"/>
           <p:nvPr/>
         </p:nvSpPr>
@@ -12191,7 +14375,7 @@
       </p:sp>
       <p:sp>
         <p:nvSpPr>
-          <p:cNvPr id="25" name="card_142"/>
+          <p:cNvPr id="25" name="card_149"/>
           <p:cNvSpPr/>
           <p:nvPr/>
         </p:nvSpPr>
@@ -12218,7 +14402,7 @@
       </p:sp>
       <p:sp>
         <p:nvSpPr>
-          <p:cNvPr id="26" name="text_143"/>
+          <p:cNvPr id="26" name="text_150"/>
           <p:cNvSpPr txBox="1"/>
           <p:nvPr/>
         </p:nvSpPr>
@@ -12271,7 +14455,7 @@
       </p:sp>
       <p:sp>
         <p:nvSpPr>
-          <p:cNvPr id="27" name="card_144"/>
+          <p:cNvPr id="27" name="card_151"/>
           <p:cNvSpPr/>
           <p:nvPr/>
         </p:nvSpPr>
@@ -12298,7 +14482,7 @@
       </p:sp>
       <p:sp>
         <p:nvSpPr>
-          <p:cNvPr id="28" name="text_145"/>
+          <p:cNvPr id="28" name="text_152"/>
           <p:cNvSpPr txBox="1"/>
           <p:nvPr/>
         </p:nvSpPr>
@@ -12391,7 +14575,7 @@
             <a:pPr algn="r"/>
             <a:fld id="{F7021451-1387-4CA6-816F-3879F97B5CBC}" type="slidenum">
               <a:rPr b="0" lang="en-US"/>
-              <a:t>15</a:t>
+              <a:t>16</a:t>
             </a:fld>
             <a:endParaRPr lang="en-US"/>
           </a:p>
@@ -12405,9 +14589,9 @@
 </p:sld>
 </file>
 
-<file path=ppt/slides/slide16.xml><?xml version="1.0" encoding="utf-8"?>
+<file path=ppt/slides/slide17.xml><?xml version="1.0" encoding="utf-8"?>
 <p:sld xmlns:a="http://schemas.openxmlformats.org/drawingml/2006/main" xmlns:r="http://schemas.openxmlformats.org/officeDocument/2006/relationships" xmlns:p="http://schemas.openxmlformats.org/presentationml/2006/main">
-  <p:cSld name="Slide 16">
+  <p:cSld name="Slide 17">
     <p:spTree>
       <p:nvGrpSpPr>
         <p:cNvPr id="1" name=""/>
@@ -12506,7 +14690,7 @@
       </p:sp>
       <p:graphicFrame>
         <p:nvGraphicFramePr>
-          <p:cNvPr id="5" name="chart_146" descr=""/>
+          <p:cNvPr id="5" name="chart_153" descr=""/>
           <p:cNvGraphicFramePr/>
           <p:nvPr/>
         </p:nvGraphicFramePr>
@@ -12522,7 +14706,7 @@
       </p:graphicFrame>
       <p:sp>
         <p:nvSpPr>
-          <p:cNvPr id="6" name="card_147"/>
+          <p:cNvPr id="6" name="card_154"/>
           <p:cNvSpPr/>
           <p:nvPr/>
         </p:nvSpPr>
@@ -12549,7 +14733,7 @@
       </p:sp>
       <p:sp>
         <p:nvSpPr>
-          <p:cNvPr id="7" name="text_148"/>
+          <p:cNvPr id="7" name="text_155"/>
           <p:cNvSpPr txBox="1"/>
           <p:nvPr/>
         </p:nvSpPr>
@@ -12602,7 +14786,7 @@
       </p:sp>
       <p:graphicFrame>
         <p:nvGraphicFramePr>
-          <p:cNvPr id="17" name="table_149"/>
+          <p:cNvPr id="18" name="table_156"/>
           <p:cNvGraphicFramePr>
             <a:graphicFrameLocks noGrp="1"/>
           </p:cNvGraphicFramePr>
@@ -13968,7 +16152,7 @@
       </p:graphicFrame>
       <p:sp>
         <p:nvSpPr>
-          <p:cNvPr id="9" name="card_150"/>
+          <p:cNvPr id="9" name="card_157"/>
           <p:cNvSpPr/>
           <p:nvPr/>
         </p:nvSpPr>
@@ -13995,7 +16179,7 @@
       </p:sp>
       <p:sp>
         <p:nvSpPr>
-          <p:cNvPr id="10" name="list_151"/>
+          <p:cNvPr id="10" name="list_158"/>
           <p:cNvSpPr txBox="1"/>
           <p:nvPr/>
         </p:nvSpPr>
@@ -14120,7 +16304,7 @@
             <a:pPr algn="r"/>
             <a:fld id="{F7021451-1387-4CA6-816F-3879F97B5CBC}" type="slidenum">
               <a:rPr b="0" lang="en-US"/>
-              <a:t>16</a:t>
+              <a:t>17</a:t>
             </a:fld>
             <a:endParaRPr lang="en-US"/>
           </a:p>
@@ -14134,9 +16318,9 @@
 </p:sld>
 </file>
 
-<file path=ppt/slides/slide17.xml><?xml version="1.0" encoding="utf-8"?>
+<file path=ppt/slides/slide18.xml><?xml version="1.0" encoding="utf-8"?>
 <p:sld xmlns:a="http://schemas.openxmlformats.org/drawingml/2006/main" xmlns:r="http://schemas.openxmlformats.org/officeDocument/2006/relationships" xmlns:p="http://schemas.openxmlformats.org/presentationml/2006/main">
-  <p:cSld name="Slide 17">
+  <p:cSld name="Slide 18">
     <p:spTree>
       <p:nvGrpSpPr>
         <p:cNvPr id="1" name=""/>
@@ -14235,7 +16419,7 @@
       </p:sp>
       <p:graphicFrame>
         <p:nvGraphicFramePr>
-          <p:cNvPr id="5" name="chart_152" descr=""/>
+          <p:cNvPr id="5" name="chart_159" descr=""/>
           <p:cNvGraphicFramePr/>
           <p:nvPr/>
         </p:nvGraphicFramePr>
@@ -14251,7 +16435,7 @@
       </p:graphicFrame>
       <p:sp>
         <p:nvSpPr>
-          <p:cNvPr id="6" name="card_153"/>
+          <p:cNvPr id="6" name="card_160"/>
           <p:cNvSpPr/>
           <p:nvPr/>
         </p:nvSpPr>
@@ -14278,7 +16462,7 @@
       </p:sp>
       <p:sp>
         <p:nvSpPr>
-          <p:cNvPr id="7" name="text_154"/>
+          <p:cNvPr id="7" name="text_161"/>
           <p:cNvSpPr txBox="1"/>
           <p:nvPr/>
         </p:nvSpPr>
@@ -14317,7 +16501,7 @@
       </p:sp>
       <p:sp>
         <p:nvSpPr>
-          <p:cNvPr id="8" name="card_155"/>
+          <p:cNvPr id="8" name="card_162"/>
           <p:cNvSpPr/>
           <p:nvPr/>
         </p:nvSpPr>
@@ -14344,7 +16528,7 @@
       </p:sp>
       <p:sp>
         <p:nvSpPr>
-          <p:cNvPr id="9" name="text_156"/>
+          <p:cNvPr id="9" name="text_163"/>
           <p:cNvSpPr txBox="1"/>
           <p:nvPr/>
         </p:nvSpPr>
@@ -14383,7 +16567,7 @@
       </p:sp>
       <p:sp>
         <p:nvSpPr>
-          <p:cNvPr id="10" name="text_157"/>
+          <p:cNvPr id="10" name="text_164"/>
           <p:cNvSpPr txBox="1"/>
           <p:nvPr/>
         </p:nvSpPr>
@@ -14422,7 +16606,7 @@
       </p:sp>
       <p:sp>
         <p:nvSpPr>
-          <p:cNvPr id="11" name="text_158"/>
+          <p:cNvPr id="11" name="text_165"/>
           <p:cNvSpPr txBox="1"/>
           <p:nvPr/>
         </p:nvSpPr>
@@ -14461,7 +16645,7 @@
       </p:sp>
       <p:sp>
         <p:nvSpPr>
-          <p:cNvPr id="12" name="card_159"/>
+          <p:cNvPr id="12" name="card_166"/>
           <p:cNvSpPr/>
           <p:nvPr/>
         </p:nvSpPr>
@@ -14488,7 +16672,7 @@
       </p:sp>
       <p:sp>
         <p:nvSpPr>
-          <p:cNvPr id="13" name="text_160"/>
+          <p:cNvPr id="13" name="text_167"/>
           <p:cNvSpPr txBox="1"/>
           <p:nvPr/>
         </p:nvSpPr>
@@ -14527,7 +16711,7 @@
       </p:sp>
       <p:sp>
         <p:nvSpPr>
-          <p:cNvPr id="14" name="list_161"/>
+          <p:cNvPr id="14" name="list_168"/>
           <p:cNvSpPr txBox="1"/>
           <p:nvPr/>
         </p:nvSpPr>
@@ -14652,7 +16836,7 @@
             <a:pPr algn="r"/>
             <a:fld id="{F7021451-1387-4CA6-816F-3879F97B5CBC}" type="slidenum">
               <a:rPr b="0" lang="en-US"/>
-              <a:t>17</a:t>
+              <a:t>18</a:t>
             </a:fld>
             <a:endParaRPr lang="en-US"/>
           </a:p>
@@ -14666,9 +16850,9 @@
 </p:sld>
 </file>
 
-<file path=ppt/slides/slide18.xml><?xml version="1.0" encoding="utf-8"?>
+<file path=ppt/slides/slide19.xml><?xml version="1.0" encoding="utf-8"?>
 <p:sld xmlns:a="http://schemas.openxmlformats.org/drawingml/2006/main" xmlns:r="http://schemas.openxmlformats.org/officeDocument/2006/relationships" xmlns:p="http://schemas.openxmlformats.org/presentationml/2006/main">
-  <p:cSld name="Slide 18">
+  <p:cSld name="Slide 19">
     <p:spTree>
       <p:nvGrpSpPr>
         <p:cNvPr id="1" name=""/>
@@ -14767,7 +16951,7 @@
       </p:sp>
       <p:graphicFrame>
         <p:nvGraphicFramePr>
-          <p:cNvPr id="19" name="table_162"/>
+          <p:cNvPr id="20" name="table_169"/>
           <p:cNvGraphicFramePr>
             <a:graphicFrameLocks noGrp="1"/>
           </p:cNvGraphicFramePr>
@@ -16186,7 +18370,7 @@
       </p:graphicFrame>
       <p:sp>
         <p:nvSpPr>
-          <p:cNvPr id="6" name="card_163"/>
+          <p:cNvPr id="6" name="card_170"/>
           <p:cNvSpPr/>
           <p:nvPr/>
         </p:nvSpPr>
@@ -16213,7 +18397,7 @@
       </p:sp>
       <p:sp>
         <p:nvSpPr>
-          <p:cNvPr id="7" name="text_164"/>
+          <p:cNvPr id="7" name="text_171"/>
           <p:cNvSpPr txBox="1"/>
           <p:nvPr/>
         </p:nvSpPr>
@@ -16292,7 +18476,7 @@
             <a:pPr algn="r"/>
             <a:fld id="{F7021451-1387-4CA6-816F-3879F97B5CBC}" type="slidenum">
               <a:rPr b="0" lang="en-US"/>
-              <a:t>18</a:t>
+              <a:t>19</a:t>
             </a:fld>
             <a:endParaRPr lang="en-US"/>
           </a:p>
@@ -16306,9 +18490,9 @@
 </p:sld>
 </file>
 
-<file path=ppt/slides/slide19.xml><?xml version="1.0" encoding="utf-8"?>
+<file path=ppt/slides/slide2.xml><?xml version="1.0" encoding="utf-8"?>
 <p:sld xmlns:a="http://schemas.openxmlformats.org/drawingml/2006/main" xmlns:r="http://schemas.openxmlformats.org/officeDocument/2006/relationships" xmlns:p="http://schemas.openxmlformats.org/presentationml/2006/main">
-  <p:cSld name="Slide 19">
+  <p:cSld name="Slide 2">
     <p:spTree>
       <p:nvGrpSpPr>
         <p:cNvPr id="1" name=""/>
@@ -16358,7 +18542,7 @@
                 <a:ea typeface="Calibri" pitchFamily="34" charset="-122"/>
                 <a:cs typeface="Calibri" pitchFamily="34" charset="-120"/>
               </a:rPr>
-              <a:t>PHẦN 07 · BƯỚC TIẾP THEO</a:t>
+              <a:t>TÓM TẮT</a:t>
             </a:r>
             <a:endParaRPr lang="en-US" sz="1100" dirty="0"/>
           </a:p>
@@ -16399,7 +18583,7 @@
                 <a:ea typeface="Cambria" pitchFamily="34" charset="-122"/>
                 <a:cs typeface="Cambria" pitchFamily="34" charset="-120"/>
               </a:rPr>
-              <a:t>Kế hoạch đến Review 3 (tuần 13)</a:t>
+              <a:t>Bốn kết quả chính của mốc này</a:t>
             </a:r>
             <a:endParaRPr lang="en-US" sz="3200" dirty="0"/>
           </a:p>
@@ -16407,144 +18591,14 @@
       </p:sp>
       <p:sp>
         <p:nvSpPr>
-          <p:cNvPr id="5" name="card_165"/>
+          <p:cNvPr id="5" name="card_1"/>
           <p:cNvSpPr/>
           <p:nvPr/>
         </p:nvSpPr>
         <p:spPr>
           <a:xfrm>
             <a:off x="548640" y="1600200"/>
-            <a:ext cx="2533574" cy="3108960"/>
-          </a:xfrm>
-          <a:prstGeom prst="roundRect">
-            <a:avLst>
-              <a:gd name="adj" fmla="val 2887"/>
-            </a:avLst>
-          </a:prstGeom>
-          <a:solidFill>
-            <a:schemeClr val="accent4"/>
-          </a:solidFill>
-          <a:ln w="12700">
-            <a:solidFill>
-              <a:schemeClr val="accent4"/>
-            </a:solidFill>
-            <a:prstDash val="solid"/>
-          </a:ln>
-        </p:spPr>
-      </p:sp>
-      <p:sp>
-        <p:nvSpPr>
-          <p:cNvPr id="6" name="dot_166"/>
-          <p:cNvSpPr/>
-          <p:nvPr/>
-        </p:nvSpPr>
-        <p:spPr>
-          <a:xfrm>
-            <a:off x="822960" y="1874520"/>
-            <a:ext cx="868680" cy="868680"/>
-          </a:xfrm>
-          <a:prstGeom prst="ellipse">
-            <a:avLst/>
-          </a:prstGeom>
-          <a:solidFill>
-            <a:srgbClr val="1C7293"/>
-          </a:solidFill>
-          <a:ln w="12700">
-            <a:solidFill>
-              <a:srgbClr val="FFFFFF"/>
-            </a:solidFill>
-            <a:prstDash val="solid"/>
-          </a:ln>
-        </p:spPr>
-      </p:sp>
-      <p:sp>
-        <p:nvSpPr>
-          <p:cNvPr id="7" name="text_167"/>
-          <p:cNvSpPr txBox="1"/>
-          <p:nvPr/>
-        </p:nvSpPr>
-        <p:spPr>
-          <a:xfrm>
-            <a:off x="822960" y="1874520"/>
-            <a:ext cx="868680" cy="868680"/>
-          </a:xfrm>
-          <a:prstGeom prst="rect">
-            <a:avLst/>
-          </a:prstGeom>
-          <a:noFill/>
-          <a:ln/>
-        </p:spPr>
-        <p:txBody>
-          <a:bodyPr wrap="square" lIns="0" tIns="0" rIns="0" bIns="0" rtlCol="0" anchor="ctr"/>
-          <a:lstStyle/>
-          <a:p>
-            <a:pPr algn="ctr" indent="0" marL="0">
-              <a:buNone/>
-            </a:pPr>
-            <a:r>
-              <a:rPr lang="en-US" sz="1400" b="1" dirty="0">
-                <a:solidFill>
-                  <a:schemeClr val="bg1"/>
-                </a:solidFill>
-                <a:latin typeface="Calibri" pitchFamily="34" charset="0"/>
-                <a:ea typeface="Calibri" pitchFamily="34" charset="-122"/>
-                <a:cs typeface="Calibri" pitchFamily="34" charset="-120"/>
-              </a:rPr>
-              <a:t>W10</a:t>
-            </a:r>
-            <a:endParaRPr lang="en-US" sz="1400" dirty="0"/>
-          </a:p>
-        </p:txBody>
-      </p:sp>
-      <p:sp>
-        <p:nvSpPr>
-          <p:cNvPr id="8" name="text_168"/>
-          <p:cNvSpPr txBox="1"/>
-          <p:nvPr/>
-        </p:nvSpPr>
-        <p:spPr>
-          <a:xfrm>
-            <a:off x="822960" y="2971800"/>
-            <a:ext cx="1984934" cy="1554480"/>
-          </a:xfrm>
-          <a:prstGeom prst="rect">
-            <a:avLst/>
-          </a:prstGeom>
-          <a:noFill/>
-          <a:ln/>
-        </p:spPr>
-        <p:txBody>
-          <a:bodyPr wrap="square" lIns="0" tIns="0" rIns="0" bIns="0" rtlCol="0" anchor="t"/>
-          <a:lstStyle/>
-          <a:p>
-            <a:pPr indent="0" marL="0">
-              <a:buNone/>
-            </a:pPr>
-            <a:r>
-              <a:rPr lang="en-US" sz="1500" dirty="0">
-                <a:solidFill>
-                  <a:schemeClr val="tx1"/>
-                </a:solidFill>
-                <a:latin typeface="Calibri" pitchFamily="34" charset="0"/>
-                <a:ea typeface="Calibri" pitchFamily="34" charset="-122"/>
-                <a:cs typeface="Calibri" pitchFamily="34" charset="-120"/>
-              </a:rPr>
-              <a:t>QLoRA nhận biết OCR trên toàn bộ train ViTextVQA; ablation rank và module gắn LoRA (H3, H4)</a:t>
-            </a:r>
-            <a:endParaRPr lang="en-US" sz="1500" dirty="0"/>
-          </a:p>
-        </p:txBody>
-      </p:sp>
-      <p:sp>
-        <p:nvSpPr>
-          <p:cNvPr id="9" name="card_169"/>
-          <p:cNvSpPr/>
-          <p:nvPr/>
-        </p:nvSpPr>
-        <p:spPr>
-          <a:xfrm>
-            <a:off x="3402254" y="1600200"/>
-            <a:ext cx="2533574" cy="3108960"/>
+            <a:ext cx="2533574" cy="2651760"/>
           </a:xfrm>
           <a:prstGeom prst="roundRect">
             <a:avLst>
@@ -16564,78 +18618,14 @@
       </p:sp>
       <p:sp>
         <p:nvSpPr>
-          <p:cNvPr id="10" name="dot_170"/>
-          <p:cNvSpPr/>
+          <p:cNvPr id="6" name="text_2"/>
+          <p:cNvSpPr txBox="1"/>
           <p:nvPr/>
         </p:nvSpPr>
         <p:spPr>
           <a:xfrm>
-            <a:off x="3676574" y="1874520"/>
-            <a:ext cx="868680" cy="868680"/>
-          </a:xfrm>
-          <a:prstGeom prst="ellipse">
-            <a:avLst/>
-          </a:prstGeom>
-          <a:solidFill>
-            <a:srgbClr val="13294B"/>
-          </a:solidFill>
-          <a:ln w="12700">
-            <a:solidFill>
-              <a:srgbClr val="FFFFFF"/>
-            </a:solidFill>
-            <a:prstDash val="solid"/>
-          </a:ln>
-        </p:spPr>
-      </p:sp>
-      <p:sp>
-        <p:nvSpPr>
-          <p:cNvPr id="11" name="text_171"/>
-          <p:cNvSpPr txBox="1"/>
-          <p:nvPr/>
-        </p:nvSpPr>
-        <p:spPr>
-          <a:xfrm>
-            <a:off x="3676574" y="1874520"/>
-            <a:ext cx="868680" cy="868680"/>
-          </a:xfrm>
-          <a:prstGeom prst="rect">
-            <a:avLst/>
-          </a:prstGeom>
-          <a:noFill/>
-          <a:ln/>
-        </p:spPr>
-        <p:txBody>
-          <a:bodyPr wrap="square" lIns="0" tIns="0" rIns="0" bIns="0" rtlCol="0" anchor="ctr"/>
-          <a:lstStyle/>
-          <a:p>
-            <a:pPr algn="ctr" indent="0" marL="0">
-              <a:buNone/>
-            </a:pPr>
-            <a:r>
-              <a:rPr lang="en-US" sz="1400" b="1" dirty="0">
-                <a:solidFill>
-                  <a:schemeClr val="bg1"/>
-                </a:solidFill>
-                <a:latin typeface="Calibri" pitchFamily="34" charset="0"/>
-                <a:ea typeface="Calibri" pitchFamily="34" charset="-122"/>
-                <a:cs typeface="Calibri" pitchFamily="34" charset="-120"/>
-              </a:rPr>
-              <a:t>W11</a:t>
-            </a:r>
-            <a:endParaRPr lang="en-US" sz="1400" dirty="0"/>
-          </a:p>
-        </p:txBody>
-      </p:sp>
-      <p:sp>
-        <p:nvSpPr>
-          <p:cNvPr id="12" name="text_172"/>
-          <p:cNvSpPr txBox="1"/>
-          <p:nvPr/>
-        </p:nvSpPr>
-        <p:spPr>
-          <a:xfrm>
-            <a:off x="3676574" y="2971800"/>
-            <a:ext cx="1984934" cy="1554480"/>
+            <a:off x="822960" y="2011680"/>
+            <a:ext cx="1984934" cy="822960"/>
           </a:xfrm>
           <a:prstGeom prst="rect">
             <a:avLst/>
@@ -16651,7 +18641,46 @@
               <a:buNone/>
             </a:pPr>
             <a:r>
-              <a:rPr lang="en-US" sz="1500" dirty="0">
+              <a:rPr lang="en-US" sz="3600" b="1" dirty="0">
+                <a:solidFill>
+                  <a:schemeClr val="accent1"/>
+                </a:solidFill>
+                <a:latin typeface="Cambria" pitchFamily="34" charset="0"/>
+                <a:ea typeface="Cambria" pitchFamily="34" charset="-122"/>
+                <a:cs typeface="Cambria" pitchFamily="34" charset="-120"/>
+              </a:rPr>
+              <a:t>79,6</a:t>
+            </a:r>
+            <a:endParaRPr lang="en-US" sz="3600" dirty="0"/>
+          </a:p>
+        </p:txBody>
+      </p:sp>
+      <p:sp>
+        <p:nvSpPr>
+          <p:cNvPr id="7" name="text_3"/>
+          <p:cNvSpPr txBox="1"/>
+          <p:nvPr/>
+        </p:nvSpPr>
+        <p:spPr>
+          <a:xfrm>
+            <a:off x="822960" y="2880360"/>
+            <a:ext cx="1984934" cy="822960"/>
+          </a:xfrm>
+          <a:prstGeom prst="rect">
+            <a:avLst/>
+          </a:prstGeom>
+          <a:noFill/>
+          <a:ln/>
+        </p:spPr>
+        <p:txBody>
+          <a:bodyPr wrap="square" lIns="0" tIns="0" rIns="0" bIns="0" rtlCol="0" anchor="t"/>
+          <a:lstStyle/>
+          <a:p>
+            <a:pPr indent="0" marL="0">
+              <a:buNone/>
+            </a:pPr>
+            <a:r>
+              <a:rPr lang="en-US" sz="1400" dirty="0">
                 <a:solidFill>
                   <a:schemeClr val="tx1"/>
                 </a:solidFill>
@@ -16659,22 +18688,22 @@
                 <a:ea typeface="Calibri" pitchFamily="34" charset="-122"/>
                 <a:cs typeface="Calibri" pitchFamily="34" charset="-120"/>
               </a:rPr>
-              <a:t>Adapter dùng chung cho 2 dataset (H5); đo hallucination có hệ thống, kể cả B3 (H8)</a:t>
+              <a:t>Kiểm chứng pipeline — TextVQA val, Qwen2.5-VL-3B; báo cáo chính thức ghi 79,3</a:t>
             </a:r>
-            <a:endParaRPr lang="en-US" sz="1500" dirty="0"/>
+            <a:endParaRPr lang="en-US" sz="1400" dirty="0"/>
           </a:p>
         </p:txBody>
       </p:sp>
       <p:sp>
         <p:nvSpPr>
-          <p:cNvPr id="13" name="card_173"/>
+          <p:cNvPr id="8" name="card_4"/>
           <p:cNvSpPr/>
           <p:nvPr/>
         </p:nvSpPr>
         <p:spPr>
           <a:xfrm>
-            <a:off x="6255868" y="1600200"/>
-            <a:ext cx="2533574" cy="3108960"/>
+            <a:off x="3402254" y="1600200"/>
+            <a:ext cx="2533574" cy="2651760"/>
           </a:xfrm>
           <a:prstGeom prst="roundRect">
             <a:avLst>
@@ -16694,78 +18723,14 @@
       </p:sp>
       <p:sp>
         <p:nvSpPr>
-          <p:cNvPr id="14" name="dot_174"/>
-          <p:cNvSpPr/>
+          <p:cNvPr id="9" name="text_5"/>
+          <p:cNvSpPr txBox="1"/>
           <p:nvPr/>
         </p:nvSpPr>
         <p:spPr>
           <a:xfrm>
-            <a:off x="6530188" y="1874520"/>
-            <a:ext cx="868680" cy="868680"/>
-          </a:xfrm>
-          <a:prstGeom prst="ellipse">
-            <a:avLst/>
-          </a:prstGeom>
-          <a:solidFill>
-            <a:srgbClr val="13294B"/>
-          </a:solidFill>
-          <a:ln w="12700">
-            <a:solidFill>
-              <a:srgbClr val="FFFFFF"/>
-            </a:solidFill>
-            <a:prstDash val="solid"/>
-          </a:ln>
-        </p:spPr>
-      </p:sp>
-      <p:sp>
-        <p:nvSpPr>
-          <p:cNvPr id="15" name="text_175"/>
-          <p:cNvSpPr txBox="1"/>
-          <p:nvPr/>
-        </p:nvSpPr>
-        <p:spPr>
-          <a:xfrm>
-            <a:off x="6530188" y="1874520"/>
-            <a:ext cx="868680" cy="868680"/>
-          </a:xfrm>
-          <a:prstGeom prst="rect">
-            <a:avLst/>
-          </a:prstGeom>
-          <a:noFill/>
-          <a:ln/>
-        </p:spPr>
-        <p:txBody>
-          <a:bodyPr wrap="square" lIns="0" tIns="0" rIns="0" bIns="0" rtlCol="0" anchor="ctr"/>
-          <a:lstStyle/>
-          <a:p>
-            <a:pPr algn="ctr" indent="0" marL="0">
-              <a:buNone/>
-            </a:pPr>
-            <a:r>
-              <a:rPr lang="en-US" sz="1400" b="1" dirty="0">
-                <a:solidFill>
-                  <a:schemeClr val="bg1"/>
-                </a:solidFill>
-                <a:latin typeface="Calibri" pitchFamily="34" charset="0"/>
-                <a:ea typeface="Calibri" pitchFamily="34" charset="-122"/>
-                <a:cs typeface="Calibri" pitchFamily="34" charset="-120"/>
-              </a:rPr>
-              <a:t>W12</a:t>
-            </a:r>
-            <a:endParaRPr lang="en-US" sz="1400" dirty="0"/>
-          </a:p>
-        </p:txBody>
-      </p:sp>
-      <p:sp>
-        <p:nvSpPr>
-          <p:cNvPr id="16" name="text_176"/>
-          <p:cNvSpPr txBox="1"/>
-          <p:nvPr/>
-        </p:nvSpPr>
-        <p:spPr>
-          <a:xfrm>
-            <a:off x="6530188" y="2971800"/>
-            <a:ext cx="1984934" cy="1554480"/>
+            <a:off x="3676574" y="2011680"/>
+            <a:ext cx="1984934" cy="822960"/>
           </a:xfrm>
           <a:prstGeom prst="rect">
             <a:avLst/>
@@ -16781,7 +18746,46 @@
               <a:buNone/>
             </a:pPr>
             <a:r>
-              <a:rPr lang="en-US" sz="1500" dirty="0">
+              <a:rPr lang="en-US" sz="3600" b="1" dirty="0">
+                <a:solidFill>
+                  <a:schemeClr val="tx2"/>
+                </a:solidFill>
+                <a:latin typeface="Cambria" pitchFamily="34" charset="0"/>
+                <a:ea typeface="Cambria" pitchFamily="34" charset="-122"/>
+                <a:cs typeface="Cambria" pitchFamily="34" charset="-120"/>
+              </a:rPr>
+              <a:t>+21,1</a:t>
+            </a:r>
+            <a:endParaRPr lang="en-US" sz="3600" dirty="0"/>
+          </a:p>
+        </p:txBody>
+      </p:sp>
+      <p:sp>
+        <p:nvSpPr>
+          <p:cNvPr id="10" name="text_6"/>
+          <p:cNvSpPr txBox="1"/>
+          <p:nvPr/>
+        </p:nvSpPr>
+        <p:spPr>
+          <a:xfrm>
+            <a:off x="3676574" y="2880360"/>
+            <a:ext cx="1984934" cy="822960"/>
+          </a:xfrm>
+          <a:prstGeom prst="rect">
+            <a:avLst/>
+          </a:prstGeom>
+          <a:noFill/>
+          <a:ln/>
+        </p:spPr>
+        <p:txBody>
+          <a:bodyPr wrap="square" lIns="0" tIns="0" rIns="0" bIns="0" rtlCol="0" anchor="t"/>
+          <a:lstStyle/>
+          <a:p>
+            <a:pPr indent="0" marL="0">
+              <a:buNone/>
+            </a:pPr>
+            <a:r>
+              <a:rPr lang="en-US" sz="1400" dirty="0">
                 <a:solidFill>
                   <a:schemeClr val="tx1"/>
                 </a:solidFill>
@@ -16789,22 +18793,22 @@
                 <a:ea typeface="Calibri" pitchFamily="34" charset="-122"/>
                 <a:cs typeface="Calibri" pitchFamily="34" charset="-120"/>
               </a:rPr>
-              <a:t>Prototype web: tải ảnh → OCR → trả lời tiếng Việt</a:t>
+              <a:t>EM nhờ QLoRA so với zero-shot, full test ViTextVQA (+51,7 ở ViVQA); p ≈ 0</a:t>
             </a:r>
-            <a:endParaRPr lang="en-US" sz="1500" dirty="0"/>
+            <a:endParaRPr lang="en-US" sz="1400" dirty="0"/>
           </a:p>
         </p:txBody>
       </p:sp>
       <p:sp>
         <p:nvSpPr>
-          <p:cNvPr id="17" name="card_177"/>
+          <p:cNvPr id="11" name="card_7"/>
           <p:cNvSpPr/>
           <p:nvPr/>
         </p:nvSpPr>
         <p:spPr>
           <a:xfrm>
-            <a:off x="9109481" y="1600200"/>
-            <a:ext cx="2533574" cy="3108960"/>
+            <a:off x="6255868" y="1600200"/>
+            <a:ext cx="2533574" cy="2651760"/>
           </a:xfrm>
           <a:prstGeom prst="roundRect">
             <a:avLst>
@@ -16824,24 +18828,104 @@
       </p:sp>
       <p:sp>
         <p:nvSpPr>
-          <p:cNvPr id="18" name="dot_178"/>
+          <p:cNvPr id="12" name="text_8"/>
+          <p:cNvSpPr txBox="1"/>
+          <p:nvPr/>
+        </p:nvSpPr>
+        <p:spPr>
+          <a:xfrm>
+            <a:off x="6530188" y="2011680"/>
+            <a:ext cx="1984934" cy="822960"/>
+          </a:xfrm>
+          <a:prstGeom prst="rect">
+            <a:avLst/>
+          </a:prstGeom>
+          <a:noFill/>
+          <a:ln/>
+        </p:spPr>
+        <p:txBody>
+          <a:bodyPr wrap="square" lIns="0" tIns="0" rIns="0" bIns="0" rtlCol="0" anchor="t"/>
+          <a:lstStyle/>
+          <a:p>
+            <a:pPr indent="0" marL="0">
+              <a:buNone/>
+            </a:pPr>
+            <a:r>
+              <a:rPr lang="en-US" sz="3600" b="1" dirty="0">
+                <a:solidFill>
+                  <a:schemeClr val="tx2"/>
+                </a:solidFill>
+                <a:latin typeface="Cambria" pitchFamily="34" charset="0"/>
+                <a:ea typeface="Cambria" pitchFamily="34" charset="-122"/>
+                <a:cs typeface="Cambria" pitchFamily="34" charset="-120"/>
+              </a:rPr>
+              <a:t>50,3</a:t>
+            </a:r>
+            <a:endParaRPr lang="en-US" sz="3600" dirty="0"/>
+          </a:p>
+        </p:txBody>
+      </p:sp>
+      <p:sp>
+        <p:nvSpPr>
+          <p:cNvPr id="13" name="text_9"/>
+          <p:cNvSpPr txBox="1"/>
+          <p:nvPr/>
+        </p:nvSpPr>
+        <p:spPr>
+          <a:xfrm>
+            <a:off x="6530188" y="2880360"/>
+            <a:ext cx="1984934" cy="822960"/>
+          </a:xfrm>
+          <a:prstGeom prst="rect">
+            <a:avLst/>
+          </a:prstGeom>
+          <a:noFill/>
+          <a:ln/>
+        </p:spPr>
+        <p:txBody>
+          <a:bodyPr wrap="square" lIns="0" tIns="0" rIns="0" bIns="0" rtlCol="0" anchor="t"/>
+          <a:lstStyle/>
+          <a:p>
+            <a:pPr indent="0" marL="0">
+              <a:buNone/>
+            </a:pPr>
+            <a:r>
+              <a:rPr lang="en-US" sz="1400" dirty="0">
+                <a:solidFill>
+                  <a:schemeClr val="tx1"/>
+                </a:solidFill>
+                <a:latin typeface="Calibri" pitchFamily="34" charset="0"/>
+                <a:ea typeface="Calibri" pitchFamily="34" charset="-122"/>
+                <a:cs typeface="Calibri" pitchFamily="34" charset="-120"/>
+              </a:rPr>
+              <a:t>EM trên full test ViTextVQA so với 25,5 của SOTA công bố ViTextBLIP-2</a:t>
+            </a:r>
+            <a:endParaRPr lang="en-US" sz="1400" dirty="0"/>
+          </a:p>
+        </p:txBody>
+      </p:sp>
+      <p:sp>
+        <p:nvSpPr>
+          <p:cNvPr id="14" name="card_10"/>
           <p:cNvSpPr/>
           <p:nvPr/>
         </p:nvSpPr>
         <p:spPr>
           <a:xfrm>
-            <a:off x="9383801" y="1874520"/>
-            <a:ext cx="868680" cy="868680"/>
+            <a:off x="9109481" y="1600200"/>
+            <a:ext cx="2533574" cy="2651760"/>
           </a:xfrm>
-          <a:prstGeom prst="ellipse">
-            <a:avLst/>
+          <a:prstGeom prst="roundRect">
+            <a:avLst>
+              <a:gd name="adj" fmla="val 2887"/>
+            </a:avLst>
           </a:prstGeom>
           <a:solidFill>
-            <a:srgbClr val="13294B"/>
+            <a:schemeClr val="accent5"/>
           </a:solidFill>
           <a:ln w="12700">
             <a:solidFill>
-              <a:srgbClr val="FFFFFF"/>
+              <a:schemeClr val="accent5"/>
             </a:solidFill>
             <a:prstDash val="solid"/>
           </a:ln>
@@ -16849,14 +18933,119 @@
       </p:sp>
       <p:sp>
         <p:nvSpPr>
-          <p:cNvPr id="19" name="text_179"/>
+          <p:cNvPr id="15" name="text_11"/>
           <p:cNvSpPr txBox="1"/>
           <p:nvPr/>
         </p:nvSpPr>
         <p:spPr>
           <a:xfrm>
-            <a:off x="9383801" y="1874520"/>
-            <a:ext cx="868680" cy="868680"/>
+            <a:off x="9383801" y="2011680"/>
+            <a:ext cx="1984934" cy="822960"/>
+          </a:xfrm>
+          <a:prstGeom prst="rect">
+            <a:avLst/>
+          </a:prstGeom>
+          <a:noFill/>
+          <a:ln/>
+        </p:spPr>
+        <p:txBody>
+          <a:bodyPr wrap="square" lIns="0" tIns="0" rIns="0" bIns="0" rtlCol="0" anchor="t"/>
+          <a:lstStyle/>
+          <a:p>
+            <a:pPr indent="0" marL="0">
+              <a:buNone/>
+            </a:pPr>
+            <a:r>
+              <a:rPr lang="en-US" sz="3600" b="1" dirty="0">
+                <a:solidFill>
+                  <a:schemeClr val="accent2"/>
+                </a:solidFill>
+                <a:latin typeface="Cambria" pitchFamily="34" charset="0"/>
+                <a:ea typeface="Cambria" pitchFamily="34" charset="-122"/>
+                <a:cs typeface="Cambria" pitchFamily="34" charset="-120"/>
+              </a:rPr>
+              <a:t>+2,5</a:t>
+            </a:r>
+            <a:endParaRPr lang="en-US" sz="3600" dirty="0"/>
+          </a:p>
+        </p:txBody>
+      </p:sp>
+      <p:sp>
+        <p:nvSpPr>
+          <p:cNvPr id="16" name="text_12"/>
+          <p:cNvSpPr txBox="1"/>
+          <p:nvPr/>
+        </p:nvSpPr>
+        <p:spPr>
+          <a:xfrm>
+            <a:off x="9383801" y="2880360"/>
+            <a:ext cx="1984934" cy="822960"/>
+          </a:xfrm>
+          <a:prstGeom prst="rect">
+            <a:avLst/>
+          </a:prstGeom>
+          <a:noFill/>
+          <a:ln/>
+        </p:spPr>
+        <p:txBody>
+          <a:bodyPr wrap="square" lIns="0" tIns="0" rIns="0" bIns="0" rtlCol="0" anchor="t"/>
+          <a:lstStyle/>
+          <a:p>
+            <a:pPr indent="0" marL="0">
+              <a:buNone/>
+            </a:pPr>
+            <a:r>
+              <a:rPr lang="en-US" sz="1400" dirty="0">
+                <a:solidFill>
+                  <a:schemeClr val="tx1"/>
+                </a:solidFill>
+                <a:latin typeface="Calibri" pitchFamily="34" charset="0"/>
+                <a:ea typeface="Calibri" pitchFamily="34" charset="-122"/>
+                <a:cs typeface="Calibri" pitchFamily="34" charset="-120"/>
+              </a:rPr>
+              <a:t>EM nhờ QLoRA nhận biết OCR so với cùng QLoRA không OCR (full test, p = 10⁻¹⁴; ổn định qua 3 seed)</a:t>
+            </a:r>
+            <a:endParaRPr lang="en-US" sz="1400" dirty="0"/>
+          </a:p>
+        </p:txBody>
+      </p:sp>
+      <p:sp>
+        <p:nvSpPr>
+          <p:cNvPr id="17" name="card_13"/>
+          <p:cNvSpPr/>
+          <p:nvPr/>
+        </p:nvSpPr>
+        <p:spPr>
+          <a:xfrm>
+            <a:off x="548640" y="4572000"/>
+            <a:ext cx="11094415" cy="960120"/>
+          </a:xfrm>
+          <a:prstGeom prst="roundRect">
+            <a:avLst>
+              <a:gd name="adj" fmla="val 7619"/>
+            </a:avLst>
+          </a:prstGeom>
+          <a:solidFill>
+            <a:schemeClr val="accent4"/>
+          </a:solidFill>
+          <a:ln w="12700">
+            <a:solidFill>
+              <a:schemeClr val="accent4"/>
+            </a:solidFill>
+            <a:prstDash val="solid"/>
+          </a:ln>
+        </p:spPr>
+      </p:sp>
+      <p:sp>
+        <p:nvSpPr>
+          <p:cNvPr id="18" name="text_14"/>
+          <p:cNvSpPr txBox="1"/>
+          <p:nvPr/>
+        </p:nvSpPr>
+        <p:spPr>
+          <a:xfrm>
+            <a:off x="868680" y="4572000"/>
+            <a:ext cx="10454335" cy="960120"/>
           </a:xfrm>
           <a:prstGeom prst="rect">
             <a:avLst/>
@@ -16868,99 +19057,21 @@
           <a:bodyPr wrap="square" lIns="0" tIns="0" rIns="0" bIns="0" rtlCol="0" anchor="ctr"/>
           <a:lstStyle/>
           <a:p>
-            <a:pPr algn="ctr" indent="0" marL="0">
+            <a:pPr indent="0" marL="0">
               <a:buNone/>
             </a:pPr>
             <a:r>
-              <a:rPr lang="en-US" sz="1400" b="1" dirty="0">
+              <a:rPr lang="en-US" sz="1600" dirty="0">
                 <a:solidFill>
-                  <a:schemeClr val="bg1"/>
+                  <a:schemeClr val="tx2"/>
                 </a:solidFill>
                 <a:latin typeface="Calibri" pitchFamily="34" charset="0"/>
                 <a:ea typeface="Calibri" pitchFamily="34" charset="-122"/>
                 <a:cs typeface="Calibri" pitchFamily="34" charset="-120"/>
               </a:rPr>
-              <a:t>W13</a:t>
+              <a:t>Hiệu quả theo thiết kế: QLoRA chỉ train 7,37 triệu tham số (0,196%), adapter 29,5 MB, trên một GPU NVIDIA L4 — không full fine-tuning.</a:t>
             </a:r>
-            <a:endParaRPr lang="en-US" sz="1400" dirty="0"/>
-          </a:p>
-        </p:txBody>
-      </p:sp>
-      <p:sp>
-        <p:nvSpPr>
-          <p:cNvPr id="20" name="text_180"/>
-          <p:cNvSpPr txBox="1"/>
-          <p:nvPr/>
-        </p:nvSpPr>
-        <p:spPr>
-          <a:xfrm>
-            <a:off x="9383801" y="2971800"/>
-            <a:ext cx="1984934" cy="1554480"/>
-          </a:xfrm>
-          <a:prstGeom prst="rect">
-            <a:avLst/>
-          </a:prstGeom>
-          <a:noFill/>
-          <a:ln/>
-        </p:spPr>
-        <p:txBody>
-          <a:bodyPr wrap="square" lIns="0" tIns="0" rIns="0" bIns="0" rtlCol="0" anchor="t"/>
-          <a:lstStyle/>
-          <a:p>
-            <a:pPr indent="0" marL="0">
-              <a:buNone/>
-            </a:pPr>
-            <a:r>
-              <a:rPr lang="en-US" sz="1500" dirty="0">
-                <a:solidFill>
-                  <a:schemeClr val="tx1"/>
-                </a:solidFill>
-                <a:latin typeface="Calibri" pitchFamily="34" charset="0"/>
-                <a:ea typeface="Calibri" pitchFamily="34" charset="-122"/>
-                <a:cs typeface="Calibri" pitchFamily="34" charset="-120"/>
-              </a:rPr>
-              <a:t>Review 3: kết quả cuối, ablation, phân tích lỗi, demo trực tiếp</a:t>
-            </a:r>
-            <a:endParaRPr lang="en-US" sz="1500" dirty="0"/>
-          </a:p>
-        </p:txBody>
-      </p:sp>
-      <p:sp>
-        <p:nvSpPr>
-          <p:cNvPr id="21" name="text_181"/>
-          <p:cNvSpPr txBox="1"/>
-          <p:nvPr/>
-        </p:nvSpPr>
-        <p:spPr>
-          <a:xfrm>
-            <a:off x="548640" y="5029200"/>
-            <a:ext cx="11094415" cy="411480"/>
-          </a:xfrm>
-          <a:prstGeom prst="rect">
-            <a:avLst/>
-          </a:prstGeom>
-          <a:noFill/>
-          <a:ln/>
-        </p:spPr>
-        <p:txBody>
-          <a:bodyPr wrap="square" lIns="0" tIns="0" rIns="0" bIns="0" rtlCol="0" anchor="t"/>
-          <a:lstStyle/>
-          <a:p>
-            <a:pPr indent="0" marL="0">
-              <a:buNone/>
-            </a:pPr>
-            <a:r>
-              <a:rPr lang="en-US" sz="1400" dirty="0">
-                <a:solidFill>
-                  <a:schemeClr val="accent3"/>
-                </a:solidFill>
-                <a:latin typeface="Calibri" pitchFamily="34" charset="0"/>
-                <a:ea typeface="Calibri" pitchFamily="34" charset="-122"/>
-                <a:cs typeface="Calibri" pitchFamily="34" charset="-120"/>
-              </a:rPr>
-              <a:t>Mọi run giữ giao thức cố định, chỉ PEFT, và luật kết luận chốt trước.</a:t>
-            </a:r>
-            <a:endParaRPr lang="en-US" sz="1400" dirty="0"/>
+            <a:endParaRPr lang="en-US" sz="1600" dirty="0"/>
           </a:p>
         </p:txBody>
       </p:sp>
@@ -17006,7 +19117,7 @@
             <a:pPr algn="r"/>
             <a:fld id="{F7021451-1387-4CA6-816F-3879F97B5CBC}" type="slidenum">
               <a:rPr b="0" lang="en-US"/>
-              <a:t>19</a:t>
+              <a:t>2</a:t>
             </a:fld>
             <a:endParaRPr lang="en-US"/>
           </a:p>
@@ -17020,9 +19131,9 @@
 </p:sld>
 </file>
 
-<file path=ppt/slides/slide2.xml><?xml version="1.0" encoding="utf-8"?>
+<file path=ppt/slides/slide20.xml><?xml version="1.0" encoding="utf-8"?>
 <p:sld xmlns:a="http://schemas.openxmlformats.org/drawingml/2006/main" xmlns:r="http://schemas.openxmlformats.org/officeDocument/2006/relationships" xmlns:p="http://schemas.openxmlformats.org/presentationml/2006/main">
-  <p:cSld name="Slide 2">
+  <p:cSld name="Slide 20">
     <p:spTree>
       <p:nvGrpSpPr>
         <p:cNvPr id="1" name=""/>
@@ -17072,7 +19183,7 @@
                 <a:ea typeface="Calibri" pitchFamily="34" charset="-122"/>
                 <a:cs typeface="Calibri" pitchFamily="34" charset="-120"/>
               </a:rPr>
-              <a:t>TÓM TẮT</a:t>
+              <a:t>PHẦN 07 · BƯỚC TIẾP THEO</a:t>
             </a:r>
             <a:endParaRPr lang="en-US" sz="1100" dirty="0"/>
           </a:p>
@@ -17113,7 +19224,7 @@
                 <a:ea typeface="Cambria" pitchFamily="34" charset="-122"/>
                 <a:cs typeface="Cambria" pitchFamily="34" charset="-120"/>
               </a:rPr>
-              <a:t>Bốn kết quả chính của mốc này</a:t>
+              <a:t>Kế hoạch đến Review 3 (tuần 13)</a:t>
             </a:r>
             <a:endParaRPr lang="en-US" sz="3200" dirty="0"/>
           </a:p>
@@ -17121,14 +19232,144 @@
       </p:sp>
       <p:sp>
         <p:nvSpPr>
-          <p:cNvPr id="5" name="card_1"/>
+          <p:cNvPr id="5" name="card_172"/>
           <p:cNvSpPr/>
           <p:nvPr/>
         </p:nvSpPr>
         <p:spPr>
           <a:xfrm>
             <a:off x="548640" y="1600200"/>
-            <a:ext cx="2533574" cy="2651760"/>
+            <a:ext cx="2533574" cy="3108960"/>
+          </a:xfrm>
+          <a:prstGeom prst="roundRect">
+            <a:avLst>
+              <a:gd name="adj" fmla="val 2887"/>
+            </a:avLst>
+          </a:prstGeom>
+          <a:solidFill>
+            <a:schemeClr val="accent4"/>
+          </a:solidFill>
+          <a:ln w="12700">
+            <a:solidFill>
+              <a:schemeClr val="accent4"/>
+            </a:solidFill>
+            <a:prstDash val="solid"/>
+          </a:ln>
+        </p:spPr>
+      </p:sp>
+      <p:sp>
+        <p:nvSpPr>
+          <p:cNvPr id="6" name="dot_173"/>
+          <p:cNvSpPr/>
+          <p:nvPr/>
+        </p:nvSpPr>
+        <p:spPr>
+          <a:xfrm>
+            <a:off x="822960" y="1874520"/>
+            <a:ext cx="868680" cy="868680"/>
+          </a:xfrm>
+          <a:prstGeom prst="ellipse">
+            <a:avLst/>
+          </a:prstGeom>
+          <a:solidFill>
+            <a:srgbClr val="1C7293"/>
+          </a:solidFill>
+          <a:ln w="12700">
+            <a:solidFill>
+              <a:srgbClr val="FFFFFF"/>
+            </a:solidFill>
+            <a:prstDash val="solid"/>
+          </a:ln>
+        </p:spPr>
+      </p:sp>
+      <p:sp>
+        <p:nvSpPr>
+          <p:cNvPr id="7" name="text_174"/>
+          <p:cNvSpPr txBox="1"/>
+          <p:nvPr/>
+        </p:nvSpPr>
+        <p:spPr>
+          <a:xfrm>
+            <a:off x="822960" y="1874520"/>
+            <a:ext cx="868680" cy="868680"/>
+          </a:xfrm>
+          <a:prstGeom prst="rect">
+            <a:avLst/>
+          </a:prstGeom>
+          <a:noFill/>
+          <a:ln/>
+        </p:spPr>
+        <p:txBody>
+          <a:bodyPr wrap="square" lIns="0" tIns="0" rIns="0" bIns="0" rtlCol="0" anchor="ctr"/>
+          <a:lstStyle/>
+          <a:p>
+            <a:pPr algn="ctr" indent="0" marL="0">
+              <a:buNone/>
+            </a:pPr>
+            <a:r>
+              <a:rPr lang="en-US" sz="1400" b="1" dirty="0">
+                <a:solidFill>
+                  <a:schemeClr val="bg1"/>
+                </a:solidFill>
+                <a:latin typeface="Calibri" pitchFamily="34" charset="0"/>
+                <a:ea typeface="Calibri" pitchFamily="34" charset="-122"/>
+                <a:cs typeface="Calibri" pitchFamily="34" charset="-120"/>
+              </a:rPr>
+              <a:t>W10</a:t>
+            </a:r>
+            <a:endParaRPr lang="en-US" sz="1400" dirty="0"/>
+          </a:p>
+        </p:txBody>
+      </p:sp>
+      <p:sp>
+        <p:nvSpPr>
+          <p:cNvPr id="8" name="text_175"/>
+          <p:cNvSpPr txBox="1"/>
+          <p:nvPr/>
+        </p:nvSpPr>
+        <p:spPr>
+          <a:xfrm>
+            <a:off x="822960" y="2971800"/>
+            <a:ext cx="1984934" cy="1554480"/>
+          </a:xfrm>
+          <a:prstGeom prst="rect">
+            <a:avLst/>
+          </a:prstGeom>
+          <a:noFill/>
+          <a:ln/>
+        </p:spPr>
+        <p:txBody>
+          <a:bodyPr wrap="square" lIns="0" tIns="0" rIns="0" bIns="0" rtlCol="0" anchor="t"/>
+          <a:lstStyle/>
+          <a:p>
+            <a:pPr indent="0" marL="0">
+              <a:buNone/>
+            </a:pPr>
+            <a:r>
+              <a:rPr lang="en-US" sz="1500" dirty="0">
+                <a:solidFill>
+                  <a:schemeClr val="tx1"/>
+                </a:solidFill>
+                <a:latin typeface="Calibri" pitchFamily="34" charset="0"/>
+                <a:ea typeface="Calibri" pitchFamily="34" charset="-122"/>
+                <a:cs typeface="Calibri" pitchFamily="34" charset="-120"/>
+              </a:rPr>
+              <a:t>QLoRA nhận biết OCR trên toàn bộ train ViTextVQA; ablation rank và module gắn LoRA (H3, H4)</a:t>
+            </a:r>
+            <a:endParaRPr lang="en-US" sz="1500" dirty="0"/>
+          </a:p>
+        </p:txBody>
+      </p:sp>
+      <p:sp>
+        <p:nvSpPr>
+          <p:cNvPr id="9" name="card_176"/>
+          <p:cNvSpPr/>
+          <p:nvPr/>
+        </p:nvSpPr>
+        <p:spPr>
+          <a:xfrm>
+            <a:off x="3402254" y="1600200"/>
+            <a:ext cx="2533574" cy="3108960"/>
           </a:xfrm>
           <a:prstGeom prst="roundRect">
             <a:avLst>
@@ -17148,14 +19389,78 @@
       </p:sp>
       <p:sp>
         <p:nvSpPr>
-          <p:cNvPr id="6" name="text_2"/>
+          <p:cNvPr id="10" name="dot_177"/>
+          <p:cNvSpPr/>
+          <p:nvPr/>
+        </p:nvSpPr>
+        <p:spPr>
+          <a:xfrm>
+            <a:off x="3676574" y="1874520"/>
+            <a:ext cx="868680" cy="868680"/>
+          </a:xfrm>
+          <a:prstGeom prst="ellipse">
+            <a:avLst/>
+          </a:prstGeom>
+          <a:solidFill>
+            <a:srgbClr val="13294B"/>
+          </a:solidFill>
+          <a:ln w="12700">
+            <a:solidFill>
+              <a:srgbClr val="FFFFFF"/>
+            </a:solidFill>
+            <a:prstDash val="solid"/>
+          </a:ln>
+        </p:spPr>
+      </p:sp>
+      <p:sp>
+        <p:nvSpPr>
+          <p:cNvPr id="11" name="text_178"/>
           <p:cNvSpPr txBox="1"/>
           <p:nvPr/>
         </p:nvSpPr>
         <p:spPr>
           <a:xfrm>
-            <a:off x="822960" y="2011680"/>
-            <a:ext cx="1984934" cy="822960"/>
+            <a:off x="3676574" y="1874520"/>
+            <a:ext cx="868680" cy="868680"/>
+          </a:xfrm>
+          <a:prstGeom prst="rect">
+            <a:avLst/>
+          </a:prstGeom>
+          <a:noFill/>
+          <a:ln/>
+        </p:spPr>
+        <p:txBody>
+          <a:bodyPr wrap="square" lIns="0" tIns="0" rIns="0" bIns="0" rtlCol="0" anchor="ctr"/>
+          <a:lstStyle/>
+          <a:p>
+            <a:pPr algn="ctr" indent="0" marL="0">
+              <a:buNone/>
+            </a:pPr>
+            <a:r>
+              <a:rPr lang="en-US" sz="1400" b="1" dirty="0">
+                <a:solidFill>
+                  <a:schemeClr val="bg1"/>
+                </a:solidFill>
+                <a:latin typeface="Calibri" pitchFamily="34" charset="0"/>
+                <a:ea typeface="Calibri" pitchFamily="34" charset="-122"/>
+                <a:cs typeface="Calibri" pitchFamily="34" charset="-120"/>
+              </a:rPr>
+              <a:t>W11</a:t>
+            </a:r>
+            <a:endParaRPr lang="en-US" sz="1400" dirty="0"/>
+          </a:p>
+        </p:txBody>
+      </p:sp>
+      <p:sp>
+        <p:nvSpPr>
+          <p:cNvPr id="12" name="text_179"/>
+          <p:cNvSpPr txBox="1"/>
+          <p:nvPr/>
+        </p:nvSpPr>
+        <p:spPr>
+          <a:xfrm>
+            <a:off x="3676574" y="2971800"/>
+            <a:ext cx="1984934" cy="1554480"/>
           </a:xfrm>
           <a:prstGeom prst="rect">
             <a:avLst/>
@@ -17171,46 +19476,7 @@
               <a:buNone/>
             </a:pPr>
             <a:r>
-              <a:rPr lang="en-US" sz="3600" b="1" dirty="0">
-                <a:solidFill>
-                  <a:schemeClr val="accent1"/>
-                </a:solidFill>
-                <a:latin typeface="Cambria" pitchFamily="34" charset="0"/>
-                <a:ea typeface="Cambria" pitchFamily="34" charset="-122"/>
-                <a:cs typeface="Cambria" pitchFamily="34" charset="-120"/>
-              </a:rPr>
-              <a:t>79,6</a:t>
-            </a:r>
-            <a:endParaRPr lang="en-US" sz="3600" dirty="0"/>
-          </a:p>
-        </p:txBody>
-      </p:sp>
-      <p:sp>
-        <p:nvSpPr>
-          <p:cNvPr id="7" name="text_3"/>
-          <p:cNvSpPr txBox="1"/>
-          <p:nvPr/>
-        </p:nvSpPr>
-        <p:spPr>
-          <a:xfrm>
-            <a:off x="822960" y="2880360"/>
-            <a:ext cx="1984934" cy="822960"/>
-          </a:xfrm>
-          <a:prstGeom prst="rect">
-            <a:avLst/>
-          </a:prstGeom>
-          <a:noFill/>
-          <a:ln/>
-        </p:spPr>
-        <p:txBody>
-          <a:bodyPr wrap="square" lIns="0" tIns="0" rIns="0" bIns="0" rtlCol="0" anchor="t"/>
-          <a:lstStyle/>
-          <a:p>
-            <a:pPr indent="0" marL="0">
-              <a:buNone/>
-            </a:pPr>
-            <a:r>
-              <a:rPr lang="en-US" sz="1400" dirty="0">
+              <a:rPr lang="en-US" sz="1500" dirty="0">
                 <a:solidFill>
                   <a:schemeClr val="tx1"/>
                 </a:solidFill>
@@ -17218,22 +19484,22 @@
                 <a:ea typeface="Calibri" pitchFamily="34" charset="-122"/>
                 <a:cs typeface="Calibri" pitchFamily="34" charset="-120"/>
               </a:rPr>
-              <a:t>Kiểm chứng pipeline — TextVQA val, Qwen2.5-VL-3B; báo cáo chính thức ghi 79,3</a:t>
+              <a:t>Adapter dùng chung cho 2 dataset (H5); đo hallucination có hệ thống, kể cả B3 (H8)</a:t>
             </a:r>
-            <a:endParaRPr lang="en-US" sz="1400" dirty="0"/>
+            <a:endParaRPr lang="en-US" sz="1500" dirty="0"/>
           </a:p>
         </p:txBody>
       </p:sp>
       <p:sp>
         <p:nvSpPr>
-          <p:cNvPr id="8" name="card_4"/>
+          <p:cNvPr id="13" name="card_180"/>
           <p:cNvSpPr/>
           <p:nvPr/>
         </p:nvSpPr>
         <p:spPr>
           <a:xfrm>
-            <a:off x="3402254" y="1600200"/>
-            <a:ext cx="2533574" cy="2651760"/>
+            <a:off x="6255868" y="1600200"/>
+            <a:ext cx="2533574" cy="3108960"/>
           </a:xfrm>
           <a:prstGeom prst="roundRect">
             <a:avLst>
@@ -17253,14 +19519,78 @@
       </p:sp>
       <p:sp>
         <p:nvSpPr>
-          <p:cNvPr id="9" name="text_5"/>
+          <p:cNvPr id="14" name="dot_181"/>
+          <p:cNvSpPr/>
+          <p:nvPr/>
+        </p:nvSpPr>
+        <p:spPr>
+          <a:xfrm>
+            <a:off x="6530188" y="1874520"/>
+            <a:ext cx="868680" cy="868680"/>
+          </a:xfrm>
+          <a:prstGeom prst="ellipse">
+            <a:avLst/>
+          </a:prstGeom>
+          <a:solidFill>
+            <a:srgbClr val="13294B"/>
+          </a:solidFill>
+          <a:ln w="12700">
+            <a:solidFill>
+              <a:srgbClr val="FFFFFF"/>
+            </a:solidFill>
+            <a:prstDash val="solid"/>
+          </a:ln>
+        </p:spPr>
+      </p:sp>
+      <p:sp>
+        <p:nvSpPr>
+          <p:cNvPr id="15" name="text_182"/>
           <p:cNvSpPr txBox="1"/>
           <p:nvPr/>
         </p:nvSpPr>
         <p:spPr>
           <a:xfrm>
-            <a:off x="3676574" y="2011680"/>
-            <a:ext cx="1984934" cy="822960"/>
+            <a:off x="6530188" y="1874520"/>
+            <a:ext cx="868680" cy="868680"/>
+          </a:xfrm>
+          <a:prstGeom prst="rect">
+            <a:avLst/>
+          </a:prstGeom>
+          <a:noFill/>
+          <a:ln/>
+        </p:spPr>
+        <p:txBody>
+          <a:bodyPr wrap="square" lIns="0" tIns="0" rIns="0" bIns="0" rtlCol="0" anchor="ctr"/>
+          <a:lstStyle/>
+          <a:p>
+            <a:pPr algn="ctr" indent="0" marL="0">
+              <a:buNone/>
+            </a:pPr>
+            <a:r>
+              <a:rPr lang="en-US" sz="1400" b="1" dirty="0">
+                <a:solidFill>
+                  <a:schemeClr val="bg1"/>
+                </a:solidFill>
+                <a:latin typeface="Calibri" pitchFamily="34" charset="0"/>
+                <a:ea typeface="Calibri" pitchFamily="34" charset="-122"/>
+                <a:cs typeface="Calibri" pitchFamily="34" charset="-120"/>
+              </a:rPr>
+              <a:t>W12</a:t>
+            </a:r>
+            <a:endParaRPr lang="en-US" sz="1400" dirty="0"/>
+          </a:p>
+        </p:txBody>
+      </p:sp>
+      <p:sp>
+        <p:nvSpPr>
+          <p:cNvPr id="16" name="text_183"/>
+          <p:cNvSpPr txBox="1"/>
+          <p:nvPr/>
+        </p:nvSpPr>
+        <p:spPr>
+          <a:xfrm>
+            <a:off x="6530188" y="2971800"/>
+            <a:ext cx="1984934" cy="1554480"/>
           </a:xfrm>
           <a:prstGeom prst="rect">
             <a:avLst/>
@@ -17276,46 +19606,7 @@
               <a:buNone/>
             </a:pPr>
             <a:r>
-              <a:rPr lang="en-US" sz="3600" b="1" dirty="0">
-                <a:solidFill>
-                  <a:schemeClr val="tx2"/>
-                </a:solidFill>
-                <a:latin typeface="Cambria" pitchFamily="34" charset="0"/>
-                <a:ea typeface="Cambria" pitchFamily="34" charset="-122"/>
-                <a:cs typeface="Cambria" pitchFamily="34" charset="-120"/>
-              </a:rPr>
-              <a:t>+21,1</a:t>
-            </a:r>
-            <a:endParaRPr lang="en-US" sz="3600" dirty="0"/>
-          </a:p>
-        </p:txBody>
-      </p:sp>
-      <p:sp>
-        <p:nvSpPr>
-          <p:cNvPr id="10" name="text_6"/>
-          <p:cNvSpPr txBox="1"/>
-          <p:nvPr/>
-        </p:nvSpPr>
-        <p:spPr>
-          <a:xfrm>
-            <a:off x="3676574" y="2880360"/>
-            <a:ext cx="1984934" cy="822960"/>
-          </a:xfrm>
-          <a:prstGeom prst="rect">
-            <a:avLst/>
-          </a:prstGeom>
-          <a:noFill/>
-          <a:ln/>
-        </p:spPr>
-        <p:txBody>
-          <a:bodyPr wrap="square" lIns="0" tIns="0" rIns="0" bIns="0" rtlCol="0" anchor="t"/>
-          <a:lstStyle/>
-          <a:p>
-            <a:pPr indent="0" marL="0">
-              <a:buNone/>
-            </a:pPr>
-            <a:r>
-              <a:rPr lang="en-US" sz="1400" dirty="0">
+              <a:rPr lang="en-US" sz="1500" dirty="0">
                 <a:solidFill>
                   <a:schemeClr val="tx1"/>
                 </a:solidFill>
@@ -17323,22 +19614,22 @@
                 <a:ea typeface="Calibri" pitchFamily="34" charset="-122"/>
                 <a:cs typeface="Calibri" pitchFamily="34" charset="-120"/>
               </a:rPr>
-              <a:t>EM nhờ QLoRA so với zero-shot, full test ViTextVQA (+51,7 ở ViVQA); p ≈ 0</a:t>
+              <a:t>Prototype web: tải ảnh → OCR → trả lời tiếng Việt</a:t>
             </a:r>
-            <a:endParaRPr lang="en-US" sz="1400" dirty="0"/>
+            <a:endParaRPr lang="en-US" sz="1500" dirty="0"/>
           </a:p>
         </p:txBody>
       </p:sp>
       <p:sp>
         <p:nvSpPr>
-          <p:cNvPr id="11" name="card_7"/>
+          <p:cNvPr id="17" name="card_184"/>
           <p:cNvSpPr/>
           <p:nvPr/>
         </p:nvSpPr>
         <p:spPr>
           <a:xfrm>
-            <a:off x="6255868" y="1600200"/>
-            <a:ext cx="2533574" cy="2651760"/>
+            <a:off x="9109481" y="1600200"/>
+            <a:ext cx="2533574" cy="3108960"/>
           </a:xfrm>
           <a:prstGeom prst="roundRect">
             <a:avLst>
@@ -17358,14 +19649,78 @@
       </p:sp>
       <p:sp>
         <p:nvSpPr>
-          <p:cNvPr id="12" name="text_8"/>
+          <p:cNvPr id="18" name="dot_185"/>
+          <p:cNvSpPr/>
+          <p:nvPr/>
+        </p:nvSpPr>
+        <p:spPr>
+          <a:xfrm>
+            <a:off x="9383801" y="1874520"/>
+            <a:ext cx="868680" cy="868680"/>
+          </a:xfrm>
+          <a:prstGeom prst="ellipse">
+            <a:avLst/>
+          </a:prstGeom>
+          <a:solidFill>
+            <a:srgbClr val="13294B"/>
+          </a:solidFill>
+          <a:ln w="12700">
+            <a:solidFill>
+              <a:srgbClr val="FFFFFF"/>
+            </a:solidFill>
+            <a:prstDash val="solid"/>
+          </a:ln>
+        </p:spPr>
+      </p:sp>
+      <p:sp>
+        <p:nvSpPr>
+          <p:cNvPr id="19" name="text_186"/>
           <p:cNvSpPr txBox="1"/>
           <p:nvPr/>
         </p:nvSpPr>
         <p:spPr>
           <a:xfrm>
-            <a:off x="6530188" y="2011680"/>
-            <a:ext cx="1984934" cy="822960"/>
+            <a:off x="9383801" y="1874520"/>
+            <a:ext cx="868680" cy="868680"/>
+          </a:xfrm>
+          <a:prstGeom prst="rect">
+            <a:avLst/>
+          </a:prstGeom>
+          <a:noFill/>
+          <a:ln/>
+        </p:spPr>
+        <p:txBody>
+          <a:bodyPr wrap="square" lIns="0" tIns="0" rIns="0" bIns="0" rtlCol="0" anchor="ctr"/>
+          <a:lstStyle/>
+          <a:p>
+            <a:pPr algn="ctr" indent="0" marL="0">
+              <a:buNone/>
+            </a:pPr>
+            <a:r>
+              <a:rPr lang="en-US" sz="1400" b="1" dirty="0">
+                <a:solidFill>
+                  <a:schemeClr val="bg1"/>
+                </a:solidFill>
+                <a:latin typeface="Calibri" pitchFamily="34" charset="0"/>
+                <a:ea typeface="Calibri" pitchFamily="34" charset="-122"/>
+                <a:cs typeface="Calibri" pitchFamily="34" charset="-120"/>
+              </a:rPr>
+              <a:t>W13</a:t>
+            </a:r>
+            <a:endParaRPr lang="en-US" sz="1400" dirty="0"/>
+          </a:p>
+        </p:txBody>
+      </p:sp>
+      <p:sp>
+        <p:nvSpPr>
+          <p:cNvPr id="20" name="text_187"/>
+          <p:cNvSpPr txBox="1"/>
+          <p:nvPr/>
+        </p:nvSpPr>
+        <p:spPr>
+          <a:xfrm>
+            <a:off x="9383801" y="2971800"/>
+            <a:ext cx="1984934" cy="1554480"/>
           </a:xfrm>
           <a:prstGeom prst="rect">
             <a:avLst/>
@@ -17381,30 +19736,30 @@
               <a:buNone/>
             </a:pPr>
             <a:r>
-              <a:rPr lang="en-US" sz="3600" b="1" dirty="0">
+              <a:rPr lang="en-US" sz="1500" dirty="0">
                 <a:solidFill>
-                  <a:schemeClr val="tx2"/>
+                  <a:schemeClr val="tx1"/>
                 </a:solidFill>
-                <a:latin typeface="Cambria" pitchFamily="34" charset="0"/>
-                <a:ea typeface="Cambria" pitchFamily="34" charset="-122"/>
-                <a:cs typeface="Cambria" pitchFamily="34" charset="-120"/>
+                <a:latin typeface="Calibri" pitchFamily="34" charset="0"/>
+                <a:ea typeface="Calibri" pitchFamily="34" charset="-122"/>
+                <a:cs typeface="Calibri" pitchFamily="34" charset="-120"/>
               </a:rPr>
-              <a:t>50,3</a:t>
+              <a:t>Review 3: kết quả cuối, ablation, phân tích lỗi, demo trực tiếp</a:t>
             </a:r>
-            <a:endParaRPr lang="en-US" sz="3600" dirty="0"/>
+            <a:endParaRPr lang="en-US" sz="1500" dirty="0"/>
           </a:p>
         </p:txBody>
       </p:sp>
       <p:sp>
         <p:nvSpPr>
-          <p:cNvPr id="13" name="text_9"/>
+          <p:cNvPr id="21" name="text_188"/>
           <p:cNvSpPr txBox="1"/>
           <p:nvPr/>
         </p:nvSpPr>
         <p:spPr>
           <a:xfrm>
-            <a:off x="6530188" y="2880360"/>
-            <a:ext cx="1984934" cy="822960"/>
+            <a:off x="548640" y="5029200"/>
+            <a:ext cx="11094415" cy="411480"/>
           </a:xfrm>
           <a:prstGeom prst="rect">
             <a:avLst/>
@@ -17422,186 +19777,15 @@
             <a:r>
               <a:rPr lang="en-US" sz="1400" dirty="0">
                 <a:solidFill>
-                  <a:schemeClr val="tx1"/>
+                  <a:schemeClr val="accent3"/>
                 </a:solidFill>
                 <a:latin typeface="Calibri" pitchFamily="34" charset="0"/>
                 <a:ea typeface="Calibri" pitchFamily="34" charset="-122"/>
                 <a:cs typeface="Calibri" pitchFamily="34" charset="-120"/>
               </a:rPr>
-              <a:t>EM trên full test ViTextVQA so với 25,5 của SOTA công bố ViTextBLIP-2</a:t>
+              <a:t>Mọi run giữ giao thức cố định, chỉ PEFT, và luật kết luận chốt trước.</a:t>
             </a:r>
             <a:endParaRPr lang="en-US" sz="1400" dirty="0"/>
-          </a:p>
-        </p:txBody>
-      </p:sp>
-      <p:sp>
-        <p:nvSpPr>
-          <p:cNvPr id="14" name="card_10"/>
-          <p:cNvSpPr/>
-          <p:nvPr/>
-        </p:nvSpPr>
-        <p:spPr>
-          <a:xfrm>
-            <a:off x="9109481" y="1600200"/>
-            <a:ext cx="2533574" cy="2651760"/>
-          </a:xfrm>
-          <a:prstGeom prst="roundRect">
-            <a:avLst>
-              <a:gd name="adj" fmla="val 2887"/>
-            </a:avLst>
-          </a:prstGeom>
-          <a:solidFill>
-            <a:schemeClr val="accent5"/>
-          </a:solidFill>
-          <a:ln w="12700">
-            <a:solidFill>
-              <a:schemeClr val="accent5"/>
-            </a:solidFill>
-            <a:prstDash val="solid"/>
-          </a:ln>
-        </p:spPr>
-      </p:sp>
-      <p:sp>
-        <p:nvSpPr>
-          <p:cNvPr id="15" name="text_11"/>
-          <p:cNvSpPr txBox="1"/>
-          <p:nvPr/>
-        </p:nvSpPr>
-        <p:spPr>
-          <a:xfrm>
-            <a:off x="9383801" y="2011680"/>
-            <a:ext cx="1984934" cy="822960"/>
-          </a:xfrm>
-          <a:prstGeom prst="rect">
-            <a:avLst/>
-          </a:prstGeom>
-          <a:noFill/>
-          <a:ln/>
-        </p:spPr>
-        <p:txBody>
-          <a:bodyPr wrap="square" lIns="0" tIns="0" rIns="0" bIns="0" rtlCol="0" anchor="t"/>
-          <a:lstStyle/>
-          <a:p>
-            <a:pPr indent="0" marL="0">
-              <a:buNone/>
-            </a:pPr>
-            <a:r>
-              <a:rPr lang="en-US" sz="3600" b="1" dirty="0">
-                <a:solidFill>
-                  <a:schemeClr val="accent2"/>
-                </a:solidFill>
-                <a:latin typeface="Cambria" pitchFamily="34" charset="0"/>
-                <a:ea typeface="Cambria" pitchFamily="34" charset="-122"/>
-                <a:cs typeface="Cambria" pitchFamily="34" charset="-120"/>
-              </a:rPr>
-              <a:t>+2,5</a:t>
-            </a:r>
-            <a:endParaRPr lang="en-US" sz="3600" dirty="0"/>
-          </a:p>
-        </p:txBody>
-      </p:sp>
-      <p:sp>
-        <p:nvSpPr>
-          <p:cNvPr id="16" name="text_12"/>
-          <p:cNvSpPr txBox="1"/>
-          <p:nvPr/>
-        </p:nvSpPr>
-        <p:spPr>
-          <a:xfrm>
-            <a:off x="9383801" y="2880360"/>
-            <a:ext cx="1984934" cy="822960"/>
-          </a:xfrm>
-          <a:prstGeom prst="rect">
-            <a:avLst/>
-          </a:prstGeom>
-          <a:noFill/>
-          <a:ln/>
-        </p:spPr>
-        <p:txBody>
-          <a:bodyPr wrap="square" lIns="0" tIns="0" rIns="0" bIns="0" rtlCol="0" anchor="t"/>
-          <a:lstStyle/>
-          <a:p>
-            <a:pPr indent="0" marL="0">
-              <a:buNone/>
-            </a:pPr>
-            <a:r>
-              <a:rPr lang="en-US" sz="1400" dirty="0">
-                <a:solidFill>
-                  <a:schemeClr val="tx1"/>
-                </a:solidFill>
-                <a:latin typeface="Calibri" pitchFamily="34" charset="0"/>
-                <a:ea typeface="Calibri" pitchFamily="34" charset="-122"/>
-                <a:cs typeface="Calibri" pitchFamily="34" charset="-120"/>
-              </a:rPr>
-              <a:t>EM nhờ QLoRA nhận biết OCR so với cùng QLoRA không OCR (full test, p = 10⁻¹⁴; ổn định qua 3 seed)</a:t>
-            </a:r>
-            <a:endParaRPr lang="en-US" sz="1400" dirty="0"/>
-          </a:p>
-        </p:txBody>
-      </p:sp>
-      <p:sp>
-        <p:nvSpPr>
-          <p:cNvPr id="17" name="card_13"/>
-          <p:cNvSpPr/>
-          <p:nvPr/>
-        </p:nvSpPr>
-        <p:spPr>
-          <a:xfrm>
-            <a:off x="548640" y="4572000"/>
-            <a:ext cx="11094415" cy="960120"/>
-          </a:xfrm>
-          <a:prstGeom prst="roundRect">
-            <a:avLst>
-              <a:gd name="adj" fmla="val 7619"/>
-            </a:avLst>
-          </a:prstGeom>
-          <a:solidFill>
-            <a:schemeClr val="accent4"/>
-          </a:solidFill>
-          <a:ln w="12700">
-            <a:solidFill>
-              <a:schemeClr val="accent4"/>
-            </a:solidFill>
-            <a:prstDash val="solid"/>
-          </a:ln>
-        </p:spPr>
-      </p:sp>
-      <p:sp>
-        <p:nvSpPr>
-          <p:cNvPr id="18" name="text_14"/>
-          <p:cNvSpPr txBox="1"/>
-          <p:nvPr/>
-        </p:nvSpPr>
-        <p:spPr>
-          <a:xfrm>
-            <a:off x="868680" y="4572000"/>
-            <a:ext cx="10454335" cy="960120"/>
-          </a:xfrm>
-          <a:prstGeom prst="rect">
-            <a:avLst/>
-          </a:prstGeom>
-          <a:noFill/>
-          <a:ln/>
-        </p:spPr>
-        <p:txBody>
-          <a:bodyPr wrap="square" lIns="0" tIns="0" rIns="0" bIns="0" rtlCol="0" anchor="ctr"/>
-          <a:lstStyle/>
-          <a:p>
-            <a:pPr indent="0" marL="0">
-              <a:buNone/>
-            </a:pPr>
-            <a:r>
-              <a:rPr lang="en-US" sz="1600" dirty="0">
-                <a:solidFill>
-                  <a:schemeClr val="tx2"/>
-                </a:solidFill>
-                <a:latin typeface="Calibri" pitchFamily="34" charset="0"/>
-                <a:ea typeface="Calibri" pitchFamily="34" charset="-122"/>
-                <a:cs typeface="Calibri" pitchFamily="34" charset="-120"/>
-              </a:rPr>
-              <a:t>Hiệu quả theo thiết kế: QLoRA chỉ train 7,37 triệu tham số (0,196%), adapter 29,5 MB, trên một GPU NVIDIA L4 — không full fine-tuning.</a:t>
-            </a:r>
-            <a:endParaRPr lang="en-US" sz="1600" dirty="0"/>
           </a:p>
         </p:txBody>
       </p:sp>
@@ -17647,7 +19831,7 @@
             <a:pPr algn="r"/>
             <a:fld id="{F7021451-1387-4CA6-816F-3879F97B5CBC}" type="slidenum">
               <a:rPr b="0" lang="en-US"/>
-              <a:t>2</a:t>
+              <a:t>20</a:t>
             </a:fld>
             <a:endParaRPr lang="en-US"/>
           </a:p>
@@ -17661,9 +19845,9 @@
 </p:sld>
 </file>
 
-<file path=ppt/slides/slide20.xml><?xml version="1.0" encoding="utf-8"?>
+<file path=ppt/slides/slide21.xml><?xml version="1.0" encoding="utf-8"?>
 <p:sld xmlns:a="http://schemas.openxmlformats.org/drawingml/2006/main" xmlns:r="http://schemas.openxmlformats.org/officeDocument/2006/relationships" xmlns:p="http://schemas.openxmlformats.org/presentationml/2006/main">
-  <p:cSld name="Slide 20">
+  <p:cSld name="Slide 21">
     <p:spTree>
       <p:nvGrpSpPr>
         <p:cNvPr id="1" name=""/>
@@ -18479,7 +20663,7 @@
                           <a:ea typeface="Calibri" pitchFamily="34" charset="-122"/>
                           <a:cs typeface="Calibri" pitchFamily="34" charset="-120"/>
                         </a:rPr>
-                        <a:t>4, 13</a:t>
+                        <a:t>4, 14</a:t>
                       </a:r>
                       <a:endParaRPr lang="en-US" sz="1400" dirty="0">
                         <a:latin typeface="Calibri" charset="0"/>
@@ -18873,7 +21057,7 @@
                           <a:ea typeface="Calibri" pitchFamily="34" charset="-122"/>
                           <a:cs typeface="Calibri" pitchFamily="34" charset="-120"/>
                         </a:rPr>
-                        <a:t>9, 12</a:t>
+                        <a:t>9, 12–13</a:t>
                       </a:r>
                       <a:endParaRPr lang="en-US" sz="1400" dirty="0">
                         <a:latin typeface="Calibri" charset="0"/>
@@ -19070,7 +21254,7 @@
                           <a:ea typeface="Calibri" pitchFamily="34" charset="-122"/>
                           <a:cs typeface="Calibri" pitchFamily="34" charset="-120"/>
                         </a:rPr>
-                        <a:t>10–17</a:t>
+                        <a:t>10–18</a:t>
                       </a:r>
                       <a:endParaRPr lang="en-US" sz="1400" dirty="0">
                         <a:latin typeface="Calibri" charset="0"/>
@@ -19634,7 +21818,7 @@
         <p:spPr>
           <a:xfrm>
             <a:off x="548640" y="1325880"/>
-            <a:ext cx="8138160" cy="4641536"/>
+            <a:ext cx="7589520" cy="4328624"/>
           </a:xfrm>
           <a:prstGeom prst="rect">
             <a:avLst/>
@@ -19649,12 +21833,12 @@
         </p:nvSpPr>
         <p:spPr>
           <a:xfrm>
-            <a:off x="9052560" y="1325880"/>
-            <a:ext cx="2590495" cy="2240280"/>
+            <a:off x="8503920" y="1325880"/>
+            <a:ext cx="3139135" cy="1691640"/>
           </a:xfrm>
           <a:prstGeom prst="roundRect">
             <a:avLst>
-              <a:gd name="adj" fmla="val 3265"/>
+              <a:gd name="adj" fmla="val 4324"/>
             </a:avLst>
           </a:prstGeom>
           <a:solidFill>
@@ -19676,8 +21860,8 @@
         </p:nvSpPr>
         <p:spPr>
           <a:xfrm>
-            <a:off x="9281160" y="1463040"/>
-            <a:ext cx="2133295" cy="365760"/>
+            <a:off x="8732520" y="1417320"/>
+            <a:ext cx="2681935" cy="365760"/>
           </a:xfrm>
           <a:prstGeom prst="rect">
             <a:avLst/>
@@ -19715,8 +21899,8 @@
         </p:nvSpPr>
         <p:spPr>
           <a:xfrm>
-            <a:off x="9281160" y="1874520"/>
-            <a:ext cx="2133295" cy="1600200"/>
+            <a:off x="8732520" y="1783080"/>
+            <a:ext cx="2681935" cy="1188720"/>
           </a:xfrm>
           <a:prstGeom prst="rect">
             <a:avLst/>
@@ -19730,13 +21914,13 @@
           <a:p>
             <a:pPr marL="177800" indent="-177800">
               <a:spcAft>
-                <a:spcPts val="600"/>
+                <a:spcPts val="200"/>
               </a:spcAft>
               <a:buSzPct val="100000"/>
               <a:buChar char="•"/>
             </a:pPr>
             <a:r>
-              <a:rPr lang="en-US" sz="1400" dirty="0">
+              <a:rPr lang="en-US" sz="1200" dirty="0">
                 <a:solidFill>
                   <a:schemeClr val="tx1"/>
                 </a:solidFill>
@@ -19746,18 +21930,18 @@
               </a:rPr>
               <a:t>LoRA r = 16, α = 32 trên q, k, v, o</a:t>
             </a:r>
-            <a:endParaRPr lang="en-US" sz="1400" dirty="0"/>
+            <a:endParaRPr lang="en-US" sz="1200" dirty="0"/>
           </a:p>
           <a:p>
             <a:pPr marL="177800" indent="-177800">
               <a:spcAft>
-                <a:spcPts val="600"/>
+                <a:spcPts val="200"/>
               </a:spcAft>
               <a:buSzPct val="100000"/>
               <a:buChar char="•"/>
             </a:pPr>
             <a:r>
-              <a:rPr lang="en-US" sz="1400" dirty="0">
+              <a:rPr lang="en-US" sz="1200" dirty="0">
                 <a:solidFill>
                   <a:schemeClr val="tx1"/>
                 </a:solidFill>
@@ -19765,20 +21949,20 @@
                 <a:ea typeface="Calibri" pitchFamily="34" charset="-122"/>
                 <a:cs typeface="Calibri" pitchFamily="34" charset="-120"/>
               </a:rPr>
-              <a:t>7.372.800 tham số = 0,196%</a:t>
+              <a:t>7.372.800 tham số = 0,196% · 29,5 MB</a:t>
             </a:r>
-            <a:endParaRPr lang="en-US" sz="1400" dirty="0"/>
+            <a:endParaRPr lang="en-US" sz="1200" dirty="0"/>
           </a:p>
           <a:p>
             <a:pPr marL="177800" indent="-177800">
               <a:spcAft>
-                <a:spcPts val="600"/>
+                <a:spcPts val="200"/>
               </a:spcAft>
               <a:buSzPct val="100000"/>
               <a:buChar char="•"/>
             </a:pPr>
             <a:r>
-              <a:rPr lang="en-US" sz="1400" dirty="0">
+              <a:rPr lang="en-US" sz="1200" dirty="0">
                 <a:solidFill>
                   <a:schemeClr val="tx1"/>
                 </a:solidFill>
@@ -19786,9 +21970,9 @@
                 <a:ea typeface="Calibri" pitchFamily="34" charset="-122"/>
                 <a:cs typeface="Calibri" pitchFamily="34" charset="-120"/>
               </a:rPr>
-              <a:t>Adapter 29,5 MB</a:t>
+              <a:t>Còn lại đóng băng, LLM 4-bit NF4</a:t>
             </a:r>
-            <a:endParaRPr lang="en-US" sz="1400" dirty="0"/>
+            <a:endParaRPr lang="en-US" sz="1200" dirty="0"/>
           </a:p>
         </p:txBody>
       </p:sp>
@@ -19800,12 +21984,12 @@
         </p:nvSpPr>
         <p:spPr>
           <a:xfrm>
-            <a:off x="9052560" y="3749040"/>
-            <a:ext cx="2590495" cy="2514600"/>
+            <a:off x="8503920" y="3154680"/>
+            <a:ext cx="3139135" cy="3108960"/>
           </a:xfrm>
           <a:prstGeom prst="roundRect">
             <a:avLst>
-              <a:gd name="adj" fmla="val 2909"/>
+              <a:gd name="adj" fmla="val 2353"/>
             </a:avLst>
           </a:prstGeom>
           <a:solidFill>
@@ -19827,8 +22011,8 @@
         </p:nvSpPr>
         <p:spPr>
           <a:xfrm>
-            <a:off x="9281160" y="3886200"/>
-            <a:ext cx="2133295" cy="365760"/>
+            <a:off x="8732520" y="3246120"/>
+            <a:ext cx="2681935" cy="365760"/>
           </a:xfrm>
           <a:prstGeom prst="rect">
             <a:avLst/>
@@ -19852,7 +22036,7 @@
                 <a:ea typeface="Calibri" pitchFamily="34" charset="-122"/>
                 <a:cs typeface="Calibri" pitchFamily="34" charset="-120"/>
               </a:rPr>
-              <a:t>Đóng băng</a:t>
+              <a:t>Luồng dữ liệu (vào → ra)</a:t>
             </a:r>
             <a:endParaRPr lang="en-US" sz="1600" dirty="0"/>
           </a:p>
@@ -19860,14 +22044,14 @@
       </p:sp>
       <p:sp>
         <p:nvSpPr>
-          <p:cNvPr id="11" name="list_27"/>
+          <p:cNvPr id="11" name="text_27"/>
           <p:cNvSpPr txBox="1"/>
           <p:nvPr/>
         </p:nvSpPr>
         <p:spPr>
           <a:xfrm>
-            <a:off x="9281160" y="4297680"/>
-            <a:ext cx="2133295" cy="1828800"/>
+            <a:off x="8732520" y="3639312"/>
+            <a:ext cx="2681935" cy="2103120"/>
           </a:xfrm>
           <a:prstGeom prst="rect">
             <a:avLst/>
@@ -19879,15 +22063,25 @@
           <a:bodyPr wrap="square" lIns="0" tIns="0" rIns="0" bIns="0" rtlCol="0" anchor="t"/>
           <a:lstStyle/>
           <a:p>
-            <a:pPr marL="177800" indent="-177800">
-              <a:spcAft>
-                <a:spcPts val="600"/>
-              </a:spcAft>
-              <a:buSzPct val="100000"/>
-              <a:buChar char="•"/>
+            <a:pPr indent="0" marL="0">
+              <a:buNone/>
             </a:pPr>
             <a:r>
-              <a:rPr lang="en-US" sz="1400" dirty="0">
+              <a:rPr lang="en-US" sz="1150" b="1" dirty="0">
+                <a:solidFill>
+                  <a:srgbClr val="13294B"/>
+                </a:solidFill>
+                <a:latin typeface="Calibri" pitchFamily="34" charset="0"/>
+                <a:ea typeface="Calibri" pitchFamily="34" charset="-122"/>
+                <a:cs typeface="Calibri" pitchFamily="34" charset="-120"/>
+              </a:rPr>
+              <a:t>1 · Ảnh → ViT: </a:t>
+            </a:r>
+            <a:pPr indent="0" marL="0">
+              <a:buNone/>
+            </a:pPr>
+            <a:r>
+              <a:rPr lang="en-US" sz="1150" dirty="0">
                 <a:solidFill>
                   <a:schemeClr val="tx1"/>
                 </a:solidFill>
@@ -19895,20 +22089,16 @@
                 <a:ea typeface="Calibri" pitchFamily="34" charset="-122"/>
                 <a:cs typeface="Calibri" pitchFamily="34" charset="-120"/>
               </a:rPr>
-              <a:t>ViT (32 khối) + patch merger</a:t>
+              <a:t>≤ 401.408 px → patch 14×14 → 32 khối</a:t>
             </a:r>
-            <a:endParaRPr lang="en-US" sz="1400" dirty="0"/>
-          </a:p>
-          <a:p>
-            <a:pPr marL="177800" indent="-177800">
-              <a:spcAft>
-                <a:spcPts val="600"/>
-              </a:spcAft>
-              <a:buSzPct val="100000"/>
-              <a:buChar char="•"/>
+            <a:endParaRPr lang="en-US" sz="1150" dirty="0"/>
+          </a:p>
+          <a:p>
+            <a:pPr indent="0" marL="0">
+              <a:buNone/>
             </a:pPr>
             <a:r>
-              <a:rPr lang="en-US" sz="1400" dirty="0">
+              <a:rPr lang="en-US" sz="300" dirty="0">
                 <a:solidFill>
                   <a:schemeClr val="tx1"/>
                 </a:solidFill>
@@ -19916,20 +22106,30 @@
                 <a:ea typeface="Calibri" pitchFamily="34" charset="-122"/>
                 <a:cs typeface="Calibri" pitchFamily="34" charset="-120"/>
               </a:rPr>
-              <a:t>LLM decoder 36 lớp, 4-bit NF4</a:t>
+              <a:t> </a:t>
             </a:r>
-            <a:endParaRPr lang="en-US" sz="1400" dirty="0"/>
-          </a:p>
-          <a:p>
-            <a:pPr marL="177800" indent="-177800">
-              <a:spcAft>
-                <a:spcPts val="600"/>
-              </a:spcAft>
-              <a:buSzPct val="100000"/>
-              <a:buChar char="•"/>
+            <a:endParaRPr lang="en-US" sz="1150" dirty="0"/>
+          </a:p>
+          <a:p>
+            <a:pPr indent="0" marL="0">
+              <a:buNone/>
             </a:pPr>
             <a:r>
-              <a:rPr lang="en-US" sz="1400" dirty="0">
+              <a:rPr lang="en-US" sz="1150" b="1" dirty="0">
+                <a:solidFill>
+                  <a:srgbClr val="13294B"/>
+                </a:solidFill>
+                <a:latin typeface="Calibri" pitchFamily="34" charset="0"/>
+                <a:ea typeface="Calibri" pitchFamily="34" charset="-122"/>
+                <a:cs typeface="Calibri" pitchFamily="34" charset="-120"/>
+              </a:rPr>
+              <a:t>2 · Patch merger: </a:t>
+            </a:r>
+            <a:pPr indent="0" marL="0">
+              <a:buNone/>
+            </a:pPr>
+            <a:r>
+              <a:rPr lang="en-US" sz="1150" dirty="0">
                 <a:solidFill>
                   <a:schemeClr val="tx1"/>
                 </a:solidFill>
@@ -19937,9 +22137,144 @@
                 <a:ea typeface="Calibri" pitchFamily="34" charset="-122"/>
                 <a:cs typeface="Calibri" pitchFamily="34" charset="-120"/>
               </a:rPr>
-              <a:t>256–512 token ảnh mỗi ảnh</a:t>
+              <a:t>2×2 patch → 1 token (2048 chiều) → 256–512 token ảnh</a:t>
             </a:r>
-            <a:endParaRPr lang="en-US" sz="1400" dirty="0"/>
+            <a:endParaRPr lang="en-US" sz="1150" dirty="0"/>
+          </a:p>
+          <a:p>
+            <a:pPr indent="0" marL="0">
+              <a:buNone/>
+            </a:pPr>
+            <a:r>
+              <a:rPr lang="en-US" sz="300" dirty="0">
+                <a:solidFill>
+                  <a:schemeClr val="tx1"/>
+                </a:solidFill>
+                <a:latin typeface="Calibri" pitchFamily="34" charset="0"/>
+                <a:ea typeface="Calibri" pitchFamily="34" charset="-122"/>
+                <a:cs typeface="Calibri" pitchFamily="34" charset="-120"/>
+              </a:rPr>
+              <a:t> </a:t>
+            </a:r>
+            <a:endParaRPr lang="en-US" sz="1150" dirty="0"/>
+          </a:p>
+          <a:p>
+            <a:pPr indent="0" marL="0">
+              <a:buNone/>
+            </a:pPr>
+            <a:r>
+              <a:rPr lang="en-US" sz="1150" b="1" dirty="0">
+                <a:solidFill>
+                  <a:srgbClr val="13294B"/>
+                </a:solidFill>
+                <a:latin typeface="Calibri" pitchFamily="34" charset="0"/>
+                <a:ea typeface="Calibri" pitchFamily="34" charset="-122"/>
+                <a:cs typeface="Calibri" pitchFamily="34" charset="-120"/>
+              </a:rPr>
+              <a:t>3 · Prompt P0: </a:t>
+            </a:r>
+            <a:pPr indent="0" marL="0">
+              <a:buNone/>
+            </a:pPr>
+            <a:r>
+              <a:rPr lang="en-US" sz="1150" dirty="0">
+                <a:solidFill>
+                  <a:schemeClr val="tx1"/>
+                </a:solidFill>
+                <a:latin typeface="Calibri" pitchFamily="34" charset="0"/>
+                <a:ea typeface="Calibri" pitchFamily="34" charset="-122"/>
+                <a:cs typeface="Calibri" pitchFamily="34" charset="-120"/>
+              </a:rPr>
+              <a:t>chat template + token ảnh + câu hỏi tiếng Việt</a:t>
+            </a:r>
+            <a:endParaRPr lang="en-US" sz="1150" dirty="0"/>
+          </a:p>
+          <a:p>
+            <a:pPr indent="0" marL="0">
+              <a:buNone/>
+            </a:pPr>
+            <a:r>
+              <a:rPr lang="en-US" sz="300" dirty="0">
+                <a:solidFill>
+                  <a:schemeClr val="tx1"/>
+                </a:solidFill>
+                <a:latin typeface="Calibri" pitchFamily="34" charset="0"/>
+                <a:ea typeface="Calibri" pitchFamily="34" charset="-122"/>
+                <a:cs typeface="Calibri" pitchFamily="34" charset="-120"/>
+              </a:rPr>
+              <a:t> </a:t>
+            </a:r>
+            <a:endParaRPr lang="en-US" sz="1150" dirty="0"/>
+          </a:p>
+          <a:p>
+            <a:pPr indent="0" marL="0">
+              <a:buNone/>
+            </a:pPr>
+            <a:r>
+              <a:rPr lang="en-US" sz="1150" b="1" dirty="0">
+                <a:solidFill>
+                  <a:srgbClr val="13294B"/>
+                </a:solidFill>
+                <a:latin typeface="Calibri" pitchFamily="34" charset="0"/>
+                <a:ea typeface="Calibri" pitchFamily="34" charset="-122"/>
+                <a:cs typeface="Calibri" pitchFamily="34" charset="-120"/>
+              </a:rPr>
+              <a:t>4 · Decoder (+LoRA): </a:t>
+            </a:r>
+            <a:pPr indent="0" marL="0">
+              <a:buNone/>
+            </a:pPr>
+            <a:r>
+              <a:rPr lang="en-US" sz="1150" dirty="0">
+                <a:solidFill>
+                  <a:schemeClr val="tx1"/>
+                </a:solidFill>
+                <a:latin typeface="Calibri" pitchFamily="34" charset="0"/>
+                <a:ea typeface="Calibri" pitchFamily="34" charset="-122"/>
+                <a:cs typeface="Calibri" pitchFamily="34" charset="-120"/>
+              </a:rPr>
+              <a:t>sinh tham lam, ≤ 32 token → chuẩn hoá → EM / ANLS</a:t>
+            </a:r>
+            <a:endParaRPr lang="en-US" sz="1150" dirty="0"/>
+          </a:p>
+        </p:txBody>
+      </p:sp>
+      <p:sp>
+        <p:nvSpPr>
+          <p:cNvPr id="12" name="text_28"/>
+          <p:cNvSpPr txBox="1"/>
+          <p:nvPr/>
+        </p:nvSpPr>
+        <p:spPr>
+          <a:xfrm>
+            <a:off x="8732520" y="5760720"/>
+            <a:ext cx="2681935" cy="411480"/>
+          </a:xfrm>
+          <a:prstGeom prst="rect">
+            <a:avLst/>
+          </a:prstGeom>
+          <a:noFill/>
+          <a:ln/>
+        </p:spPr>
+        <p:txBody>
+          <a:bodyPr wrap="square" lIns="0" tIns="0" rIns="0" bIns="0" rtlCol="0" anchor="t"/>
+          <a:lstStyle/>
+          <a:p>
+            <a:pPr indent="0" marL="0">
+              <a:buNone/>
+            </a:pPr>
+            <a:r>
+              <a:rPr lang="en-US" sz="1100" i="1" dirty="0">
+                <a:solidFill>
+                  <a:srgbClr val="1C7293"/>
+                </a:solidFill>
+                <a:latin typeface="Calibri" pitchFamily="34" charset="0"/>
+                <a:ea typeface="Calibri" pitchFamily="34" charset="-122"/>
+                <a:cs typeface="Calibri" pitchFamily="34" charset="-120"/>
+              </a:rPr>
+              <a:t>Baseline không dùng OCR — OCR là cải tiến B3 (Phần 06).</a:t>
+            </a:r>
+            <a:endParaRPr lang="en-US" sz="1100" dirty="0"/>
           </a:p>
         </p:txBody>
       </p:sp>
@@ -20100,7 +22435,7 @@
       </p:sp>
       <p:pic>
         <p:nvPicPr>
-          <p:cNvPr id="5" name="figure_28" descr="b7">    </p:cNvPr>
+          <p:cNvPr id="5" name="figure_29" descr="b7">    </p:cNvPr>
           <p:cNvPicPr>
             <a:picLocks noChangeAspect="1"/>
           </p:cNvPicPr>
@@ -20124,18 +22459,18 @@
       </p:pic>
       <p:sp>
         <p:nvSpPr>
-          <p:cNvPr id="6" name="card_29"/>
+          <p:cNvPr id="6" name="card_30"/>
           <p:cNvSpPr/>
           <p:nvPr/>
         </p:nvSpPr>
         <p:spPr>
           <a:xfrm>
-            <a:off x="548640" y="3807855"/>
-            <a:ext cx="3454298" cy="2455785"/>
+            <a:off x="548640" y="3762135"/>
+            <a:ext cx="3454298" cy="1998585"/>
           </a:xfrm>
           <a:prstGeom prst="roundRect">
             <a:avLst>
-              <a:gd name="adj" fmla="val 2979"/>
+              <a:gd name="adj" fmla="val 3660"/>
             </a:avLst>
           </a:prstGeom>
           <a:solidFill>
@@ -20151,13 +22486,13 @@
       </p:sp>
       <p:sp>
         <p:nvSpPr>
-          <p:cNvPr id="7" name="text_30"/>
+          <p:cNvPr id="7" name="text_31"/>
           <p:cNvSpPr txBox="1"/>
           <p:nvPr/>
         </p:nvSpPr>
         <p:spPr>
           <a:xfrm>
-            <a:off x="777240" y="3945015"/>
+            <a:off x="777240" y="3899295"/>
             <a:ext cx="2997098" cy="365760"/>
           </a:xfrm>
           <a:prstGeom prst="rect">
@@ -20190,14 +22525,14 @@
       </p:sp>
       <p:sp>
         <p:nvSpPr>
-          <p:cNvPr id="8" name="list_31"/>
+          <p:cNvPr id="8" name="list_32"/>
           <p:cNvSpPr txBox="1"/>
           <p:nvPr/>
         </p:nvSpPr>
         <p:spPr>
           <a:xfrm>
-            <a:off x="777240" y="4356495"/>
-            <a:ext cx="2997098" cy="1815705"/>
+            <a:off x="777240" y="4310775"/>
+            <a:ext cx="2997098" cy="1358505"/>
           </a:xfrm>
           <a:prstGeom prst="rect">
             <a:avLst/>
@@ -20296,18 +22631,18 @@
       </p:sp>
       <p:sp>
         <p:nvSpPr>
-          <p:cNvPr id="9" name="card_32"/>
+          <p:cNvPr id="9" name="card_33"/>
           <p:cNvSpPr/>
           <p:nvPr/>
         </p:nvSpPr>
         <p:spPr>
           <a:xfrm>
-            <a:off x="4368698" y="3807855"/>
-            <a:ext cx="3454298" cy="2455785"/>
+            <a:off x="4368698" y="3762135"/>
+            <a:ext cx="3454298" cy="1998585"/>
           </a:xfrm>
           <a:prstGeom prst="roundRect">
             <a:avLst>
-              <a:gd name="adj" fmla="val 2979"/>
+              <a:gd name="adj" fmla="val 3660"/>
             </a:avLst>
           </a:prstGeom>
           <a:solidFill>
@@ -20323,13 +22658,13 @@
       </p:sp>
       <p:sp>
         <p:nvSpPr>
-          <p:cNvPr id="10" name="text_33"/>
+          <p:cNvPr id="10" name="text_34"/>
           <p:cNvSpPr txBox="1"/>
           <p:nvPr/>
         </p:nvSpPr>
         <p:spPr>
           <a:xfrm>
-            <a:off x="4597298" y="3945015"/>
+            <a:off x="4597298" y="3899295"/>
             <a:ext cx="2997098" cy="365760"/>
           </a:xfrm>
           <a:prstGeom prst="rect">
@@ -20362,14 +22697,14 @@
       </p:sp>
       <p:sp>
         <p:nvSpPr>
-          <p:cNvPr id="11" name="list_34"/>
+          <p:cNvPr id="11" name="list_35"/>
           <p:cNvSpPr txBox="1"/>
           <p:nvPr/>
         </p:nvSpPr>
         <p:spPr>
           <a:xfrm>
-            <a:off x="4597298" y="4356495"/>
-            <a:ext cx="2997098" cy="1815705"/>
+            <a:off x="4597298" y="4310775"/>
+            <a:ext cx="2997098" cy="1358505"/>
           </a:xfrm>
           <a:prstGeom prst="rect">
             <a:avLst/>
@@ -20447,18 +22782,18 @@
       </p:sp>
       <p:sp>
         <p:nvSpPr>
-          <p:cNvPr id="12" name="card_35"/>
+          <p:cNvPr id="12" name="card_36"/>
           <p:cNvSpPr/>
           <p:nvPr/>
         </p:nvSpPr>
         <p:spPr>
           <a:xfrm>
-            <a:off x="8188757" y="3807855"/>
-            <a:ext cx="3454298" cy="2455785"/>
+            <a:off x="8188757" y="3762135"/>
+            <a:ext cx="3454298" cy="1998585"/>
           </a:xfrm>
           <a:prstGeom prst="roundRect">
             <a:avLst>
-              <a:gd name="adj" fmla="val 2979"/>
+              <a:gd name="adj" fmla="val 3660"/>
             </a:avLst>
           </a:prstGeom>
           <a:solidFill>
@@ -20474,13 +22809,13 @@
       </p:sp>
       <p:sp>
         <p:nvSpPr>
-          <p:cNvPr id="13" name="text_36"/>
+          <p:cNvPr id="13" name="text_37"/>
           <p:cNvSpPr txBox="1"/>
           <p:nvPr/>
         </p:nvSpPr>
         <p:spPr>
           <a:xfrm>
-            <a:off x="8417357" y="3945015"/>
+            <a:off x="8417357" y="3899295"/>
             <a:ext cx="2997098" cy="365760"/>
           </a:xfrm>
           <a:prstGeom prst="rect">
@@ -20513,14 +22848,14 @@
       </p:sp>
       <p:sp>
         <p:nvSpPr>
-          <p:cNvPr id="14" name="list_37"/>
+          <p:cNvPr id="14" name="list_38"/>
           <p:cNvSpPr txBox="1"/>
           <p:nvPr/>
         </p:nvSpPr>
         <p:spPr>
           <a:xfrm>
-            <a:off x="8417357" y="4356495"/>
-            <a:ext cx="2997098" cy="1815705"/>
+            <a:off x="8417357" y="4310775"/>
+            <a:ext cx="2997098" cy="1358505"/>
           </a:xfrm>
           <a:prstGeom prst="rect">
             <a:avLst/>
@@ -20593,6 +22928,45 @@
               <a:t>Luật kết luận chốt trước mỗi run</a:t>
             </a:r>
             <a:endParaRPr lang="en-US" sz="1400" dirty="0"/>
+          </a:p>
+        </p:txBody>
+      </p:sp>
+      <p:sp>
+        <p:nvSpPr>
+          <p:cNvPr id="15" name="text_39"/>
+          <p:cNvSpPr txBox="1"/>
+          <p:nvPr/>
+        </p:nvSpPr>
+        <p:spPr>
+          <a:xfrm>
+            <a:off x="548640" y="5833872"/>
+            <a:ext cx="11094415" cy="548640"/>
+          </a:xfrm>
+          <a:prstGeom prst="rect">
+            <a:avLst/>
+          </a:prstGeom>
+          <a:noFill/>
+          <a:ln/>
+        </p:spPr>
+        <p:txBody>
+          <a:bodyPr wrap="square" lIns="0" tIns="0" rIns="0" bIns="0" rtlCol="0" anchor="b"/>
+          <a:lstStyle/>
+          <a:p>
+            <a:pPr indent="0" marL="0">
+              <a:buNone/>
+            </a:pPr>
+            <a:r>
+              <a:rPr lang="en-US" sz="1000" dirty="0">
+                <a:solidFill>
+                  <a:schemeClr val="accent3"/>
+                </a:solidFill>
+                <a:latin typeface="Calibri" pitchFamily="34" charset="0"/>
+                <a:ea typeface="Calibri" pitchFamily="34" charset="-122"/>
+                <a:cs typeface="Calibri" pitchFamily="34" charset="-120"/>
+              </a:rPr>
+              <a:t>EM = Exact Match (khớp tuyệt đối) · VQA-Acc = VQA Accuracy (min(số gold khớp / 3, 1); = EM khi chỉ có 1 gold) · ANLS = Average Normalized Levenshtein Similarity (ngưỡng 0,5) · F1 = F1 theo token · bf16 = bfloat16 · NF4 = 4-bit NormalFloat (QLoRA) · CI95 = khoảng tin cậy 95% · McNemar = kiểm định ghép cặp trên các câu chỉ một run đúng</a:t>
+            </a:r>
+            <a:endParaRPr lang="en-US" sz="1000" dirty="0"/>
           </a:p>
         </p:txBody>
       </p:sp>
@@ -20753,7 +23127,7 @@
       </p:sp>
       <p:graphicFrame>
         <p:nvGraphicFramePr>
-          <p:cNvPr id="5" name="chart_38" descr=""/>
+          <p:cNvPr id="5" name="chart_40" descr=""/>
           <p:cNvGraphicFramePr/>
           <p:nvPr/>
         </p:nvGraphicFramePr>
@@ -20769,7 +23143,7 @@
       </p:graphicFrame>
       <p:sp>
         <p:nvSpPr>
-          <p:cNvPr id="6" name="card_39"/>
+          <p:cNvPr id="6" name="card_41"/>
           <p:cNvSpPr/>
           <p:nvPr/>
         </p:nvSpPr>
@@ -20796,7 +23170,7 @@
       </p:sp>
       <p:sp>
         <p:nvSpPr>
-          <p:cNvPr id="7" name="text_40"/>
+          <p:cNvPr id="7" name="text_42"/>
           <p:cNvSpPr txBox="1"/>
           <p:nvPr/>
         </p:nvSpPr>
@@ -20835,7 +23209,7 @@
       </p:sp>
       <p:sp>
         <p:nvSpPr>
-          <p:cNvPr id="8" name="text_41"/>
+          <p:cNvPr id="8" name="text_43"/>
           <p:cNvSpPr txBox="1"/>
           <p:nvPr/>
         </p:nvSpPr>
@@ -20874,7 +23248,7 @@
       </p:sp>
       <p:sp>
         <p:nvSpPr>
-          <p:cNvPr id="9" name="card_42"/>
+          <p:cNvPr id="9" name="card_44"/>
           <p:cNvSpPr/>
           <p:nvPr/>
         </p:nvSpPr>
@@ -20901,7 +23275,7 @@
       </p:sp>
       <p:sp>
         <p:nvSpPr>
-          <p:cNvPr id="10" name="text_43"/>
+          <p:cNvPr id="10" name="text_45"/>
           <p:cNvSpPr txBox="1"/>
           <p:nvPr/>
         </p:nvSpPr>
@@ -20940,7 +23314,7 @@
       </p:sp>
       <p:sp>
         <p:nvSpPr>
-          <p:cNvPr id="11" name="list_44"/>
+          <p:cNvPr id="11" name="list_46"/>
           <p:cNvSpPr txBox="1"/>
           <p:nvPr/>
         </p:nvSpPr>
@@ -21180,7 +23554,7 @@
       </p:sp>
       <p:graphicFrame>
         <p:nvGraphicFramePr>
-          <p:cNvPr id="9" name="table_45"/>
+          <p:cNvPr id="9" name="table_47"/>
           <p:cNvGraphicFramePr>
             <a:graphicFrameLocks noGrp="1"/>
           </p:cNvGraphicFramePr>
@@ -22272,7 +24646,7 @@
       </p:graphicFrame>
       <p:sp>
         <p:nvSpPr>
-          <p:cNvPr id="6" name="card_46"/>
+          <p:cNvPr id="6" name="card_48"/>
           <p:cNvSpPr/>
           <p:nvPr/>
         </p:nvSpPr>
@@ -22299,7 +24673,7 @@
       </p:sp>
       <p:sp>
         <p:nvSpPr>
-          <p:cNvPr id="7" name="text_47"/>
+          <p:cNvPr id="7" name="text_49"/>
           <p:cNvSpPr txBox="1"/>
           <p:nvPr/>
         </p:nvSpPr>
@@ -22338,7 +24712,7 @@
       </p:sp>
       <p:graphicFrame>
         <p:nvGraphicFramePr>
-          <p:cNvPr id="8" name="chart_48" descr=""/>
+          <p:cNvPr id="8" name="chart_50" descr=""/>
           <p:cNvGraphicFramePr/>
           <p:nvPr/>
         </p:nvGraphicFramePr>
@@ -22354,7 +24728,7 @@
       </p:graphicFrame>
       <p:sp>
         <p:nvSpPr>
-          <p:cNvPr id="9" name="card_49"/>
+          <p:cNvPr id="9" name="card_51"/>
           <p:cNvSpPr/>
           <p:nvPr/>
         </p:nvSpPr>
@@ -22381,7 +24755,7 @@
       </p:sp>
       <p:sp>
         <p:nvSpPr>
-          <p:cNvPr id="10" name="text_50"/>
+          <p:cNvPr id="10" name="text_52"/>
           <p:cNvSpPr txBox="1"/>
           <p:nvPr/>
         </p:nvSpPr>
@@ -22420,7 +24794,7 @@
       </p:sp>
       <p:sp>
         <p:nvSpPr>
-          <p:cNvPr id="11" name="list_51"/>
+          <p:cNvPr id="11" name="list_53"/>
           <p:cNvSpPr txBox="1"/>
           <p:nvPr/>
         </p:nvSpPr>
@@ -22681,7 +25055,7 @@
       </p:sp>
       <p:graphicFrame>
         <p:nvGraphicFramePr>
-          <p:cNvPr id="10" name="table_52"/>
+          <p:cNvPr id="10" name="table_54"/>
           <p:cNvGraphicFramePr>
             <a:graphicFrameLocks noGrp="1"/>
           </p:cNvGraphicFramePr>
@@ -23137,7 +25511,7 @@
                           <a:ea typeface="Calibri" pitchFamily="34" charset="-122"/>
                           <a:cs typeface="Calibri" pitchFamily="34" charset="-120"/>
                         </a:rPr>
-                        <a:t>B1 · Qwen2.5-VL-3B · 4-bit · 512 token</a:t>
+                        <a:t>B1 · Qwen2.5-VL-3B [1] · 4-bit · 512 token</a:t>
                       </a:r>
                       <a:endParaRPr lang="en-US" sz="1400" dirty="0">
                         <a:latin typeface="Calibri" charset="0"/>
@@ -23529,7 +25903,7 @@
                           <a:ea typeface="Calibri" pitchFamily="34" charset="-122"/>
                           <a:cs typeface="Calibri" pitchFamily="34" charset="-120"/>
                         </a:rPr>
-                        <a:t>R1b · Qwen2-VL-7B · 4-bit · 512 token</a:t>
+                        <a:t>R1b · Qwen2-VL-7B [2] · 4-bit · 512 token</a:t>
                       </a:r>
                       <a:endParaRPr lang="en-US" sz="1400" dirty="0">
                         <a:latin typeface="Calibri" charset="0"/>
@@ -23921,7 +26295,7 @@
                           <a:ea typeface="Calibri" pitchFamily="34" charset="-122"/>
                           <a:cs typeface="Calibri" pitchFamily="34" charset="-120"/>
                         </a:rPr>
-                        <a:t>R1 · Qwen2-VL-7B · bf16 · đủ độ phân giải</a:t>
+                        <a:t>R1 · Qwen2-VL-7B [2] · bf16 · đủ độ phân giải</a:t>
                       </a:r>
                       <a:endParaRPr lang="en-US" sz="1400" dirty="0">
                         <a:latin typeface="Calibri" charset="0"/>
@@ -24313,7 +26687,7 @@
                           <a:ea typeface="Calibri" pitchFamily="34" charset="-122"/>
                           <a:cs typeface="Calibri" pitchFamily="34" charset="-120"/>
                         </a:rPr>
-                        <a:t>Paper Table 7 · “QwenVL-7b” (100 câu)</a:t>
+                        <a:t>Paper ViTextVQA [3] Table 7 · “QwenVL-7b” (100 câu)</a:t>
                       </a:r>
                       <a:endParaRPr lang="en-US" sz="1400" dirty="0">
                         <a:latin typeface="Calibri" charset="0"/>
@@ -24693,18 +27067,18 @@
       </p:graphicFrame>
       <p:sp>
         <p:nvSpPr>
-          <p:cNvPr id="6" name="card_53"/>
+          <p:cNvPr id="6" name="card_55"/>
           <p:cNvSpPr/>
           <p:nvPr/>
         </p:nvSpPr>
         <p:spPr>
           <a:xfrm>
-            <a:off x="548640" y="4114800"/>
-            <a:ext cx="3454298" cy="1783080"/>
+            <a:off x="548640" y="4023360"/>
+            <a:ext cx="3454298" cy="1691640"/>
           </a:xfrm>
           <a:prstGeom prst="roundRect">
             <a:avLst>
-              <a:gd name="adj" fmla="val 4103"/>
+              <a:gd name="adj" fmla="val 4324"/>
             </a:avLst>
           </a:prstGeom>
           <a:solidFill>
@@ -24720,13 +27094,13 @@
       </p:sp>
       <p:sp>
         <p:nvSpPr>
-          <p:cNvPr id="7" name="text_54"/>
+          <p:cNvPr id="7" name="text_56"/>
           <p:cNvSpPr txBox="1"/>
           <p:nvPr/>
         </p:nvSpPr>
         <p:spPr>
           <a:xfrm>
-            <a:off x="777240" y="4251960"/>
+            <a:off x="777240" y="4160520"/>
             <a:ext cx="2997098" cy="411480"/>
           </a:xfrm>
           <a:prstGeom prst="rect">
@@ -24759,14 +27133,14 @@
       </p:sp>
       <p:sp>
         <p:nvSpPr>
-          <p:cNvPr id="8" name="text_55"/>
+          <p:cNvPr id="8" name="text_57"/>
           <p:cNvSpPr txBox="1"/>
           <p:nvPr/>
         </p:nvSpPr>
         <p:spPr>
           <a:xfrm>
-            <a:off x="777240" y="4709160"/>
-            <a:ext cx="2997098" cy="1051560"/>
+            <a:off x="777240" y="4617720"/>
+            <a:ext cx="2997098" cy="960120"/>
           </a:xfrm>
           <a:prstGeom prst="rect">
             <a:avLst/>
@@ -24798,18 +27172,18 @@
       </p:sp>
       <p:sp>
         <p:nvSpPr>
-          <p:cNvPr id="9" name="card_56"/>
+          <p:cNvPr id="9" name="card_58"/>
           <p:cNvSpPr/>
           <p:nvPr/>
         </p:nvSpPr>
         <p:spPr>
           <a:xfrm>
-            <a:off x="4368698" y="4114800"/>
-            <a:ext cx="3454298" cy="1783080"/>
+            <a:off x="4368698" y="4023360"/>
+            <a:ext cx="3454298" cy="1691640"/>
           </a:xfrm>
           <a:prstGeom prst="roundRect">
             <a:avLst>
-              <a:gd name="adj" fmla="val 4103"/>
+              <a:gd name="adj" fmla="val 4324"/>
             </a:avLst>
           </a:prstGeom>
           <a:solidFill>
@@ -24825,13 +27199,13 @@
       </p:sp>
       <p:sp>
         <p:nvSpPr>
-          <p:cNvPr id="10" name="text_57"/>
+          <p:cNvPr id="10" name="text_59"/>
           <p:cNvSpPr txBox="1"/>
           <p:nvPr/>
         </p:nvSpPr>
         <p:spPr>
           <a:xfrm>
-            <a:off x="4597298" y="4251960"/>
+            <a:off x="4597298" y="4160520"/>
             <a:ext cx="2997098" cy="411480"/>
           </a:xfrm>
           <a:prstGeom prst="rect">
@@ -24864,14 +27238,14 @@
       </p:sp>
       <p:sp>
         <p:nvSpPr>
-          <p:cNvPr id="11" name="text_58"/>
+          <p:cNvPr id="11" name="text_60"/>
           <p:cNvSpPr txBox="1"/>
           <p:nvPr/>
         </p:nvSpPr>
         <p:spPr>
           <a:xfrm>
-            <a:off x="4597298" y="4709160"/>
-            <a:ext cx="2997098" cy="1051560"/>
+            <a:off x="4597298" y="4617720"/>
+            <a:ext cx="2997098" cy="960120"/>
           </a:xfrm>
           <a:prstGeom prst="rect">
             <a:avLst/>
@@ -24903,18 +27277,18 @@
       </p:sp>
       <p:sp>
         <p:nvSpPr>
-          <p:cNvPr id="12" name="card_59"/>
+          <p:cNvPr id="12" name="card_61"/>
           <p:cNvSpPr/>
           <p:nvPr/>
         </p:nvSpPr>
         <p:spPr>
           <a:xfrm>
-            <a:off x="8188757" y="4114800"/>
-            <a:ext cx="3454298" cy="1783080"/>
+            <a:off x="8188757" y="4023360"/>
+            <a:ext cx="3454298" cy="1691640"/>
           </a:xfrm>
           <a:prstGeom prst="roundRect">
             <a:avLst>
-              <a:gd name="adj" fmla="val 4103"/>
+              <a:gd name="adj" fmla="val 4324"/>
             </a:avLst>
           </a:prstGeom>
           <a:solidFill>
@@ -24930,13 +27304,13 @@
       </p:sp>
       <p:sp>
         <p:nvSpPr>
-          <p:cNvPr id="13" name="text_60"/>
+          <p:cNvPr id="13" name="text_62"/>
           <p:cNvSpPr txBox="1"/>
           <p:nvPr/>
         </p:nvSpPr>
         <p:spPr>
           <a:xfrm>
-            <a:off x="8417357" y="4251960"/>
+            <a:off x="8417357" y="4160520"/>
             <a:ext cx="2997098" cy="411480"/>
           </a:xfrm>
           <a:prstGeom prst="rect">
@@ -24969,14 +27343,14 @@
       </p:sp>
       <p:sp>
         <p:nvSpPr>
-          <p:cNvPr id="14" name="text_61"/>
+          <p:cNvPr id="14" name="text_63"/>
           <p:cNvSpPr txBox="1"/>
           <p:nvPr/>
         </p:nvSpPr>
         <p:spPr>
           <a:xfrm>
-            <a:off x="8417357" y="4709160"/>
-            <a:ext cx="2997098" cy="1051560"/>
+            <a:off x="8417357" y="4617720"/>
+            <a:ext cx="2997098" cy="960120"/>
           </a:xfrm>
           <a:prstGeom prst="rect">
             <a:avLst/>
@@ -25003,6 +27377,45 @@
               <a:t>n = 100 → ±9 EM; B1 đã nhất quán với nó. Quyết định: giữ Qwen2.5-VL-3B</a:t>
             </a:r>
             <a:endParaRPr lang="en-US" sz="1400" dirty="0"/>
+          </a:p>
+        </p:txBody>
+      </p:sp>
+      <p:sp>
+        <p:nvSpPr>
+          <p:cNvPr id="15" name="text_64"/>
+          <p:cNvSpPr txBox="1"/>
+          <p:nvPr/>
+        </p:nvSpPr>
+        <p:spPr>
+          <a:xfrm>
+            <a:off x="548640" y="5806440"/>
+            <a:ext cx="11094415" cy="566928"/>
+          </a:xfrm>
+          <a:prstGeom prst="rect">
+            <a:avLst/>
+          </a:prstGeom>
+          <a:noFill/>
+          <a:ln/>
+        </p:spPr>
+        <p:txBody>
+          <a:bodyPr wrap="square" lIns="0" tIns="0" rIns="0" bIns="0" rtlCol="0" anchor="b"/>
+          <a:lstStyle/>
+          <a:p>
+            <a:pPr indent="0" marL="0">
+              <a:buNone/>
+            </a:pPr>
+            <a:r>
+              <a:rPr lang="en-US" sz="1000" dirty="0">
+                <a:solidFill>
+                  <a:schemeClr val="accent3"/>
+                </a:solidFill>
+                <a:latin typeface="Calibri" pitchFamily="34" charset="0"/>
+                <a:ea typeface="Calibri" pitchFamily="34" charset="-122"/>
+                <a:cs typeface="Calibri" pitchFamily="34" charset="-120"/>
+              </a:rPr>
+              <a:t>[1] Bai và cs., Qwen2.5-VL Technical Report, arXiv:2502.13923, 2025 · [2] Wang và cs., Qwen2-VL, arXiv:2409.12191, 2024 · [3] Nguyen và cs., ViTextVQA, arXiv:2404.10652, 2024 (bản mở rộng: Expert Systems with Applications, 2025). Run của nhóm: experiments/W07_B1_zeroshot_…_test2000, W07_R1_…, W07_R1b_… (cùng 2.000 câu, seed 42).</a:t>
+            </a:r>
+            <a:endParaRPr lang="en-US" sz="1000" dirty="0"/>
           </a:p>
         </p:txBody>
       </p:sp>
